--- a/04-planning/roadmaps/Mesa de Servicio Roadmap Julio.pptx
+++ b/04-planning/roadmaps/Mesa de Servicio Roadmap Julio.pptx
@@ -6,7 +6,7 @@
     <p:sldMasterId id="2147483648" r:id="rId2"/>
   </p:sldMasterIdLst>
   <p:notesMasterIdLst>
-    <p:notesMasterId r:id="rId16"/>
+    <p:notesMasterId r:id="rId15"/>
   </p:notesMasterIdLst>
   <p:sldIdLst>
     <p:sldId id="257" r:id="rId3"/>
@@ -15,37 +15,36 @@
     <p:sldId id="262" r:id="rId6"/>
     <p:sldId id="259" r:id="rId7"/>
     <p:sldId id="285" r:id="rId8"/>
-    <p:sldId id="261" r:id="rId9"/>
-    <p:sldId id="284" r:id="rId10"/>
-    <p:sldId id="266" r:id="rId11"/>
-    <p:sldId id="272" r:id="rId12"/>
-    <p:sldId id="269" r:id="rId13"/>
-    <p:sldId id="267" r:id="rId14"/>
-    <p:sldId id="268" r:id="rId15"/>
+    <p:sldId id="284" r:id="rId9"/>
+    <p:sldId id="266" r:id="rId10"/>
+    <p:sldId id="272" r:id="rId11"/>
+    <p:sldId id="269" r:id="rId12"/>
+    <p:sldId id="267" r:id="rId13"/>
+    <p:sldId id="268" r:id="rId14"/>
   </p:sldIdLst>
   <p:sldSz cx="9144000" cy="5143500" type="screen16x9"/>
   <p:notesSz cx="6858000" cy="9144000"/>
   <p:embeddedFontLst>
     <p:embeddedFont>
       <p:font typeface="Reddit Sans" panose="020B0604020202020204" charset="0"/>
-      <p:regular r:id="rId17"/>
-      <p:bold r:id="rId18"/>
-      <p:italic r:id="rId19"/>
-      <p:boldItalic r:id="rId20"/>
+      <p:regular r:id="rId16"/>
+      <p:bold r:id="rId17"/>
+      <p:italic r:id="rId18"/>
+      <p:boldItalic r:id="rId19"/>
     </p:embeddedFont>
     <p:embeddedFont>
       <p:font typeface="Reddit Sans Medium" panose="020B0604020202020204" charset="0"/>
-      <p:regular r:id="rId21"/>
-      <p:bold r:id="rId22"/>
-      <p:italic r:id="rId23"/>
-      <p:boldItalic r:id="rId24"/>
+      <p:regular r:id="rId20"/>
+      <p:bold r:id="rId21"/>
+      <p:italic r:id="rId22"/>
+      <p:boldItalic r:id="rId23"/>
     </p:embeddedFont>
     <p:embeddedFont>
       <p:font typeface="Reddit Sans SemiBold" panose="020B0604020202020204" charset="0"/>
-      <p:regular r:id="rId25"/>
-      <p:bold r:id="rId26"/>
-      <p:italic r:id="rId27"/>
-      <p:boldItalic r:id="rId28"/>
+      <p:regular r:id="rId24"/>
+      <p:bold r:id="rId25"/>
+      <p:italic r:id="rId26"/>
+      <p:boldItalic r:id="rId27"/>
     </p:embeddedFont>
   </p:embeddedFontLst>
   <p:defaultTextStyle>
@@ -288,7 +287,9 @@
 <file path=ppt/revisionInfo.xml><?xml version="1.0" encoding="utf-8"?>
 <p1510:revInfo xmlns:a="http://schemas.openxmlformats.org/drawingml/2006/main" xmlns:r="http://schemas.openxmlformats.org/officeDocument/2006/relationships" xmlns:p1510="http://schemas.microsoft.com/office/powerpoint/2015/10/main">
   <p1510:revLst>
-    <p1510:client id="{17BDB0EA-8440-535B-18DB-FF5CDE3BDD8A}" v="7519" dt="2026-07-02T00:26:16.893"/>
+    <p1510:client id="{17BDB0EA-8440-535B-18DB-FF5CDE3BDD8A}" v="7549" dt="2026-07-02T00:31:07.748"/>
+    <p1510:client id="{2161D477-6E9E-B56B-ECFA-FB26EBADB247}" v="261" dt="2026-07-02T12:42:58.279"/>
+    <p1510:client id="{E7485014-231F-B8DA-2975-04396FBA5646}" v="349" dt="2026-07-02T13:08:43.267"/>
   </p1510:revLst>
 </p1510:revInfo>
 </file>
@@ -973,6 +974,128 @@
 </p:notes>
 </file>
 
+<file path=ppt/notesSlides/notesSlide10.xml><?xml version="1.0" encoding="utf-8"?>
+<p:notes xmlns:a="http://schemas.openxmlformats.org/drawingml/2006/main" xmlns:r="http://schemas.openxmlformats.org/officeDocument/2006/relationships" xmlns:p="http://schemas.openxmlformats.org/presentationml/2006/main" showMasterSp="0" showMasterPhAnim="0">
+  <p:cSld>
+    <p:spTree>
+      <p:nvGrpSpPr>
+        <p:cNvPr id="1" name="Shape 184"/>
+        <p:cNvGrpSpPr/>
+        <p:nvPr/>
+      </p:nvGrpSpPr>
+      <p:grpSpPr>
+        <a:xfrm>
+          <a:off x="0" y="0"/>
+          <a:ext cx="0" cy="0"/>
+          <a:chOff x="0" y="0"/>
+          <a:chExt cx="0" cy="0"/>
+        </a:xfrm>
+      </p:grpSpPr>
+      <p:sp>
+        <p:nvSpPr>
+          <p:cNvPr id="185" name="Google Shape;185;p6:notes"/>
+          <p:cNvSpPr>
+            <a:spLocks noGrp="1" noRot="1" noChangeAspect="1"/>
+          </p:cNvSpPr>
+          <p:nvPr>
+            <p:ph type="sldImg" idx="2"/>
+          </p:nvPr>
+        </p:nvSpPr>
+        <p:spPr>
+          <a:xfrm>
+            <a:off x="381000" y="685800"/>
+            <a:ext cx="6096000" cy="3429000"/>
+          </a:xfrm>
+          <a:custGeom>
+            <a:avLst/>
+            <a:gdLst/>
+            <a:ahLst/>
+            <a:cxnLst/>
+            <a:rect l="l" t="t" r="r" b="b"/>
+            <a:pathLst>
+              <a:path w="120000" h="120000" extrusionOk="0">
+                <a:moveTo>
+                  <a:pt x="0" y="0"/>
+                </a:moveTo>
+                <a:lnTo>
+                  <a:pt x="120000" y="0"/>
+                </a:lnTo>
+                <a:lnTo>
+                  <a:pt x="120000" y="120000"/>
+                </a:lnTo>
+                <a:lnTo>
+                  <a:pt x="0" y="120000"/>
+                </a:lnTo>
+                <a:close/>
+              </a:path>
+            </a:pathLst>
+          </a:custGeom>
+          <a:noFill/>
+          <a:ln w="9525" cap="flat" cmpd="sng">
+            <a:solidFill>
+              <a:srgbClr val="000000"/>
+            </a:solidFill>
+            <a:prstDash val="solid"/>
+            <a:round/>
+            <a:headEnd type="none" w="sm" len="sm"/>
+            <a:tailEnd type="none" w="sm" len="sm"/>
+          </a:ln>
+        </p:spPr>
+      </p:sp>
+      <p:sp>
+        <p:nvSpPr>
+          <p:cNvPr id="186" name="Google Shape;186;p6:notes"/>
+          <p:cNvSpPr txBox="1">
+            <a:spLocks noGrp="1"/>
+          </p:cNvSpPr>
+          <p:nvPr>
+            <p:ph type="body" idx="1"/>
+          </p:nvPr>
+        </p:nvSpPr>
+        <p:spPr>
+          <a:xfrm>
+            <a:off x="685800" y="4343400"/>
+            <a:ext cx="5486400" cy="4114800"/>
+          </a:xfrm>
+          <a:prstGeom prst="rect">
+            <a:avLst/>
+          </a:prstGeom>
+          <a:noFill/>
+          <a:ln>
+            <a:noFill/>
+          </a:ln>
+        </p:spPr>
+        <p:txBody>
+          <a:bodyPr spcFirstLastPara="1" wrap="square" lIns="91425" tIns="91425" rIns="91425" bIns="91425" anchor="t" anchorCtr="0">
+            <a:noAutofit/>
+          </a:bodyPr>
+          <a:lstStyle/>
+          <a:p>
+            <a:pPr marL="0" lvl="0" indent="0" algn="l" rtl="0">
+              <a:lnSpc>
+                <a:spcPct val="100000"/>
+              </a:lnSpc>
+              <a:spcBef>
+                <a:spcPts val="0"/>
+              </a:spcBef>
+              <a:spcAft>
+                <a:spcPts val="0"/>
+              </a:spcAft>
+              <a:buSzPts val="1100"/>
+              <a:buNone/>
+            </a:pPr>
+            <a:endParaRPr/>
+          </a:p>
+        </p:txBody>
+      </p:sp>
+    </p:spTree>
+  </p:cSld>
+  <p:clrMapOvr>
+    <a:masterClrMapping/>
+  </p:clrMapOvr>
+</p:notes>
+</file>
+
 <file path=ppt/notesSlides/notesSlide2.xml><?xml version="1.0" encoding="utf-8"?>
 <p:notes xmlns:a="http://schemas.openxmlformats.org/drawingml/2006/main" xmlns:r="http://schemas.openxmlformats.org/officeDocument/2006/relationships" xmlns:p="http://schemas.openxmlformats.org/presentationml/2006/main" showMasterSp="0" showMasterPhAnim="0">
   <p:cSld>
@@ -1096,6 +1219,106 @@
 </file>
 
 <file path=ppt/notesSlides/notesSlide3.xml><?xml version="1.0" encoding="utf-8"?>
+<p:notes xmlns:a="http://schemas.openxmlformats.org/drawingml/2006/main" xmlns:r="http://schemas.openxmlformats.org/officeDocument/2006/relationships" xmlns:p="http://schemas.openxmlformats.org/presentationml/2006/main">
+  <p:cSld>
+    <p:spTree>
+      <p:nvGrpSpPr>
+        <p:cNvPr id="1" name=""/>
+        <p:cNvGrpSpPr/>
+        <p:nvPr/>
+      </p:nvGrpSpPr>
+      <p:grpSpPr>
+        <a:xfrm>
+          <a:off x="0" y="0"/>
+          <a:ext cx="0" cy="0"/>
+          <a:chOff x="0" y="0"/>
+          <a:chExt cx="0" cy="0"/>
+        </a:xfrm>
+      </p:grpSpPr>
+      <p:sp>
+        <p:nvSpPr>
+          <p:cNvPr id="2" name="Marcador de imagen de diapositiva 1"/>
+          <p:cNvSpPr>
+            <a:spLocks noGrp="1" noRot="1" noChangeAspect="1"/>
+          </p:cNvSpPr>
+          <p:nvPr>
+            <p:ph type="sldImg"/>
+          </p:nvPr>
+        </p:nvSpPr>
+        <p:spPr/>
+      </p:sp>
+      <p:sp>
+        <p:nvSpPr>
+          <p:cNvPr id="3" name="Marcador de notas 2"/>
+          <p:cNvSpPr>
+            <a:spLocks noGrp="1"/>
+          </p:cNvSpPr>
+          <p:nvPr>
+            <p:ph type="body" idx="1"/>
+          </p:nvPr>
+        </p:nvSpPr>
+        <p:spPr/>
+        <p:txBody>
+          <a:bodyPr/>
+          <a:lstStyle/>
+          <a:p>
+            <a:pPr>
+              <a:buNone/>
+            </a:pPr>
+            <a:r>
+              <a:rPr lang="en-US">
+                <a:latin typeface="Calibri"/>
+                <a:ea typeface="Calibri"/>
+                <a:cs typeface="Calibri"/>
+              </a:rPr>
+              <a:t>Virigina y Lina</a:t>
+            </a:r>
+          </a:p>
+          <a:p>
+            <a:pPr>
+              <a:buNone/>
+            </a:pPr>
+            <a:r>
+              <a:rPr lang="en-US" dirty="0">
+                <a:latin typeface="Calibri"/>
+                <a:ea typeface="Calibri"/>
+                <a:cs typeface="Calibri"/>
+              </a:rPr>
+              <a:t>SURA y </a:t>
+            </a:r>
+            <a:r>
+              <a:rPr lang="en-US" dirty="0" err="1">
+                <a:latin typeface="Calibri"/>
+                <a:ea typeface="Calibri"/>
+                <a:cs typeface="Calibri"/>
+              </a:rPr>
+              <a:t>algunas</a:t>
+            </a:r>
+            <a:r>
+              <a:rPr lang="en-US" dirty="0">
+                <a:latin typeface="Calibri"/>
+                <a:ea typeface="Calibri"/>
+                <a:cs typeface="Calibri"/>
+              </a:rPr>
+              <a:t> GIOTIS</a:t>
+            </a:r>
+          </a:p>
+        </p:txBody>
+      </p:sp>
+    </p:spTree>
+    <p:extLst>
+      <p:ext uri="{BB962C8B-B14F-4D97-AF65-F5344CB8AC3E}">
+        <p14:creationId xmlns:p14="http://schemas.microsoft.com/office/powerpoint/2010/main" val="3280953321"/>
+      </p:ext>
+    </p:extLst>
+  </p:cSld>
+  <p:clrMapOvr>
+    <a:masterClrMapping/>
+  </p:clrMapOvr>
+</p:notes>
+</file>
+
+<file path=ppt/notesSlides/notesSlide4.xml><?xml version="1.0" encoding="utf-8"?>
 <p:notes xmlns:a="http://schemas.openxmlformats.org/drawingml/2006/main" xmlns:r="http://schemas.openxmlformats.org/officeDocument/2006/relationships" xmlns:p="http://schemas.openxmlformats.org/presentationml/2006/main" showMasterSp="0" showMasterPhAnim="0">
   <p:cSld>
     <p:spTree>
@@ -1217,7 +1440,7 @@
 </p:notes>
 </file>
 
-<file path=ppt/notesSlides/notesSlide4.xml><?xml version="1.0" encoding="utf-8"?>
+<file path=ppt/notesSlides/notesSlide5.xml><?xml version="1.0" encoding="utf-8"?>
 <p:notes xmlns:a="http://schemas.openxmlformats.org/drawingml/2006/main" xmlns:r="http://schemas.openxmlformats.org/officeDocument/2006/relationships" xmlns:p="http://schemas.openxmlformats.org/presentationml/2006/main" showMasterSp="0" showMasterPhAnim="0">
   <p:cSld>
     <p:spTree>
@@ -1321,12 +1544,12 @@
 </p:notes>
 </file>
 
-<file path=ppt/notesSlides/notesSlide5.xml><?xml version="1.0" encoding="utf-8"?>
-<p:notes xmlns:a="http://schemas.openxmlformats.org/drawingml/2006/main" xmlns:r="http://schemas.openxmlformats.org/officeDocument/2006/relationships" xmlns:p="http://schemas.openxmlformats.org/presentationml/2006/main" showMasterSp="0" showMasterPhAnim="0">
+<file path=ppt/notesSlides/notesSlide6.xml><?xml version="1.0" encoding="utf-8"?>
+<p:notes xmlns:a="http://schemas.openxmlformats.org/drawingml/2006/main" xmlns:r="http://schemas.openxmlformats.org/officeDocument/2006/relationships" xmlns:p="http://schemas.openxmlformats.org/presentationml/2006/main">
   <p:cSld>
     <p:spTree>
       <p:nvGrpSpPr>
-        <p:cNvPr id="1" name="Shape 135"/>
+        <p:cNvPr id="1" name=""/>
         <p:cNvGrpSpPr/>
         <p:nvPr/>
       </p:nvGrpSpPr>
@@ -1340,12 +1563,12 @@
       </p:grpSpPr>
       <p:sp>
         <p:nvSpPr>
-          <p:cNvPr id="136" name="Google Shape;136;p3:notes"/>
+          <p:cNvPr id="2" name="Marcador de imagen de diapositiva 1"/>
           <p:cNvSpPr>
             <a:spLocks noGrp="1" noRot="1" noChangeAspect="1"/>
           </p:cNvSpPr>
           <p:nvPr>
-            <p:ph type="sldImg" idx="2"/>
+            <p:ph type="sldImg"/>
           </p:nvPr>
         </p:nvSpPr>
         <p:spPr>
@@ -1353,89 +1576,293 @@
             <a:off x="381000" y="685800"/>
             <a:ext cx="6096000" cy="3429000"/>
           </a:xfrm>
-          <a:custGeom>
-            <a:avLst/>
-            <a:gdLst/>
-            <a:ahLst/>
-            <a:cxnLst/>
-            <a:rect l="l" t="t" r="r" b="b"/>
-            <a:pathLst>
-              <a:path w="120000" h="120000" extrusionOk="0">
-                <a:moveTo>
-                  <a:pt x="0" y="0"/>
-                </a:moveTo>
-                <a:lnTo>
-                  <a:pt x="120000" y="0"/>
-                </a:lnTo>
-                <a:lnTo>
-                  <a:pt x="120000" y="120000"/>
-                </a:lnTo>
-                <a:lnTo>
-                  <a:pt x="0" y="120000"/>
-                </a:lnTo>
-                <a:close/>
-              </a:path>
-            </a:pathLst>
-          </a:custGeom>
-          <a:noFill/>
-          <a:ln w="9525" cap="flat" cmpd="sng">
-            <a:solidFill>
-              <a:srgbClr val="000000"/>
-            </a:solidFill>
-            <a:prstDash val="solid"/>
-            <a:round/>
-            <a:headEnd type="none" w="sm" len="sm"/>
-            <a:tailEnd type="none" w="sm" len="sm"/>
-          </a:ln>
         </p:spPr>
       </p:sp>
       <p:sp>
         <p:nvSpPr>
-          <p:cNvPr id="137" name="Google Shape;137;p3:notes"/>
-          <p:cNvSpPr txBox="1">
+          <p:cNvPr id="3" name="Marcador de notas 2"/>
+          <p:cNvSpPr>
             <a:spLocks noGrp="1"/>
           </p:cNvSpPr>
           <p:nvPr>
             <p:ph type="body" idx="1"/>
           </p:nvPr>
         </p:nvSpPr>
-        <p:spPr>
-          <a:xfrm>
-            <a:off x="685800" y="4343400"/>
-            <a:ext cx="5486400" cy="4114800"/>
-          </a:xfrm>
-          <a:prstGeom prst="rect">
-            <a:avLst/>
-          </a:prstGeom>
-          <a:noFill/>
-          <a:ln>
-            <a:noFill/>
-          </a:ln>
-        </p:spPr>
+        <p:spPr/>
         <p:txBody>
-          <a:bodyPr spcFirstLastPara="1" wrap="square" lIns="91425" tIns="91425" rIns="91425" bIns="91425" anchor="t" anchorCtr="0">
-            <a:noAutofit/>
-          </a:bodyPr>
+          <a:bodyPr/>
           <a:lstStyle/>
           <a:p>
-            <a:pPr marL="0" lvl="0" indent="0" algn="l" rtl="0">
-              <a:lnSpc>
-                <a:spcPct val="100000"/>
-              </a:lnSpc>
-              <a:spcBef>
-                <a:spcPts val="0"/>
-              </a:spcBef>
-              <a:spcAft>
-                <a:spcPts val="0"/>
-              </a:spcAft>
-              <a:buSzPts val="1100"/>
+            <a:pPr>
               <a:buNone/>
             </a:pPr>
-            <a:endParaRPr/>
+            <a:r>
+              <a:rPr lang="en-US" dirty="0"/>
+              <a:t>AIOps: es la </a:t>
+            </a:r>
+            <a:r>
+              <a:rPr lang="en-US" dirty="0" err="1"/>
+              <a:t>aplicación</a:t>
+            </a:r>
+            <a:r>
+              <a:rPr lang="en-US" dirty="0"/>
+              <a:t> de </a:t>
+            </a:r>
+            <a:r>
+              <a:rPr lang="en-US" dirty="0" err="1"/>
+              <a:t>inteligencia</a:t>
+            </a:r>
+            <a:r>
+              <a:rPr lang="en-US" dirty="0"/>
+              <a:t> artificial y machine learning para </a:t>
+            </a:r>
+            <a:r>
+              <a:rPr lang="en-US" dirty="0" err="1"/>
+              <a:t>automatizar</a:t>
+            </a:r>
+            <a:r>
+              <a:rPr lang="en-US" dirty="0"/>
+              <a:t>, </a:t>
+            </a:r>
+            <a:r>
+              <a:rPr lang="en-US" dirty="0" err="1"/>
+              <a:t>optimizar</a:t>
+            </a:r>
+            <a:r>
+              <a:rPr lang="en-US" dirty="0"/>
+              <a:t> y </a:t>
+            </a:r>
+            <a:r>
+              <a:rPr lang="en-US" dirty="0" err="1"/>
+              <a:t>mejorar</a:t>
+            </a:r>
+            <a:r>
+              <a:rPr lang="en-US" dirty="0"/>
+              <a:t> las </a:t>
+            </a:r>
+            <a:r>
+              <a:rPr lang="en-US" dirty="0" err="1"/>
+              <a:t>operaciones</a:t>
+            </a:r>
+            <a:r>
+              <a:rPr lang="en-US" dirty="0"/>
+              <a:t> de TI.</a:t>
+            </a:r>
+          </a:p>
+          <a:p>
+            <a:pPr>
+              <a:buNone/>
+            </a:pPr>
+            <a:r>
+              <a:rPr lang="en-US" dirty="0">
+                <a:highlight>
+                  <a:srgbClr val="FFFFFF"/>
+                </a:highlight>
+              </a:rPr>
+              <a:t>El Bus Factor: </a:t>
+            </a:r>
+            <a:r>
+              <a:rPr lang="en-US" dirty="0" err="1">
+                <a:highlight>
+                  <a:srgbClr val="FFFFFF"/>
+                </a:highlight>
+              </a:rPr>
+              <a:t>mide</a:t>
+            </a:r>
+            <a:r>
+              <a:rPr lang="en-US" dirty="0">
+                <a:highlight>
+                  <a:srgbClr val="FFFFFF"/>
+                </a:highlight>
+              </a:rPr>
+              <a:t> </a:t>
+            </a:r>
+            <a:r>
+              <a:rPr lang="en-US" dirty="0" err="1">
+                <a:highlight>
+                  <a:srgbClr val="FFFFFF"/>
+                </a:highlight>
+              </a:rPr>
+              <a:t>cuántas</a:t>
+            </a:r>
+            <a:r>
+              <a:rPr lang="en-US" dirty="0">
+                <a:highlight>
+                  <a:srgbClr val="FFFFFF"/>
+                </a:highlight>
+              </a:rPr>
+              <a:t> personas </a:t>
+            </a:r>
+            <a:r>
+              <a:rPr lang="en-US" dirty="0" err="1">
+                <a:highlight>
+                  <a:srgbClr val="FFFFFF"/>
+                </a:highlight>
+              </a:rPr>
+              <a:t>tendrían</a:t>
+            </a:r>
+            <a:r>
+              <a:rPr lang="en-US" dirty="0">
+                <a:highlight>
+                  <a:srgbClr val="FFFFFF"/>
+                </a:highlight>
+              </a:rPr>
+              <a:t> </a:t>
+            </a:r>
+            <a:r>
+              <a:rPr lang="en-US" dirty="0" err="1">
+                <a:highlight>
+                  <a:srgbClr val="FFFFFF"/>
+                </a:highlight>
+              </a:rPr>
+              <a:t>que</a:t>
+            </a:r>
+            <a:r>
+              <a:rPr lang="en-US" dirty="0">
+                <a:highlight>
+                  <a:srgbClr val="FFFFFF"/>
+                </a:highlight>
+              </a:rPr>
+              <a:t> </a:t>
+            </a:r>
+            <a:r>
+              <a:rPr lang="en-US" dirty="0" err="1">
+                <a:highlight>
+                  <a:srgbClr val="FFFFFF"/>
+                </a:highlight>
+              </a:rPr>
+              <a:t>salir</a:t>
+            </a:r>
+            <a:r>
+              <a:rPr lang="en-US" dirty="0">
+                <a:highlight>
+                  <a:srgbClr val="FFFFFF"/>
+                </a:highlight>
+              </a:rPr>
+              <a:t> </a:t>
+            </a:r>
+            <a:r>
+              <a:rPr lang="en-US" dirty="0" err="1">
+                <a:highlight>
+                  <a:srgbClr val="FFFFFF"/>
+                </a:highlight>
+              </a:rPr>
+              <a:t>mañana</a:t>
+            </a:r>
+            <a:r>
+              <a:rPr lang="en-US" dirty="0">
+                <a:highlight>
+                  <a:srgbClr val="FFFFFF"/>
+                </a:highlight>
+              </a:rPr>
+              <a:t> para </a:t>
+            </a:r>
+            <a:r>
+              <a:rPr lang="en-US" dirty="0" err="1">
+                <a:highlight>
+                  <a:srgbClr val="FFFFFF"/>
+                </a:highlight>
+              </a:rPr>
+              <a:t>que</a:t>
+            </a:r>
+            <a:r>
+              <a:rPr lang="en-US" dirty="0">
+                <a:highlight>
+                  <a:srgbClr val="FFFFFF"/>
+                </a:highlight>
+              </a:rPr>
+              <a:t> un </a:t>
+            </a:r>
+            <a:r>
+              <a:rPr lang="en-US" dirty="0" err="1">
+                <a:highlight>
+                  <a:srgbClr val="FFFFFF"/>
+                </a:highlight>
+              </a:rPr>
+              <a:t>proceso</a:t>
+            </a:r>
+            <a:r>
+              <a:rPr lang="en-US" dirty="0">
+                <a:highlight>
+                  <a:srgbClr val="FFFFFF"/>
+                </a:highlight>
+              </a:rPr>
+              <a:t> </a:t>
+            </a:r>
+            <a:r>
+              <a:rPr lang="en-US" dirty="0" err="1">
+                <a:highlight>
+                  <a:srgbClr val="FFFFFF"/>
+                </a:highlight>
+              </a:rPr>
+              <a:t>crítico</a:t>
+            </a:r>
+            <a:r>
+              <a:rPr lang="en-US" dirty="0">
+                <a:highlight>
+                  <a:srgbClr val="FFFFFF"/>
+                </a:highlight>
+              </a:rPr>
+              <a:t> </a:t>
+            </a:r>
+            <a:r>
+              <a:rPr lang="en-US" dirty="0" err="1">
+                <a:highlight>
+                  <a:srgbClr val="FFFFFF"/>
+                </a:highlight>
+              </a:rPr>
+              <a:t>colapse</a:t>
+            </a:r>
+            <a:r>
+              <a:rPr lang="en-US" dirty="0">
+                <a:highlight>
+                  <a:srgbClr val="FFFFFF"/>
+                </a:highlight>
+              </a:rPr>
+              <a:t>. Bus factor alto = </a:t>
+            </a:r>
+            <a:r>
+              <a:rPr lang="en-US" dirty="0" err="1">
+                <a:highlight>
+                  <a:srgbClr val="FFFFFF"/>
+                </a:highlight>
+              </a:rPr>
+              <a:t>riesgo</a:t>
+            </a:r>
+            <a:r>
+              <a:rPr lang="en-US" dirty="0">
+                <a:highlight>
+                  <a:srgbClr val="FFFFFF"/>
+                </a:highlight>
+              </a:rPr>
+              <a:t> </a:t>
+            </a:r>
+            <a:r>
+              <a:rPr lang="en-US" dirty="0" err="1">
+                <a:highlight>
+                  <a:srgbClr val="FFFFFF"/>
+                </a:highlight>
+              </a:rPr>
+              <a:t>operativo</a:t>
+            </a:r>
+            <a:r>
+              <a:rPr lang="en-US" dirty="0">
+                <a:highlight>
+                  <a:srgbClr val="FFFFFF"/>
+                </a:highlight>
+              </a:rPr>
+              <a:t> alto</a:t>
+            </a:r>
+            <a:endParaRPr lang="en-US" dirty="0" err="1"/>
           </a:p>
         </p:txBody>
       </p:sp>
     </p:spTree>
+    <p:extLst>
+      <p:ext uri="{BB962C8B-B14F-4D97-AF65-F5344CB8AC3E}">
+        <p14:creationId xmlns:p14="http://schemas.microsoft.com/office/powerpoint/2010/main" val="1508815847"/>
+      </p:ext>
+    </p:extLst>
   </p:cSld>
   <p:clrMapOvr>
     <a:masterClrMapping/>
@@ -1443,7 +1870,7 @@
 </p:notes>
 </file>
 
-<file path=ppt/notesSlides/notesSlide6.xml><?xml version="1.0" encoding="utf-8"?>
+<file path=ppt/notesSlides/notesSlide7.xml><?xml version="1.0" encoding="utf-8"?>
 <p:notes xmlns:a="http://schemas.openxmlformats.org/drawingml/2006/main" xmlns:r="http://schemas.openxmlformats.org/officeDocument/2006/relationships" xmlns:p="http://schemas.openxmlformats.org/presentationml/2006/main">
   <p:cSld>
     <p:spTree>
@@ -1520,7 +1947,7 @@
           <a:p>
             <a:fld id="{C9B1A955-7F3D-40C1-9D4F-BB0A924D5885}" type="slidenum">
               <a:rPr lang="es-CO" smtClean="0"/>
-              <a:t>11</a:t>
+              <a:t>7</a:t>
             </a:fld>
             <a:endParaRPr lang="es-CO"/>
           </a:p>
@@ -1539,7 +1966,7 @@
 </p:notes>
 </file>
 
-<file path=ppt/notesSlides/notesSlide7.xml><?xml version="1.0" encoding="utf-8"?>
+<file path=ppt/notesSlides/notesSlide8.xml><?xml version="1.0" encoding="utf-8"?>
 <p:notes xmlns:a="http://schemas.openxmlformats.org/drawingml/2006/main" xmlns:r="http://schemas.openxmlformats.org/officeDocument/2006/relationships" xmlns:p="http://schemas.openxmlformats.org/presentationml/2006/main" showMasterSp="0" showMasterPhAnim="0">
   <p:cSld>
     <p:spTree>
@@ -1622,15 +2049,21 @@
           </a:bodyPr>
           <a:lstStyle/>
           <a:p>
-            <a:pPr marL="0" lvl="0" indent="0" algn="l" rtl="0">
-              <a:spcBef>
-                <a:spcPts val="0"/>
-              </a:spcBef>
-              <a:spcAft>
-                <a:spcPts val="0"/>
-              </a:spcAft>
+            <a:pPr marL="0" indent="0">
               <a:buNone/>
             </a:pPr>
+            <a:r>
+              <a:rPr lang="es-ES" err="1"/>
+              <a:t>Riesgos</a:t>
+            </a:r>
+            <a:r>
+              <a:rPr lang="es-ES" dirty="0"/>
+              <a:t>: Planes de Cuentas y </a:t>
+            </a:r>
+            <a:r>
+              <a:rPr lang="es-ES"/>
+              <a:t>Transición</a:t>
+            </a:r>
             <a:endParaRPr/>
           </a:p>
         </p:txBody>
@@ -1643,7 +2076,7 @@
 </p:notes>
 </file>
 
-<file path=ppt/notesSlides/notesSlide8.xml><?xml version="1.0" encoding="utf-8"?>
+<file path=ppt/notesSlides/notesSlide9.xml><?xml version="1.0" encoding="utf-8"?>
 <p:notes xmlns:a="http://schemas.openxmlformats.org/drawingml/2006/main" xmlns:r="http://schemas.openxmlformats.org/officeDocument/2006/relationships" xmlns:p="http://schemas.openxmlformats.org/presentationml/2006/main" showMasterSp="0" showMasterPhAnim="0">
   <p:cSld>
     <p:spTree>
@@ -1714,128 +2147,6 @@
       <p:sp>
         <p:nvSpPr>
           <p:cNvPr id="182" name="Google Shape;182;g37e80574407_0_117:notes"/>
-          <p:cNvSpPr txBox="1">
-            <a:spLocks noGrp="1"/>
-          </p:cNvSpPr>
-          <p:nvPr>
-            <p:ph type="body" idx="1"/>
-          </p:nvPr>
-        </p:nvSpPr>
-        <p:spPr>
-          <a:xfrm>
-            <a:off x="685800" y="4343400"/>
-            <a:ext cx="5486400" cy="4114800"/>
-          </a:xfrm>
-          <a:prstGeom prst="rect">
-            <a:avLst/>
-          </a:prstGeom>
-          <a:noFill/>
-          <a:ln>
-            <a:noFill/>
-          </a:ln>
-        </p:spPr>
-        <p:txBody>
-          <a:bodyPr spcFirstLastPara="1" wrap="square" lIns="91425" tIns="91425" rIns="91425" bIns="91425" anchor="t" anchorCtr="0">
-            <a:noAutofit/>
-          </a:bodyPr>
-          <a:lstStyle/>
-          <a:p>
-            <a:pPr marL="0" lvl="0" indent="0" algn="l" rtl="0">
-              <a:lnSpc>
-                <a:spcPct val="100000"/>
-              </a:lnSpc>
-              <a:spcBef>
-                <a:spcPts val="0"/>
-              </a:spcBef>
-              <a:spcAft>
-                <a:spcPts val="0"/>
-              </a:spcAft>
-              <a:buSzPts val="1100"/>
-              <a:buNone/>
-            </a:pPr>
-            <a:endParaRPr/>
-          </a:p>
-        </p:txBody>
-      </p:sp>
-    </p:spTree>
-  </p:cSld>
-  <p:clrMapOvr>
-    <a:masterClrMapping/>
-  </p:clrMapOvr>
-</p:notes>
-</file>
-
-<file path=ppt/notesSlides/notesSlide9.xml><?xml version="1.0" encoding="utf-8"?>
-<p:notes xmlns:a="http://schemas.openxmlformats.org/drawingml/2006/main" xmlns:r="http://schemas.openxmlformats.org/officeDocument/2006/relationships" xmlns:p="http://schemas.openxmlformats.org/presentationml/2006/main" showMasterSp="0" showMasterPhAnim="0">
-  <p:cSld>
-    <p:spTree>
-      <p:nvGrpSpPr>
-        <p:cNvPr id="1" name="Shape 184"/>
-        <p:cNvGrpSpPr/>
-        <p:nvPr/>
-      </p:nvGrpSpPr>
-      <p:grpSpPr>
-        <a:xfrm>
-          <a:off x="0" y="0"/>
-          <a:ext cx="0" cy="0"/>
-          <a:chOff x="0" y="0"/>
-          <a:chExt cx="0" cy="0"/>
-        </a:xfrm>
-      </p:grpSpPr>
-      <p:sp>
-        <p:nvSpPr>
-          <p:cNvPr id="185" name="Google Shape;185;p6:notes"/>
-          <p:cNvSpPr>
-            <a:spLocks noGrp="1" noRot="1" noChangeAspect="1"/>
-          </p:cNvSpPr>
-          <p:nvPr>
-            <p:ph type="sldImg" idx="2"/>
-          </p:nvPr>
-        </p:nvSpPr>
-        <p:spPr>
-          <a:xfrm>
-            <a:off x="381000" y="685800"/>
-            <a:ext cx="6096000" cy="3429000"/>
-          </a:xfrm>
-          <a:custGeom>
-            <a:avLst/>
-            <a:gdLst/>
-            <a:ahLst/>
-            <a:cxnLst/>
-            <a:rect l="l" t="t" r="r" b="b"/>
-            <a:pathLst>
-              <a:path w="120000" h="120000" extrusionOk="0">
-                <a:moveTo>
-                  <a:pt x="0" y="0"/>
-                </a:moveTo>
-                <a:lnTo>
-                  <a:pt x="120000" y="0"/>
-                </a:lnTo>
-                <a:lnTo>
-                  <a:pt x="120000" y="120000"/>
-                </a:lnTo>
-                <a:lnTo>
-                  <a:pt x="0" y="120000"/>
-                </a:lnTo>
-                <a:close/>
-              </a:path>
-            </a:pathLst>
-          </a:custGeom>
-          <a:noFill/>
-          <a:ln w="9525" cap="flat" cmpd="sng">
-            <a:solidFill>
-              <a:srgbClr val="000000"/>
-            </a:solidFill>
-            <a:prstDash val="solid"/>
-            <a:round/>
-            <a:headEnd type="none" w="sm" len="sm"/>
-            <a:tailEnd type="none" w="sm" len="sm"/>
-          </a:ln>
-        </p:spPr>
-      </p:sp>
-      <p:sp>
-        <p:nvSpPr>
-          <p:cNvPr id="186" name="Google Shape;186;p6:notes"/>
           <p:cNvSpPr txBox="1">
             <a:spLocks noGrp="1"/>
           </p:cNvSpPr>
@@ -4522,7 +4833,7 @@
           <a:p>
             <a:fld id="{B41DFC76-4735-4170-8F48-03426EDB87B7}" type="datetimeFigureOut">
               <a:rPr lang="es-CO" smtClean="0"/>
-              <a:t>1/07/2026</a:t>
+              <a:t>2/07/2026</a:t>
             </a:fld>
             <a:endParaRPr lang="es-CO"/>
           </a:p>
@@ -4722,7 +5033,7 @@
           <a:p>
             <a:fld id="{B41DFC76-4735-4170-8F48-03426EDB87B7}" type="datetimeFigureOut">
               <a:rPr lang="es-CO" smtClean="0"/>
-              <a:t>1/07/2026</a:t>
+              <a:t>2/07/2026</a:t>
             </a:fld>
             <a:endParaRPr lang="es-CO"/>
           </a:p>
@@ -4998,7 +5309,7 @@
           <a:p>
             <a:fld id="{B41DFC76-4735-4170-8F48-03426EDB87B7}" type="datetimeFigureOut">
               <a:rPr lang="es-CO" smtClean="0"/>
-              <a:t>1/07/2026</a:t>
+              <a:t>2/07/2026</a:t>
             </a:fld>
             <a:endParaRPr lang="es-CO"/>
           </a:p>
@@ -5266,7 +5577,7 @@
           <a:p>
             <a:fld id="{B41DFC76-4735-4170-8F48-03426EDB87B7}" type="datetimeFigureOut">
               <a:rPr lang="es-CO" smtClean="0"/>
-              <a:t>1/07/2026</a:t>
+              <a:t>2/07/2026</a:t>
             </a:fld>
             <a:endParaRPr lang="es-CO"/>
           </a:p>
@@ -5681,7 +5992,7 @@
           <a:p>
             <a:fld id="{B41DFC76-4735-4170-8F48-03426EDB87B7}" type="datetimeFigureOut">
               <a:rPr lang="es-CO" smtClean="0"/>
-              <a:t>1/07/2026</a:t>
+              <a:t>2/07/2026</a:t>
             </a:fld>
             <a:endParaRPr lang="es-CO"/>
           </a:p>
@@ -5823,7 +6134,7 @@
           <a:p>
             <a:fld id="{B41DFC76-4735-4170-8F48-03426EDB87B7}" type="datetimeFigureOut">
               <a:rPr lang="es-CO" smtClean="0"/>
-              <a:t>1/07/2026</a:t>
+              <a:t>2/07/2026</a:t>
             </a:fld>
             <a:endParaRPr lang="es-CO"/>
           </a:p>
@@ -5936,7 +6247,7 @@
           <a:p>
             <a:fld id="{B41DFC76-4735-4170-8F48-03426EDB87B7}" type="datetimeFigureOut">
               <a:rPr lang="es-CO" smtClean="0"/>
-              <a:t>1/07/2026</a:t>
+              <a:t>2/07/2026</a:t>
             </a:fld>
             <a:endParaRPr lang="es-CO"/>
           </a:p>
@@ -7094,7 +7405,7 @@
           <a:p>
             <a:fld id="{B41DFC76-4735-4170-8F48-03426EDB87B7}" type="datetimeFigureOut">
               <a:rPr lang="es-CO" smtClean="0"/>
-              <a:t>1/07/2026</a:t>
+              <a:t>2/07/2026</a:t>
             </a:fld>
             <a:endParaRPr lang="es-CO"/>
           </a:p>
@@ -7383,7 +7694,7 @@
           <a:p>
             <a:fld id="{B41DFC76-4735-4170-8F48-03426EDB87B7}" type="datetimeFigureOut">
               <a:rPr lang="es-CO" smtClean="0"/>
-              <a:t>1/07/2026</a:t>
+              <a:t>2/07/2026</a:t>
             </a:fld>
             <a:endParaRPr lang="es-CO"/>
           </a:p>
@@ -7583,7 +7894,7 @@
           <a:p>
             <a:fld id="{B41DFC76-4735-4170-8F48-03426EDB87B7}" type="datetimeFigureOut">
               <a:rPr lang="es-CO" smtClean="0"/>
-              <a:t>1/07/2026</a:t>
+              <a:t>2/07/2026</a:t>
             </a:fld>
             <a:endParaRPr lang="es-CO"/>
           </a:p>
@@ -7793,7 +8104,7 @@
           <a:p>
             <a:fld id="{B41DFC76-4735-4170-8F48-03426EDB87B7}" type="datetimeFigureOut">
               <a:rPr lang="es-CO" smtClean="0"/>
-              <a:t>1/07/2026</a:t>
+              <a:t>2/07/2026</a:t>
             </a:fld>
             <a:endParaRPr lang="es-CO"/>
           </a:p>
@@ -14676,7 +14987,7 @@
           <a:p>
             <a:fld id="{B41DFC76-4735-4170-8F48-03426EDB87B7}" type="datetimeFigureOut">
               <a:rPr lang="es-CO" smtClean="0"/>
-              <a:t>1/07/2026</a:t>
+              <a:t>2/07/2026</a:t>
             </a:fld>
             <a:endParaRPr lang="es-CO"/>
           </a:p>
@@ -15186,2372 +15497,7 @@
 </file>
 
 <file path=ppt/slides/slide10.xml><?xml version="1.0" encoding="utf-8"?>
-<p:sld xmlns:a="http://schemas.openxmlformats.org/drawingml/2006/main" xmlns:r="http://schemas.openxmlformats.org/officeDocument/2006/relationships" xmlns:p="http://schemas.openxmlformats.org/presentationml/2006/main">
-  <p:cSld>
-    <p:spTree>
-      <p:nvGrpSpPr>
-        <p:cNvPr id="1" name=""/>
-        <p:cNvGrpSpPr/>
-        <p:nvPr/>
-      </p:nvGrpSpPr>
-      <p:grpSpPr>
-        <a:xfrm>
-          <a:off x="0" y="0"/>
-          <a:ext cx="0" cy="0"/>
-          <a:chOff x="0" y="0"/>
-          <a:chExt cx="0" cy="0"/>
-        </a:xfrm>
-      </p:grpSpPr>
-      <p:sp>
-        <p:nvSpPr>
-          <p:cNvPr id="5" name="CuadroTexto 4">
-            <a:extLst>
-              <a:ext uri="{FF2B5EF4-FFF2-40B4-BE49-F238E27FC236}">
-                <a16:creationId xmlns:a16="http://schemas.microsoft.com/office/drawing/2014/main" id="{145F327D-4348-70E7-13D6-32A2BAE2F8BE}"/>
-              </a:ext>
-            </a:extLst>
-          </p:cNvPr>
-          <p:cNvSpPr txBox="1"/>
-          <p:nvPr/>
-        </p:nvSpPr>
-        <p:spPr>
-          <a:xfrm>
-            <a:off x="332015" y="884464"/>
-            <a:ext cx="4572000" cy="553998"/>
-          </a:xfrm>
-          <a:prstGeom prst="rect">
-            <a:avLst/>
-          </a:prstGeom>
-          <a:noFill/>
-        </p:spPr>
-        <p:txBody>
-          <a:bodyPr rot="0" spcFirstLastPara="0" vertOverflow="overflow" horzOverflow="overflow" vert="horz" wrap="square" lIns="91440" tIns="45720" rIns="91440" bIns="45720" numCol="1" spcCol="0" rtlCol="0" fromWordArt="0" anchor="t" anchorCtr="0" forceAA="0" compatLnSpc="1">
-            <a:prstTxWarp prst="textNoShape">
-              <a:avLst/>
-            </a:prstTxWarp>
-            <a:spAutoFit/>
-          </a:bodyPr>
-          <a:lstStyle/>
-          <a:p>
-            <a:r>
-              <a:rPr lang="es-ES" sz="1600" b="1" i="0" u="none" strike="noStrike" baseline="0">
-                <a:solidFill>
-                  <a:srgbClr val="0E337C"/>
-                </a:solidFill>
-                <a:latin typeface="Reddit Sans"/>
-              </a:rPr>
-              <a:t>Entregables</a:t>
-            </a:r>
-            <a:endParaRPr lang="es-ES"/>
-          </a:p>
-          <a:p>
-            <a:pPr algn="ctr"/>
-            <a:endParaRPr lang="es-ES"/>
-          </a:p>
-        </p:txBody>
-      </p:sp>
-      <p:cxnSp>
-        <p:nvCxnSpPr>
-          <p:cNvPr id="7" name="Google Shape;179;g3657f5ba65c_1_33">
-            <a:extLst>
-              <a:ext uri="{FF2B5EF4-FFF2-40B4-BE49-F238E27FC236}">
-                <a16:creationId xmlns:a16="http://schemas.microsoft.com/office/drawing/2014/main" id="{F4156A76-728E-D91D-CFF1-BF69AF932F73}"/>
-              </a:ext>
-            </a:extLst>
-          </p:cNvPr>
-          <p:cNvCxnSpPr/>
-          <p:nvPr/>
-        </p:nvCxnSpPr>
-        <p:spPr>
-          <a:xfrm rot="10800000" flipH="1">
-            <a:off x="394425" y="824004"/>
-            <a:ext cx="8103300" cy="28800"/>
-          </a:xfrm>
-          <a:prstGeom prst="straightConnector1">
-            <a:avLst/>
-          </a:prstGeom>
-          <a:noFill/>
-          <a:ln w="19050" cap="flat" cmpd="sng">
-            <a:solidFill>
-              <a:srgbClr val="0E337C"/>
-            </a:solidFill>
-            <a:prstDash val="solid"/>
-            <a:round/>
-            <a:headEnd type="none" w="sm" len="sm"/>
-            <a:tailEnd type="none" w="sm" len="sm"/>
-          </a:ln>
-        </p:spPr>
-      </p:cxnSp>
-      <p:sp>
-        <p:nvSpPr>
-          <p:cNvPr id="11" name="Google Shape;176;g3657f5ba65c_1_33">
-            <a:extLst>
-              <a:ext uri="{FF2B5EF4-FFF2-40B4-BE49-F238E27FC236}">
-                <a16:creationId xmlns:a16="http://schemas.microsoft.com/office/drawing/2014/main" id="{E1A0AA3D-88E5-3D13-D465-B35D6F9C4502}"/>
-              </a:ext>
-            </a:extLst>
-          </p:cNvPr>
-          <p:cNvSpPr txBox="1">
-            <a:spLocks noGrp="1"/>
-          </p:cNvSpPr>
-          <p:nvPr>
-            <p:ph type="title"/>
-          </p:nvPr>
-        </p:nvSpPr>
-        <p:spPr>
-          <a:xfrm>
-            <a:off x="329690" y="434140"/>
-            <a:ext cx="5554885" cy="616242"/>
-          </a:xfrm>
-          <a:prstGeom prst="rect">
-            <a:avLst/>
-          </a:prstGeom>
-        </p:spPr>
-        <p:txBody>
-          <a:bodyPr spcFirstLastPara="1" wrap="square" lIns="91425" tIns="91425" rIns="91425" bIns="91425" anchor="t" anchorCtr="0">
-            <a:normAutofit/>
-          </a:bodyPr>
-          <a:lstStyle/>
-          <a:p>
-            <a:r>
-              <a:rPr lang="es-ES" dirty="0" err="1"/>
-              <a:t>Roadmap</a:t>
-            </a:r>
-            <a:r>
-              <a:rPr lang="es-ES" dirty="0"/>
-              <a:t> Mesa de Servicios de Nueva Generación</a:t>
-            </a:r>
-            <a:endParaRPr dirty="0"/>
-          </a:p>
-        </p:txBody>
-      </p:sp>
-      <p:sp>
-        <p:nvSpPr>
-          <p:cNvPr id="19" name="CuadroTexto 18">
-            <a:extLst>
-              <a:ext uri="{FF2B5EF4-FFF2-40B4-BE49-F238E27FC236}">
-                <a16:creationId xmlns:a16="http://schemas.microsoft.com/office/drawing/2014/main" id="{E3FA27DD-8793-A77E-F267-901278F387A3}"/>
-              </a:ext>
-            </a:extLst>
-          </p:cNvPr>
-          <p:cNvSpPr txBox="1"/>
-          <p:nvPr/>
-        </p:nvSpPr>
-        <p:spPr>
-          <a:xfrm>
-            <a:off x="326570" y="1254576"/>
-            <a:ext cx="1251859" cy="400110"/>
-          </a:xfrm>
-          <a:prstGeom prst="rect">
-            <a:avLst/>
-          </a:prstGeom>
-          <a:noFill/>
-        </p:spPr>
-        <p:txBody>
-          <a:bodyPr rot="0" spcFirstLastPara="0" vertOverflow="overflow" horzOverflow="overflow" vert="horz" wrap="square" lIns="91440" tIns="45720" rIns="91440" bIns="45720" numCol="1" spcCol="0" rtlCol="0" fromWordArt="0" anchor="t" anchorCtr="0" forceAA="0" compatLnSpc="1">
-            <a:prstTxWarp prst="textNoShape">
-              <a:avLst/>
-            </a:prstTxWarp>
-            <a:spAutoFit/>
-          </a:bodyPr>
-          <a:lstStyle/>
-          <a:p>
-            <a:pPr algn="ctr"/>
-            <a:r>
-              <a:rPr lang="es-ES" sz="1000" b="1" dirty="0">
-                <a:solidFill>
-                  <a:srgbClr val="595959"/>
-                </a:solidFill>
-                <a:latin typeface="Reddit Sans"/>
-              </a:rPr>
-              <a:t>Modelos</a:t>
-            </a:r>
-            <a:r>
-              <a:rPr lang="es-ES" sz="1000" b="1" u="none" strike="noStrike" baseline="0" dirty="0">
-                <a:solidFill>
-                  <a:srgbClr val="595959"/>
-                </a:solidFill>
-                <a:latin typeface="Reddit Sans"/>
-              </a:rPr>
-              <a:t> </a:t>
-            </a:r>
-            <a:r>
-              <a:rPr lang="es-ES" sz="1000" b="1">
-                <a:solidFill>
-                  <a:srgbClr val="595959"/>
-                </a:solidFill>
-                <a:latin typeface="Reddit Sans"/>
-              </a:rPr>
-              <a:t>de operación</a:t>
-            </a:r>
-            <a:endParaRPr lang="es-ES" b="1">
-              <a:solidFill>
-                <a:srgbClr val="595959"/>
-              </a:solidFill>
-              <a:ea typeface="Reddit Sans"/>
-            </a:endParaRPr>
-          </a:p>
-        </p:txBody>
-      </p:sp>
-      <p:sp>
-        <p:nvSpPr>
-          <p:cNvPr id="23" name="Rounded Rectangle 2">
-            <a:extLst>
-              <a:ext uri="{FF2B5EF4-FFF2-40B4-BE49-F238E27FC236}">
-                <a16:creationId xmlns:a16="http://schemas.microsoft.com/office/drawing/2014/main" id="{E9408C5F-E950-AF15-64CE-64E635604BF3}"/>
-              </a:ext>
-            </a:extLst>
-          </p:cNvPr>
-          <p:cNvSpPr/>
-          <p:nvPr/>
-        </p:nvSpPr>
-        <p:spPr>
-          <a:xfrm>
-            <a:off x="1484910" y="1313904"/>
-            <a:ext cx="3134542" cy="281396"/>
-          </a:xfrm>
-          <a:prstGeom prst="roundRect">
-            <a:avLst/>
-          </a:prstGeom>
-          <a:ln/>
-        </p:spPr>
-        <p:style>
-          <a:lnRef idx="2">
-            <a:schemeClr val="accent5"/>
-          </a:lnRef>
-          <a:fillRef idx="1">
-            <a:schemeClr val="lt1"/>
-          </a:fillRef>
-          <a:effectRef idx="0">
-            <a:schemeClr val="accent5"/>
-          </a:effectRef>
-          <a:fontRef idx="minor">
-            <a:schemeClr val="dk1"/>
-          </a:fontRef>
-        </p:style>
-        <p:txBody>
-          <a:bodyPr lIns="91440" tIns="45720" rIns="91440" bIns="45720" rtlCol="0" anchor="ctr"/>
-          <a:lstStyle/>
-          <a:p>
-            <a:pPr algn="ctr" defTabSz="342900">
-              <a:defRPr sz="1500" b="1">
-                <a:solidFill>
-                  <a:srgbClr val="FFFFFF"/>
-                </a:solidFill>
-              </a:defRPr>
-            </a:pPr>
-            <a:r>
-              <a:rPr lang="es-ES" sz="900" b="1" kern="1200">
-                <a:solidFill>
-                  <a:schemeClr val="tx1"/>
-                </a:solidFill>
-                <a:latin typeface="Reddit Sans"/>
-                <a:ea typeface="Reddit Sans"/>
-              </a:rPr>
-              <a:t>Reactivo y Crecimiento Automatizado</a:t>
-            </a:r>
-            <a:endParaRPr lang="es-ES" sz="900">
-              <a:solidFill>
-                <a:schemeClr val="tx1"/>
-              </a:solidFill>
-              <a:cs typeface="Arial"/>
-            </a:endParaRPr>
-          </a:p>
-        </p:txBody>
-      </p:sp>
-      <p:sp>
-        <p:nvSpPr>
-          <p:cNvPr id="25" name="Rounded Rectangle 2">
-            <a:extLst>
-              <a:ext uri="{FF2B5EF4-FFF2-40B4-BE49-F238E27FC236}">
-                <a16:creationId xmlns:a16="http://schemas.microsoft.com/office/drawing/2014/main" id="{3A53E36D-15CA-5D71-2B69-A70F4DDB6310}"/>
-              </a:ext>
-            </a:extLst>
-          </p:cNvPr>
-          <p:cNvSpPr/>
-          <p:nvPr/>
-        </p:nvSpPr>
-        <p:spPr>
-          <a:xfrm>
-            <a:off x="4619999" y="1313907"/>
-            <a:ext cx="2236469" cy="286838"/>
-          </a:xfrm>
-          <a:prstGeom prst="roundRect">
-            <a:avLst/>
-          </a:prstGeom>
-          <a:ln/>
-        </p:spPr>
-        <p:style>
-          <a:lnRef idx="2">
-            <a:schemeClr val="accent5"/>
-          </a:lnRef>
-          <a:fillRef idx="1">
-            <a:schemeClr val="lt1"/>
-          </a:fillRef>
-          <a:effectRef idx="0">
-            <a:schemeClr val="accent5"/>
-          </a:effectRef>
-          <a:fontRef idx="minor">
-            <a:schemeClr val="dk1"/>
-          </a:fontRef>
-        </p:style>
-        <p:txBody>
-          <a:bodyPr lIns="91440" tIns="45720" rIns="91440" bIns="45720" rtlCol="0" anchor="ctr"/>
-          <a:lstStyle/>
-          <a:p>
-            <a:pPr algn="ctr" defTabSz="342900">
-              <a:defRPr sz="1500" b="1">
-                <a:solidFill>
-                  <a:srgbClr val="FFFFFF"/>
-                </a:solidFill>
-              </a:defRPr>
-            </a:pPr>
-            <a:r>
-              <a:rPr lang="es-ES" sz="900" b="1" kern="1200">
-                <a:solidFill>
-                  <a:schemeClr val="tx1"/>
-                </a:solidFill>
-                <a:latin typeface="Reddit Sans"/>
-                <a:ea typeface="Reddit Sans"/>
-              </a:rPr>
-              <a:t>Predictivo y Evolutivo</a:t>
-            </a:r>
-            <a:endParaRPr lang="es-ES" sz="900">
-              <a:solidFill>
-                <a:schemeClr val="tx1"/>
-              </a:solidFill>
-            </a:endParaRPr>
-          </a:p>
-        </p:txBody>
-      </p:sp>
-      <p:sp>
-        <p:nvSpPr>
-          <p:cNvPr id="27" name="Rounded Rectangle 2">
-            <a:extLst>
-              <a:ext uri="{FF2B5EF4-FFF2-40B4-BE49-F238E27FC236}">
-                <a16:creationId xmlns:a16="http://schemas.microsoft.com/office/drawing/2014/main" id="{E414F6A8-1018-D7BC-1DD7-6692C22AEF41}"/>
-              </a:ext>
-            </a:extLst>
-          </p:cNvPr>
-          <p:cNvSpPr/>
-          <p:nvPr/>
-        </p:nvSpPr>
-        <p:spPr>
-          <a:xfrm>
-            <a:off x="6878782" y="1313904"/>
-            <a:ext cx="1561557" cy="286839"/>
-          </a:xfrm>
-          <a:prstGeom prst="roundRect">
-            <a:avLst/>
-          </a:prstGeom>
-          <a:ln/>
-        </p:spPr>
-        <p:style>
-          <a:lnRef idx="2">
-            <a:schemeClr val="accent5"/>
-          </a:lnRef>
-          <a:fillRef idx="1">
-            <a:schemeClr val="lt1"/>
-          </a:fillRef>
-          <a:effectRef idx="0">
-            <a:schemeClr val="accent5"/>
-          </a:effectRef>
-          <a:fontRef idx="minor">
-            <a:schemeClr val="dk1"/>
-          </a:fontRef>
-        </p:style>
-        <p:txBody>
-          <a:bodyPr lIns="91440" tIns="45720" rIns="91440" bIns="45720" rtlCol="0" anchor="ctr"/>
-          <a:lstStyle/>
-          <a:p>
-            <a:pPr algn="ctr" defTabSz="342900">
-              <a:defRPr sz="1500" b="1">
-                <a:solidFill>
-                  <a:srgbClr val="FFFFFF"/>
-                </a:solidFill>
-              </a:defRPr>
-            </a:pPr>
-            <a:r>
-              <a:rPr lang="es-ES" sz="900" kern="1200">
-                <a:solidFill>
-                  <a:schemeClr val="tx1"/>
-                </a:solidFill>
-                <a:latin typeface="Reddit Sans"/>
-                <a:ea typeface="Reddit Sans"/>
-                <a:cs typeface="Arial"/>
-              </a:rPr>
-              <a:t>Autónomo e Inteligente</a:t>
-            </a:r>
-          </a:p>
-        </p:txBody>
-      </p:sp>
-      <p:sp>
-        <p:nvSpPr>
-          <p:cNvPr id="29" name="OTLSHAPE_TB_00000000000000000000000000000000_ScaleContainer">
-            <a:extLst>
-              <a:ext uri="{FF2B5EF4-FFF2-40B4-BE49-F238E27FC236}">
-                <a16:creationId xmlns:a16="http://schemas.microsoft.com/office/drawing/2014/main" id="{9633E68C-6E3F-DB3B-22B6-05B421634494}"/>
-              </a:ext>
-            </a:extLst>
-          </p:cNvPr>
-          <p:cNvSpPr/>
-          <p:nvPr/>
-        </p:nvSpPr>
-        <p:spPr>
-          <a:xfrm>
-            <a:off x="1474723" y="1604767"/>
-            <a:ext cx="6962150" cy="183417"/>
-          </a:xfrm>
-          <a:prstGeom prst="roundRect">
-            <a:avLst>
-              <a:gd name="adj" fmla="val 16667"/>
-            </a:avLst>
-          </a:prstGeom>
-          <a:solidFill>
-            <a:srgbClr val="44546A"/>
-          </a:solidFill>
-          <a:ln w="12700">
-            <a:miter lim="400000"/>
-          </a:ln>
-        </p:spPr>
-        <p:txBody>
-          <a:bodyPr lIns="34289" rIns="34289" anchor="ctr"/>
-          <a:lstStyle>
-            <a:defPPr>
-              <a:defRPr lang="es-CO"/>
-            </a:defPPr>
-            <a:lvl1pPr marL="0" algn="l" defTabSz="685800" rtl="0" eaLnBrk="1" latinLnBrk="0" hangingPunct="1">
-              <a:defRPr sz="1350" kern="1200">
-                <a:solidFill>
-                  <a:schemeClr val="tx1"/>
-                </a:solidFill>
-                <a:latin typeface="+mn-lt"/>
-                <a:ea typeface="+mn-ea"/>
-                <a:cs typeface="+mn-cs"/>
-              </a:defRPr>
-            </a:lvl1pPr>
-            <a:lvl2pPr marL="342900" algn="l" defTabSz="685800" rtl="0" eaLnBrk="1" latinLnBrk="0" hangingPunct="1">
-              <a:defRPr sz="1350" kern="1200">
-                <a:solidFill>
-                  <a:schemeClr val="tx1"/>
-                </a:solidFill>
-                <a:latin typeface="+mn-lt"/>
-                <a:ea typeface="+mn-ea"/>
-                <a:cs typeface="+mn-cs"/>
-              </a:defRPr>
-            </a:lvl2pPr>
-            <a:lvl3pPr marL="685800" algn="l" defTabSz="685800" rtl="0" eaLnBrk="1" latinLnBrk="0" hangingPunct="1">
-              <a:defRPr sz="1350" kern="1200">
-                <a:solidFill>
-                  <a:schemeClr val="tx1"/>
-                </a:solidFill>
-                <a:latin typeface="+mn-lt"/>
-                <a:ea typeface="+mn-ea"/>
-                <a:cs typeface="+mn-cs"/>
-              </a:defRPr>
-            </a:lvl3pPr>
-            <a:lvl4pPr marL="1028700" algn="l" defTabSz="685800" rtl="0" eaLnBrk="1" latinLnBrk="0" hangingPunct="1">
-              <a:defRPr sz="1350" kern="1200">
-                <a:solidFill>
-                  <a:schemeClr val="tx1"/>
-                </a:solidFill>
-                <a:latin typeface="+mn-lt"/>
-                <a:ea typeface="+mn-ea"/>
-                <a:cs typeface="+mn-cs"/>
-              </a:defRPr>
-            </a:lvl4pPr>
-            <a:lvl5pPr marL="1371600" algn="l" defTabSz="685800" rtl="0" eaLnBrk="1" latinLnBrk="0" hangingPunct="1">
-              <a:defRPr sz="1350" kern="1200">
-                <a:solidFill>
-                  <a:schemeClr val="tx1"/>
-                </a:solidFill>
-                <a:latin typeface="+mn-lt"/>
-                <a:ea typeface="+mn-ea"/>
-                <a:cs typeface="+mn-cs"/>
-              </a:defRPr>
-            </a:lvl5pPr>
-            <a:lvl6pPr marL="1714500" algn="l" defTabSz="685800" rtl="0" eaLnBrk="1" latinLnBrk="0" hangingPunct="1">
-              <a:defRPr sz="1350" kern="1200">
-                <a:solidFill>
-                  <a:schemeClr val="tx1"/>
-                </a:solidFill>
-                <a:latin typeface="+mn-lt"/>
-                <a:ea typeface="+mn-ea"/>
-                <a:cs typeface="+mn-cs"/>
-              </a:defRPr>
-            </a:lvl6pPr>
-            <a:lvl7pPr marL="2057400" algn="l" defTabSz="685800" rtl="0" eaLnBrk="1" latinLnBrk="0" hangingPunct="1">
-              <a:defRPr sz="1350" kern="1200">
-                <a:solidFill>
-                  <a:schemeClr val="tx1"/>
-                </a:solidFill>
-                <a:latin typeface="+mn-lt"/>
-                <a:ea typeface="+mn-ea"/>
-                <a:cs typeface="+mn-cs"/>
-              </a:defRPr>
-            </a:lvl7pPr>
-            <a:lvl8pPr marL="2400300" algn="l" defTabSz="685800" rtl="0" eaLnBrk="1" latinLnBrk="0" hangingPunct="1">
-              <a:defRPr sz="1350" kern="1200">
-                <a:solidFill>
-                  <a:schemeClr val="tx1"/>
-                </a:solidFill>
-                <a:latin typeface="+mn-lt"/>
-                <a:ea typeface="+mn-ea"/>
-                <a:cs typeface="+mn-cs"/>
-              </a:defRPr>
-            </a:lvl8pPr>
-            <a:lvl9pPr marL="2743200" algn="l" defTabSz="685800" rtl="0" eaLnBrk="1" latinLnBrk="0" hangingPunct="1">
-              <a:defRPr sz="1350" kern="1200">
-                <a:solidFill>
-                  <a:schemeClr val="tx1"/>
-                </a:solidFill>
-                <a:latin typeface="+mn-lt"/>
-                <a:ea typeface="+mn-ea"/>
-                <a:cs typeface="+mn-cs"/>
-              </a:defRPr>
-            </a:lvl9pPr>
-          </a:lstStyle>
-          <a:p>
-            <a:pPr algn="ctr">
-              <a:defRPr>
-                <a:solidFill>
-                  <a:srgbClr val="FFFFFF"/>
-                </a:solidFill>
-              </a:defRPr>
-            </a:pPr>
-            <a:endParaRPr sz="1013"/>
-          </a:p>
-        </p:txBody>
-      </p:sp>
-      <p:sp>
-        <p:nvSpPr>
-          <p:cNvPr id="31" name="CuadroTexto 30">
-            <a:extLst>
-              <a:ext uri="{FF2B5EF4-FFF2-40B4-BE49-F238E27FC236}">
-                <a16:creationId xmlns:a16="http://schemas.microsoft.com/office/drawing/2014/main" id="{4B050ACB-3FB6-E019-C71A-4572E0D00025}"/>
-              </a:ext>
-            </a:extLst>
-          </p:cNvPr>
-          <p:cNvSpPr txBox="1"/>
-          <p:nvPr/>
-        </p:nvSpPr>
-        <p:spPr>
-          <a:xfrm>
-            <a:off x="4256314" y="1602918"/>
-            <a:ext cx="1039586" cy="215444"/>
-          </a:xfrm>
-          <a:prstGeom prst="rect">
-            <a:avLst/>
-          </a:prstGeom>
-          <a:noFill/>
-        </p:spPr>
-        <p:txBody>
-          <a:bodyPr rot="0" spcFirstLastPara="0" vertOverflow="overflow" horzOverflow="overflow" vert="horz" wrap="square" lIns="91440" tIns="45720" rIns="91440" bIns="45720" numCol="1" spcCol="0" rtlCol="0" fromWordArt="0" anchor="t" anchorCtr="0" forceAA="0" compatLnSpc="1">
-            <a:prstTxWarp prst="textNoShape">
-              <a:avLst/>
-            </a:prstTxWarp>
-            <a:spAutoFit/>
-          </a:bodyPr>
-          <a:lstStyle/>
-          <a:p>
-            <a:r>
-              <a:rPr lang="es-ES" sz="800" b="1">
-                <a:solidFill>
-                  <a:srgbClr val="FFFFFF"/>
-                </a:solidFill>
-                <a:latin typeface="Reddit Sans"/>
-              </a:rPr>
-              <a:t>Q3</a:t>
-            </a:r>
-            <a:endParaRPr lang="es-ES" sz="800">
-              <a:solidFill>
-                <a:srgbClr val="FFFFFF"/>
-              </a:solidFill>
-            </a:endParaRPr>
-          </a:p>
-        </p:txBody>
-      </p:sp>
-      <p:sp>
-        <p:nvSpPr>
-          <p:cNvPr id="33" name="CuadroTexto 32">
-            <a:extLst>
-              <a:ext uri="{FF2B5EF4-FFF2-40B4-BE49-F238E27FC236}">
-                <a16:creationId xmlns:a16="http://schemas.microsoft.com/office/drawing/2014/main" id="{A9723865-5A41-F725-C91B-0057835821BF}"/>
-              </a:ext>
-            </a:extLst>
-          </p:cNvPr>
-          <p:cNvSpPr txBox="1"/>
-          <p:nvPr/>
-        </p:nvSpPr>
-        <p:spPr>
-          <a:xfrm>
-            <a:off x="7478484" y="1602919"/>
-            <a:ext cx="1039586" cy="215444"/>
-          </a:xfrm>
-          <a:prstGeom prst="rect">
-            <a:avLst/>
-          </a:prstGeom>
-          <a:noFill/>
-        </p:spPr>
-        <p:txBody>
-          <a:bodyPr rot="0" spcFirstLastPara="0" vertOverflow="overflow" horzOverflow="overflow" vert="horz" wrap="square" lIns="91440" tIns="45720" rIns="91440" bIns="45720" numCol="1" spcCol="0" rtlCol="0" fromWordArt="0" anchor="t" anchorCtr="0" forceAA="0" compatLnSpc="1">
-            <a:prstTxWarp prst="textNoShape">
-              <a:avLst/>
-            </a:prstTxWarp>
-            <a:spAutoFit/>
-          </a:bodyPr>
-          <a:lstStyle/>
-          <a:p>
-            <a:r>
-              <a:rPr lang="es-ES" sz="800" b="1">
-                <a:solidFill>
-                  <a:srgbClr val="FFFFFF"/>
-                </a:solidFill>
-                <a:latin typeface="Reddit Sans"/>
-              </a:rPr>
-              <a:t>Q4</a:t>
-            </a:r>
-            <a:endParaRPr lang="es-ES" sz="800">
-              <a:solidFill>
-                <a:srgbClr val="FFFFFF"/>
-              </a:solidFill>
-            </a:endParaRPr>
-          </a:p>
-        </p:txBody>
-      </p:sp>
-      <p:cxnSp>
-        <p:nvCxnSpPr>
-          <p:cNvPr id="35" name="Conector recto de flecha 34">
-            <a:extLst>
-              <a:ext uri="{FF2B5EF4-FFF2-40B4-BE49-F238E27FC236}">
-                <a16:creationId xmlns:a16="http://schemas.microsoft.com/office/drawing/2014/main" id="{0CD3CD7E-9620-69A8-67EC-DED704E8E1E1}"/>
-              </a:ext>
-            </a:extLst>
-          </p:cNvPr>
-          <p:cNvCxnSpPr/>
-          <p:nvPr/>
-        </p:nvCxnSpPr>
-        <p:spPr>
-          <a:xfrm>
-            <a:off x="6874328" y="1612447"/>
-            <a:ext cx="2177" cy="171448"/>
-          </a:xfrm>
-          <a:prstGeom prst="straightConnector1">
-            <a:avLst/>
-          </a:prstGeom>
-          <a:ln>
-            <a:solidFill>
-              <a:schemeClr val="bg1"/>
-            </a:solidFill>
-          </a:ln>
-        </p:spPr>
-        <p:style>
-          <a:lnRef idx="1">
-            <a:schemeClr val="accent1"/>
-          </a:lnRef>
-          <a:fillRef idx="0">
-            <a:schemeClr val="accent1"/>
-          </a:fillRef>
-          <a:effectRef idx="0">
-            <a:schemeClr val="accent1"/>
-          </a:effectRef>
-          <a:fontRef idx="minor">
-            <a:schemeClr val="tx1"/>
-          </a:fontRef>
-        </p:style>
-      </p:cxnSp>
-      <p:sp>
-        <p:nvSpPr>
-          <p:cNvPr id="37" name="CuadroTexto 36">
-            <a:extLst>
-              <a:ext uri="{FF2B5EF4-FFF2-40B4-BE49-F238E27FC236}">
-                <a16:creationId xmlns:a16="http://schemas.microsoft.com/office/drawing/2014/main" id="{EE04F3D4-2E69-CCF8-C888-FC89A4983DD7}"/>
-              </a:ext>
-            </a:extLst>
-          </p:cNvPr>
-          <p:cNvSpPr txBox="1"/>
-          <p:nvPr/>
-        </p:nvSpPr>
-        <p:spPr>
-          <a:xfrm>
-            <a:off x="2219323" y="1786617"/>
-            <a:ext cx="751115" cy="246221"/>
-          </a:xfrm>
-          <a:prstGeom prst="rect">
-            <a:avLst/>
-          </a:prstGeom>
-          <a:noFill/>
-        </p:spPr>
-        <p:txBody>
-          <a:bodyPr rot="0" spcFirstLastPara="0" vertOverflow="overflow" horzOverflow="overflow" vert="horz" wrap="square" lIns="91440" tIns="45720" rIns="91440" bIns="45720" numCol="1" spcCol="0" rtlCol="0" fromWordArt="0" anchor="t" anchorCtr="0" forceAA="0" compatLnSpc="1">
-            <a:prstTxWarp prst="textNoShape">
-              <a:avLst/>
-            </a:prstTxWarp>
-            <a:spAutoFit/>
-          </a:bodyPr>
-          <a:lstStyle/>
-          <a:p>
-            <a:pPr algn="l"/>
-            <a:r>
-              <a:rPr lang="es-ES" sz="1000">
-                <a:solidFill>
-                  <a:schemeClr val="bg2"/>
-                </a:solidFill>
-              </a:rPr>
-              <a:t>Julio</a:t>
-            </a:r>
-          </a:p>
-        </p:txBody>
-      </p:sp>
-      <p:sp>
-        <p:nvSpPr>
-          <p:cNvPr id="39" name="CuadroTexto 38">
-            <a:extLst>
-              <a:ext uri="{FF2B5EF4-FFF2-40B4-BE49-F238E27FC236}">
-                <a16:creationId xmlns:a16="http://schemas.microsoft.com/office/drawing/2014/main" id="{B4970034-3526-F52C-92F3-D759F2021FAF}"/>
-              </a:ext>
-            </a:extLst>
-          </p:cNvPr>
-          <p:cNvSpPr txBox="1"/>
-          <p:nvPr/>
-        </p:nvSpPr>
-        <p:spPr>
-          <a:xfrm>
-            <a:off x="3966479" y="1792060"/>
-            <a:ext cx="751115" cy="246221"/>
-          </a:xfrm>
-          <a:prstGeom prst="rect">
-            <a:avLst/>
-          </a:prstGeom>
-          <a:noFill/>
-        </p:spPr>
-        <p:txBody>
-          <a:bodyPr rot="0" spcFirstLastPara="0" vertOverflow="overflow" horzOverflow="overflow" vert="horz" wrap="square" lIns="91440" tIns="45720" rIns="91440" bIns="45720" numCol="1" spcCol="0" rtlCol="0" fromWordArt="0" anchor="t" anchorCtr="0" forceAA="0" compatLnSpc="1">
-            <a:prstTxWarp prst="textNoShape">
-              <a:avLst/>
-            </a:prstTxWarp>
-            <a:spAutoFit/>
-          </a:bodyPr>
-          <a:lstStyle/>
-          <a:p>
-            <a:pPr algn="l"/>
-            <a:r>
-              <a:rPr lang="es-ES" sz="1000">
-                <a:solidFill>
-                  <a:schemeClr val="bg2"/>
-                </a:solidFill>
-              </a:rPr>
-              <a:t>Agosto</a:t>
-            </a:r>
-          </a:p>
-        </p:txBody>
-      </p:sp>
-      <p:sp>
-        <p:nvSpPr>
-          <p:cNvPr id="41" name="CuadroTexto 40">
-            <a:extLst>
-              <a:ext uri="{FF2B5EF4-FFF2-40B4-BE49-F238E27FC236}">
-                <a16:creationId xmlns:a16="http://schemas.microsoft.com/office/drawing/2014/main" id="{F8A3F251-7D3F-1B69-7AB5-392781C71481}"/>
-              </a:ext>
-            </a:extLst>
-          </p:cNvPr>
-          <p:cNvSpPr txBox="1"/>
-          <p:nvPr/>
-        </p:nvSpPr>
-        <p:spPr>
-          <a:xfrm>
-            <a:off x="5599335" y="1786617"/>
-            <a:ext cx="1094015" cy="246221"/>
-          </a:xfrm>
-          <a:prstGeom prst="rect">
-            <a:avLst/>
-          </a:prstGeom>
-          <a:noFill/>
-        </p:spPr>
-        <p:txBody>
-          <a:bodyPr rot="0" spcFirstLastPara="0" vertOverflow="overflow" horzOverflow="overflow" vert="horz" wrap="square" lIns="91440" tIns="45720" rIns="91440" bIns="45720" numCol="1" spcCol="0" rtlCol="0" fromWordArt="0" anchor="t" anchorCtr="0" forceAA="0" compatLnSpc="1">
-            <a:prstTxWarp prst="textNoShape">
-              <a:avLst/>
-            </a:prstTxWarp>
-            <a:spAutoFit/>
-          </a:bodyPr>
-          <a:lstStyle/>
-          <a:p>
-            <a:pPr algn="l"/>
-            <a:r>
-              <a:rPr lang="es-ES" sz="1000">
-                <a:solidFill>
-                  <a:schemeClr val="bg2"/>
-                </a:solidFill>
-              </a:rPr>
-              <a:t>Septiembre</a:t>
-            </a:r>
-          </a:p>
-        </p:txBody>
-      </p:sp>
-      <p:sp>
-        <p:nvSpPr>
-          <p:cNvPr id="43" name="CuadroTexto 42">
-            <a:extLst>
-              <a:ext uri="{FF2B5EF4-FFF2-40B4-BE49-F238E27FC236}">
-                <a16:creationId xmlns:a16="http://schemas.microsoft.com/office/drawing/2014/main" id="{BE015285-C0C4-0359-3C2B-226C613353D8}"/>
-              </a:ext>
-            </a:extLst>
-          </p:cNvPr>
-          <p:cNvSpPr txBox="1"/>
-          <p:nvPr/>
-        </p:nvSpPr>
-        <p:spPr>
-          <a:xfrm>
-            <a:off x="7379151" y="1786617"/>
-            <a:ext cx="821873" cy="251663"/>
-          </a:xfrm>
-          <a:prstGeom prst="rect">
-            <a:avLst/>
-          </a:prstGeom>
-          <a:noFill/>
-        </p:spPr>
-        <p:txBody>
-          <a:bodyPr rot="0" spcFirstLastPara="0" vertOverflow="overflow" horzOverflow="overflow" vert="horz" wrap="square" lIns="91440" tIns="45720" rIns="91440" bIns="45720" numCol="1" spcCol="0" rtlCol="0" fromWordArt="0" anchor="t" anchorCtr="0" forceAA="0" compatLnSpc="1">
-            <a:prstTxWarp prst="textNoShape">
-              <a:avLst/>
-            </a:prstTxWarp>
-            <a:spAutoFit/>
-          </a:bodyPr>
-          <a:lstStyle/>
-          <a:p>
-            <a:pPr algn="l"/>
-            <a:r>
-              <a:rPr lang="es-ES" sz="1000">
-                <a:solidFill>
-                  <a:schemeClr val="bg2"/>
-                </a:solidFill>
-              </a:rPr>
-              <a:t>Octubre</a:t>
-            </a:r>
-          </a:p>
-        </p:txBody>
-      </p:sp>
-      <p:cxnSp>
-        <p:nvCxnSpPr>
-          <p:cNvPr id="45" name="Conector recto de flecha 44">
-            <a:extLst>
-              <a:ext uri="{FF2B5EF4-FFF2-40B4-BE49-F238E27FC236}">
-                <a16:creationId xmlns:a16="http://schemas.microsoft.com/office/drawing/2014/main" id="{45014E92-E35F-0381-2BD8-5CDA490D1AB8}"/>
-              </a:ext>
-            </a:extLst>
-          </p:cNvPr>
-          <p:cNvCxnSpPr/>
-          <p:nvPr/>
-        </p:nvCxnSpPr>
-        <p:spPr>
-          <a:xfrm>
-            <a:off x="3298372" y="1819274"/>
-            <a:ext cx="18504" cy="2567667"/>
-          </a:xfrm>
-          <a:prstGeom prst="straightConnector1">
-            <a:avLst/>
-          </a:prstGeom>
-          <a:ln w="12700">
-            <a:solidFill>
-              <a:schemeClr val="bg2">
-                <a:lumMod val="20000"/>
-                <a:lumOff val="80000"/>
-              </a:schemeClr>
-            </a:solidFill>
-            <a:prstDash val="dash"/>
-          </a:ln>
-        </p:spPr>
-        <p:style>
-          <a:lnRef idx="1">
-            <a:schemeClr val="accent1"/>
-          </a:lnRef>
-          <a:fillRef idx="0">
-            <a:schemeClr val="accent1"/>
-          </a:fillRef>
-          <a:effectRef idx="0">
-            <a:schemeClr val="accent1"/>
-          </a:effectRef>
-          <a:fontRef idx="minor">
-            <a:schemeClr val="tx1"/>
-          </a:fontRef>
-        </p:style>
-      </p:cxnSp>
-      <p:cxnSp>
-        <p:nvCxnSpPr>
-          <p:cNvPr id="47" name="Conector recto de flecha 46">
-            <a:extLst>
-              <a:ext uri="{FF2B5EF4-FFF2-40B4-BE49-F238E27FC236}">
-                <a16:creationId xmlns:a16="http://schemas.microsoft.com/office/drawing/2014/main" id="{93F2F33F-D377-1629-4288-1ADCDA614014}"/>
-              </a:ext>
-            </a:extLst>
-          </p:cNvPr>
-          <p:cNvCxnSpPr>
-            <a:cxnSpLocks/>
-          </p:cNvCxnSpPr>
-          <p:nvPr/>
-        </p:nvCxnSpPr>
-        <p:spPr>
-          <a:xfrm>
-            <a:off x="5143500" y="1792059"/>
-            <a:ext cx="13062" cy="2605767"/>
-          </a:xfrm>
-          <a:prstGeom prst="straightConnector1">
-            <a:avLst/>
-          </a:prstGeom>
-          <a:ln w="12700">
-            <a:solidFill>
-              <a:schemeClr val="bg2">
-                <a:lumMod val="20000"/>
-                <a:lumOff val="80000"/>
-              </a:schemeClr>
-            </a:solidFill>
-            <a:prstDash val="dash"/>
-          </a:ln>
-        </p:spPr>
-        <p:style>
-          <a:lnRef idx="1">
-            <a:schemeClr val="accent1"/>
-          </a:lnRef>
-          <a:fillRef idx="0">
-            <a:schemeClr val="accent1"/>
-          </a:fillRef>
-          <a:effectRef idx="0">
-            <a:schemeClr val="accent1"/>
-          </a:effectRef>
-          <a:fontRef idx="minor">
-            <a:schemeClr val="tx1"/>
-          </a:fontRef>
-        </p:style>
-      </p:cxnSp>
-      <p:cxnSp>
-        <p:nvCxnSpPr>
-          <p:cNvPr id="49" name="Conector recto de flecha 48">
-            <a:extLst>
-              <a:ext uri="{FF2B5EF4-FFF2-40B4-BE49-F238E27FC236}">
-                <a16:creationId xmlns:a16="http://schemas.microsoft.com/office/drawing/2014/main" id="{F5C5A59F-D40D-E871-B46E-4447C66ED326}"/>
-              </a:ext>
-            </a:extLst>
-          </p:cNvPr>
-          <p:cNvCxnSpPr>
-            <a:cxnSpLocks/>
-          </p:cNvCxnSpPr>
-          <p:nvPr/>
-        </p:nvCxnSpPr>
-        <p:spPr>
-          <a:xfrm>
-            <a:off x="6901542" y="1797502"/>
-            <a:ext cx="34835" cy="2589439"/>
-          </a:xfrm>
-          <a:prstGeom prst="straightConnector1">
-            <a:avLst/>
-          </a:prstGeom>
-          <a:ln w="12700">
-            <a:solidFill>
-              <a:schemeClr val="bg2">
-                <a:lumMod val="20000"/>
-                <a:lumOff val="80000"/>
-              </a:schemeClr>
-            </a:solidFill>
-            <a:prstDash val="dash"/>
-          </a:ln>
-        </p:spPr>
-        <p:style>
-          <a:lnRef idx="1">
-            <a:schemeClr val="accent1"/>
-          </a:lnRef>
-          <a:fillRef idx="0">
-            <a:schemeClr val="accent1"/>
-          </a:fillRef>
-          <a:effectRef idx="0">
-            <a:schemeClr val="accent1"/>
-          </a:effectRef>
-          <a:fontRef idx="minor">
-            <a:schemeClr val="tx1"/>
-          </a:fontRef>
-        </p:style>
-      </p:cxnSp>
-      <p:sp>
-        <p:nvSpPr>
-          <p:cNvPr id="53" name="CuadroTexto 52">
-            <a:extLst>
-              <a:ext uri="{FF2B5EF4-FFF2-40B4-BE49-F238E27FC236}">
-                <a16:creationId xmlns:a16="http://schemas.microsoft.com/office/drawing/2014/main" id="{DC991B8E-021B-EC77-E034-CBEA633B4016}"/>
-              </a:ext>
-            </a:extLst>
-          </p:cNvPr>
-          <p:cNvSpPr txBox="1"/>
-          <p:nvPr/>
-        </p:nvSpPr>
-        <p:spPr>
-          <a:xfrm>
-            <a:off x="1436912" y="2141763"/>
-            <a:ext cx="1850572" cy="1569660"/>
-          </a:xfrm>
-          <a:prstGeom prst="rect">
-            <a:avLst/>
-          </a:prstGeom>
-          <a:noFill/>
-        </p:spPr>
-        <p:txBody>
-          <a:bodyPr rot="0" spcFirstLastPara="0" vertOverflow="overflow" horzOverflow="overflow" vert="horz" wrap="square" lIns="91440" tIns="45720" rIns="91440" bIns="45720" numCol="1" spcCol="0" rtlCol="0" fromWordArt="0" anchor="t" anchorCtr="0" forceAA="0" compatLnSpc="1">
-            <a:prstTxWarp prst="textNoShape">
-              <a:avLst/>
-            </a:prstTxWarp>
-            <a:spAutoFit/>
-          </a:bodyPr>
-          <a:lstStyle/>
-          <a:p>
-            <a:pPr marL="171450" indent="-171450">
-              <a:buChar char="•"/>
-            </a:pPr>
-            <a:r>
-              <a:rPr lang="es-ES" sz="800" dirty="0">
-                <a:latin typeface="Reddit Sans"/>
-              </a:rPr>
-              <a:t>Nivel de madurez mesas </a:t>
-            </a:r>
-            <a:r>
-              <a:rPr lang="es-ES" sz="800">
-                <a:latin typeface="Reddit Sans"/>
-              </a:rPr>
-              <a:t>actuales</a:t>
-            </a:r>
-            <a:endParaRPr lang="es-ES" sz="800"/>
-          </a:p>
-          <a:p>
-            <a:pPr marL="171450" indent="-171450">
-              <a:buChar char="•"/>
-            </a:pPr>
-            <a:endParaRPr lang="es-ES" sz="800" dirty="0">
-              <a:latin typeface="Reddit Sans"/>
-            </a:endParaRPr>
-          </a:p>
-          <a:p>
-            <a:pPr marL="171450" indent="-171450">
-              <a:buChar char="•"/>
-            </a:pPr>
-            <a:r>
-              <a:rPr lang="es-ES" sz="800" dirty="0">
-                <a:latin typeface="Reddit Sans"/>
-              </a:rPr>
-              <a:t>Dolores de la operación - Pain </a:t>
-            </a:r>
-            <a:r>
-              <a:rPr lang="es-ES" sz="800" dirty="0" err="1">
-                <a:latin typeface="Reddit Sans"/>
-              </a:rPr>
-              <a:t>point</a:t>
-            </a:r>
-          </a:p>
-          <a:p>
-            <a:pPr marL="171450" indent="-171450">
-              <a:buChar char="•"/>
-            </a:pPr>
-            <a:endParaRPr lang="es-ES" sz="800" dirty="0">
-              <a:latin typeface="Reddit Sans"/>
-            </a:endParaRPr>
-          </a:p>
-          <a:p>
-            <a:pPr marL="171450" indent="-171450">
-              <a:buChar char="•"/>
-            </a:pPr>
-            <a:r>
-              <a:rPr lang="es-ES" sz="800">
-                <a:latin typeface="Reddit Sans"/>
-              </a:rPr>
-              <a:t>Oferta de valor</a:t>
-            </a:r>
-            <a:endParaRPr lang="es-ES" sz="800" dirty="0">
-              <a:latin typeface="Reddit Sans"/>
-            </a:endParaRPr>
-          </a:p>
-          <a:p>
-            <a:pPr marL="171450" indent="-171450">
-              <a:buChar char="•"/>
-            </a:pPr>
-            <a:endParaRPr lang="es-ES" sz="800" dirty="0">
-              <a:latin typeface="Reddit Sans"/>
-            </a:endParaRPr>
-          </a:p>
-          <a:p>
-            <a:pPr marL="171450" indent="-171450">
-              <a:buChar char="•"/>
-            </a:pPr>
-            <a:r>
-              <a:rPr lang="es-ES" sz="800" dirty="0">
-                <a:latin typeface="Reddit Sans"/>
-              </a:rPr>
-              <a:t>Esquema general del servicio – Service </a:t>
-            </a:r>
-            <a:r>
-              <a:rPr lang="es-ES" sz="800" dirty="0" err="1">
-                <a:latin typeface="Reddit Sans"/>
-              </a:rPr>
-              <a:t>Design</a:t>
-            </a:r>
-            <a:r>
-              <a:rPr lang="es-ES" sz="800" dirty="0">
-                <a:latin typeface="Reddit Sans"/>
-              </a:rPr>
-              <a:t> Blue </a:t>
-            </a:r>
-            <a:r>
-              <a:rPr lang="es-ES" sz="800" dirty="0" err="1">
-                <a:latin typeface="Reddit Sans"/>
-              </a:rPr>
-              <a:t>Print</a:t>
-            </a:r>
-          </a:p>
-          <a:p>
-            <a:pPr marL="171450" indent="-171450">
-              <a:buChar char="•"/>
-            </a:pPr>
-            <a:endParaRPr lang="es-ES" sz="800" dirty="0">
-              <a:latin typeface="Reddit Sans"/>
-            </a:endParaRPr>
-          </a:p>
-          <a:p>
-            <a:pPr marL="171450" indent="-171450">
-              <a:buChar char="•"/>
-            </a:pPr>
-            <a:endParaRPr lang="es-ES" sz="800" dirty="0">
-              <a:latin typeface="Reddit Sans"/>
-            </a:endParaRPr>
-          </a:p>
-        </p:txBody>
-      </p:sp>
-      <p:sp>
-        <p:nvSpPr>
-          <p:cNvPr id="64" name="CuadroTexto 63">
-            <a:extLst>
-              <a:ext uri="{FF2B5EF4-FFF2-40B4-BE49-F238E27FC236}">
-                <a16:creationId xmlns:a16="http://schemas.microsoft.com/office/drawing/2014/main" id="{BFC94FAC-A03D-2BBF-4601-BBD72FF20A2A}"/>
-              </a:ext>
-            </a:extLst>
-          </p:cNvPr>
-          <p:cNvSpPr txBox="1"/>
-          <p:nvPr/>
-        </p:nvSpPr>
-        <p:spPr>
-          <a:xfrm>
-            <a:off x="3287483" y="2141763"/>
-            <a:ext cx="1850572" cy="2308324"/>
-          </a:xfrm>
-          <a:prstGeom prst="rect">
-            <a:avLst/>
-          </a:prstGeom>
-          <a:noFill/>
-        </p:spPr>
-        <p:txBody>
-          <a:bodyPr rot="0" spcFirstLastPara="0" vertOverflow="overflow" horzOverflow="overflow" vert="horz" wrap="square" lIns="91440" tIns="45720" rIns="91440" bIns="45720" numCol="1" spcCol="0" rtlCol="0" fromWordArt="0" anchor="t" anchorCtr="0" forceAA="0" compatLnSpc="1">
-            <a:prstTxWarp prst="textNoShape">
-              <a:avLst/>
-            </a:prstTxWarp>
-            <a:spAutoFit/>
-          </a:bodyPr>
-          <a:lstStyle/>
-          <a:p>
-            <a:pPr marL="171450" indent="-171450">
-              <a:buChar char="•"/>
-            </a:pPr>
-            <a:r>
-              <a:rPr lang="es-ES" sz="800" dirty="0">
-                <a:latin typeface="Reddit Sans"/>
-              </a:rPr>
-              <a:t>Slide </a:t>
-            </a:r>
-            <a:r>
-              <a:rPr lang="es-ES" sz="800" dirty="0" err="1">
-                <a:latin typeface="Reddit Sans"/>
-              </a:rPr>
-              <a:t>deck</a:t>
-            </a:r>
-            <a:r>
-              <a:rPr lang="es-ES" sz="800" dirty="0">
-                <a:latin typeface="Reddit Sans"/>
-              </a:rPr>
-              <a:t> para comercial</a:t>
-            </a:r>
-            <a:endParaRPr lang="es-ES" sz="800" dirty="0"/>
-          </a:p>
-          <a:p>
-            <a:pPr marL="171450" indent="-171450">
-              <a:buChar char="•"/>
-            </a:pPr>
-            <a:endParaRPr lang="es-ES" sz="800" dirty="0">
-              <a:latin typeface="Reddit Sans"/>
-            </a:endParaRPr>
-          </a:p>
-          <a:p>
-            <a:pPr marL="171450" indent="-171450">
-              <a:buChar char="•"/>
-            </a:pPr>
-            <a:r>
-              <a:rPr lang="es-ES" sz="800" dirty="0">
-                <a:latin typeface="Reddit Sans"/>
-              </a:rPr>
-              <a:t>Slide </a:t>
-            </a:r>
-            <a:r>
-              <a:rPr lang="es-ES" sz="800" dirty="0" err="1">
-                <a:latin typeface="Reddit Sans"/>
-              </a:rPr>
-              <a:t>deck</a:t>
-            </a:r>
-            <a:r>
-              <a:rPr lang="es-ES" sz="800" dirty="0">
-                <a:latin typeface="Reddit Sans"/>
-              </a:rPr>
-              <a:t> para operación</a:t>
-            </a:r>
-          </a:p>
-          <a:p>
-            <a:pPr marL="171450" indent="-171450">
-              <a:buChar char="•"/>
-            </a:pPr>
-            <a:endParaRPr lang="es-ES" sz="800" dirty="0">
-              <a:latin typeface="Reddit Sans"/>
-            </a:endParaRPr>
-          </a:p>
-          <a:p>
-            <a:pPr marL="171450" indent="-171450">
-              <a:buChar char="•"/>
-            </a:pPr>
-            <a:r>
-              <a:rPr lang="es-ES" sz="800" dirty="0">
-                <a:latin typeface="Reddit Sans"/>
-              </a:rPr>
-              <a:t>Validación </a:t>
-            </a:r>
-            <a:r>
-              <a:rPr lang="es-ES" sz="800" dirty="0" err="1">
-                <a:latin typeface="Reddit Sans"/>
-              </a:rPr>
-              <a:t>estandarizacion</a:t>
-            </a:r>
-            <a:r>
-              <a:rPr lang="es-ES" sz="800" dirty="0">
-                <a:latin typeface="Reddit Sans"/>
-              </a:rPr>
-              <a:t> del </a:t>
-            </a:r>
-            <a:r>
-              <a:rPr lang="es-ES" sz="800" dirty="0" err="1">
-                <a:latin typeface="Reddit Sans"/>
-              </a:rPr>
-              <a:t>servicion</a:t>
-            </a:r>
-            <a:r>
-              <a:rPr lang="es-ES" sz="800" dirty="0">
-                <a:latin typeface="Reddit Sans"/>
-              </a:rPr>
-              <a:t> con comercial</a:t>
-            </a:r>
-          </a:p>
-          <a:p>
-            <a:pPr marL="171450" indent="-171450">
-              <a:buChar char="•"/>
-            </a:pPr>
-            <a:endParaRPr lang="es-ES" sz="800" dirty="0">
-              <a:latin typeface="Reddit Sans"/>
-            </a:endParaRPr>
-          </a:p>
-          <a:p>
-            <a:pPr marL="171450" indent="-171450">
-              <a:buChar char="•"/>
-            </a:pPr>
-            <a:r>
-              <a:rPr lang="es-ES" sz="800">
-                <a:latin typeface="Reddit Sans"/>
-              </a:rPr>
-              <a:t>Diseñar plan de transición operación actual</a:t>
-            </a:r>
-            <a:endParaRPr lang="es-ES" sz="800" dirty="0">
-              <a:latin typeface="Reddit Sans"/>
-            </a:endParaRPr>
-          </a:p>
-          <a:p>
-            <a:pPr marL="171450" indent="-171450">
-              <a:buChar char="•"/>
-            </a:pPr>
-            <a:endParaRPr lang="es-ES" sz="800" dirty="0">
-              <a:latin typeface="Reddit Sans"/>
-            </a:endParaRPr>
-          </a:p>
-          <a:p>
-            <a:pPr marL="171450" indent="-171450">
-              <a:buChar char="•"/>
-            </a:pPr>
-            <a:r>
-              <a:rPr lang="es-ES" sz="800" dirty="0" err="1">
-                <a:latin typeface="Reddit Sans"/>
-              </a:rPr>
-              <a:t>Habilitacion</a:t>
-            </a:r>
-            <a:r>
-              <a:rPr lang="es-ES" sz="800" dirty="0">
-                <a:latin typeface="Reddit Sans"/>
-              </a:rPr>
-              <a:t> equipo comercial</a:t>
-            </a:r>
-          </a:p>
-          <a:p>
-            <a:pPr marL="171450" indent="-171450">
-              <a:buChar char="•"/>
-            </a:pPr>
-            <a:endParaRPr lang="es-ES" sz="800" dirty="0">
-              <a:latin typeface="Reddit Sans"/>
-            </a:endParaRPr>
-          </a:p>
-          <a:p>
-            <a:pPr marL="171450" indent="-171450">
-              <a:buChar char="•"/>
-            </a:pPr>
-            <a:r>
-              <a:rPr lang="es-ES" sz="800" dirty="0">
-                <a:latin typeface="Reddit Sans"/>
-              </a:rPr>
-              <a:t>Habilitación equipo de la operación </a:t>
-            </a:r>
-            <a:r>
-              <a:rPr lang="es-ES" sz="800">
-                <a:latin typeface="Reddit Sans"/>
-              </a:rPr>
-              <a:t>wave 1</a:t>
-            </a:r>
-            <a:endParaRPr lang="es-ES" sz="800" dirty="0">
-              <a:latin typeface="Reddit Sans"/>
-            </a:endParaRPr>
-          </a:p>
-          <a:p>
-            <a:endParaRPr lang="es-ES" sz="800" dirty="0">
-              <a:latin typeface="Reddit Sans"/>
-            </a:endParaRPr>
-          </a:p>
-          <a:p>
-            <a:pPr marL="171450" indent="-171450">
-              <a:buChar char="•"/>
-            </a:pPr>
-            <a:endParaRPr lang="es-ES" sz="800" dirty="0">
-              <a:latin typeface="Reddit Sans"/>
-            </a:endParaRPr>
-          </a:p>
-          <a:p>
-            <a:pPr marL="171450" indent="-171450">
-              <a:buChar char="•"/>
-            </a:pPr>
-            <a:endParaRPr lang="es-ES" sz="800" dirty="0">
-              <a:latin typeface="Reddit Sans"/>
-            </a:endParaRPr>
-          </a:p>
-          <a:p>
-            <a:pPr marL="171450" indent="-171450">
-              <a:buChar char="•"/>
-            </a:pPr>
-            <a:endParaRPr lang="es-ES" sz="800" dirty="0">
-              <a:latin typeface="Reddit Sans"/>
-            </a:endParaRPr>
-          </a:p>
-        </p:txBody>
-      </p:sp>
-      <p:sp>
-        <p:nvSpPr>
-          <p:cNvPr id="65" name="CuadroTexto 64">
-            <a:extLst>
-              <a:ext uri="{FF2B5EF4-FFF2-40B4-BE49-F238E27FC236}">
-                <a16:creationId xmlns:a16="http://schemas.microsoft.com/office/drawing/2014/main" id="{4D67D610-C9FA-B84E-1049-D4AA7C737DDC}"/>
-              </a:ext>
-            </a:extLst>
-          </p:cNvPr>
-          <p:cNvSpPr txBox="1"/>
-          <p:nvPr/>
-        </p:nvSpPr>
-        <p:spPr>
-          <a:xfrm>
-            <a:off x="5089069" y="2141763"/>
-            <a:ext cx="1850572" cy="1938992"/>
-          </a:xfrm>
-          <a:prstGeom prst="rect">
-            <a:avLst/>
-          </a:prstGeom>
-          <a:noFill/>
-        </p:spPr>
-        <p:txBody>
-          <a:bodyPr rot="0" spcFirstLastPara="0" vertOverflow="overflow" horzOverflow="overflow" vert="horz" wrap="square" lIns="91440" tIns="45720" rIns="91440" bIns="45720" numCol="1" spcCol="0" rtlCol="0" fromWordArt="0" anchor="t" anchorCtr="0" forceAA="0" compatLnSpc="1">
-            <a:prstTxWarp prst="textNoShape">
-              <a:avLst/>
-            </a:prstTxWarp>
-            <a:spAutoFit/>
-          </a:bodyPr>
-          <a:lstStyle/>
-          <a:p>
-            <a:pPr marL="171450" indent="-171450">
-              <a:buChar char="•"/>
-            </a:pPr>
-            <a:r>
-              <a:rPr lang="es-ES" sz="800" dirty="0">
-                <a:latin typeface="Reddit Sans"/>
-              </a:rPr>
-              <a:t>Habilitación cliente sobre la evoluci</a:t>
-            </a:r>
-            <a:r>
-              <a:rPr lang="es-ES" sz="800">
-                <a:latin typeface="Reddit Sans"/>
-              </a:rPr>
-              <a:t>ón del servicio wave 1</a:t>
-            </a:r>
-            <a:endParaRPr lang="es-ES" sz="800" dirty="0">
-              <a:latin typeface="Reddit Sans"/>
-            </a:endParaRPr>
-          </a:p>
-          <a:p>
-            <a:pPr marL="171450" indent="-171450">
-              <a:buFont typeface="Arial"/>
-              <a:buChar char="•"/>
-            </a:pPr>
-            <a:endParaRPr lang="es-ES" sz="800" dirty="0">
-              <a:latin typeface="Reddit Sans"/>
-              <a:ea typeface="Reddit Sans"/>
-            </a:endParaRPr>
-          </a:p>
-          <a:p>
-            <a:pPr marL="171450" indent="-171450">
-              <a:buFont typeface="Arial,Sans-Serif"/>
-              <a:buChar char="•"/>
-            </a:pPr>
-            <a:r>
-              <a:rPr lang="es-ES" sz="800">
-                <a:latin typeface="Reddit Sans"/>
-                <a:ea typeface="Reddit Sans"/>
-              </a:rPr>
-              <a:t>Ejecutar</a:t>
-            </a:r>
-            <a:r>
-              <a:rPr lang="es-ES" sz="800" dirty="0">
-                <a:latin typeface="Reddit Sans"/>
-                <a:ea typeface="Reddit Sans"/>
-              </a:rPr>
-              <a:t> plan de transición para los clientes de la wave 1</a:t>
-            </a:r>
-          </a:p>
-          <a:p>
-            <a:pPr marL="171450" indent="-171450">
-              <a:buFont typeface="Arial,Sans-Serif"/>
-              <a:buChar char="•"/>
-            </a:pPr>
-            <a:endParaRPr lang="es-ES" sz="800" dirty="0">
-              <a:latin typeface="Reddit Sans"/>
-              <a:ea typeface="Reddit Sans"/>
-            </a:endParaRPr>
-          </a:p>
-          <a:p>
-            <a:pPr marL="171450" indent="-171450">
-              <a:buFont typeface="Arial,Sans-Serif"/>
-              <a:buChar char="•"/>
-            </a:pPr>
-            <a:r>
-              <a:rPr lang="es-ES" sz="800" dirty="0">
-                <a:latin typeface="Reddit Sans"/>
-                <a:ea typeface="Reddit Sans"/>
-              </a:rPr>
-              <a:t>Calculadora del servicio (plantilla de </a:t>
-            </a:r>
-            <a:r>
-              <a:rPr lang="es-ES" sz="800">
-                <a:latin typeface="Reddit Sans"/>
-                <a:ea typeface="Reddit Sans"/>
-              </a:rPr>
-              <a:t>estimación)</a:t>
-            </a:r>
-          </a:p>
-          <a:p>
-            <a:pPr marL="171450" indent="-171450">
-              <a:buFont typeface="Arial,Sans-Serif"/>
-              <a:buChar char="•"/>
-            </a:pPr>
-            <a:endParaRPr lang="es-ES" sz="800" dirty="0">
-              <a:latin typeface="Reddit Sans"/>
-              <a:ea typeface="Reddit Sans"/>
-            </a:endParaRPr>
-          </a:p>
-          <a:p>
-            <a:pPr marL="171450" indent="-171450">
-              <a:buFont typeface="Arial,Sans-Serif"/>
-              <a:buChar char="•"/>
-            </a:pPr>
-            <a:r>
-              <a:rPr lang="es-ES" sz="800">
-                <a:latin typeface="Reddit Sans"/>
-                <a:ea typeface="Reddit Sans"/>
-              </a:rPr>
-              <a:t>Artefactos equipos comercial (propuestas, contratos, ...)</a:t>
-            </a:r>
-            <a:endParaRPr lang="es-ES" sz="800" dirty="0">
-              <a:latin typeface="Reddit Sans"/>
-              <a:ea typeface="Reddit Sans"/>
-            </a:endParaRPr>
-          </a:p>
-          <a:p>
-            <a:pPr marL="171450" indent="-171450">
-              <a:buFont typeface="Arial,Sans-Serif"/>
-              <a:buChar char="•"/>
-            </a:pPr>
-            <a:endParaRPr lang="es-ES" sz="800" dirty="0">
-              <a:latin typeface="Reddit Sans"/>
-              <a:ea typeface="Reddit Sans"/>
-            </a:endParaRPr>
-          </a:p>
-          <a:p>
-            <a:pPr marL="171450" indent="-171450">
-              <a:buFont typeface="Arial,Sans-Serif"/>
-              <a:buChar char="•"/>
-            </a:pPr>
-            <a:r>
-              <a:rPr lang="es-ES" sz="800">
-                <a:latin typeface="Reddit Sans"/>
-                <a:ea typeface="Reddit Sans"/>
-              </a:rPr>
-              <a:t>Artefactos equipos de la operación</a:t>
-            </a:r>
-            <a:endParaRPr lang="es-ES" sz="800" dirty="0">
-              <a:latin typeface="Reddit Sans"/>
-              <a:ea typeface="Reddit Sans"/>
-            </a:endParaRPr>
-          </a:p>
-          <a:p>
-            <a:pPr marL="171450" indent="-171450">
-              <a:buChar char="•"/>
-            </a:pPr>
-            <a:endParaRPr lang="es-ES" sz="800" dirty="0">
-              <a:latin typeface="Reddit Sans"/>
-            </a:endParaRPr>
-          </a:p>
-        </p:txBody>
-      </p:sp>
-      <p:sp>
-        <p:nvSpPr>
-          <p:cNvPr id="67" name="Estrella: 5 puntas 66">
-            <a:extLst>
-              <a:ext uri="{FF2B5EF4-FFF2-40B4-BE49-F238E27FC236}">
-                <a16:creationId xmlns:a16="http://schemas.microsoft.com/office/drawing/2014/main" id="{FE56A9FC-4DA0-EA9E-B693-65DC3D0DFD1C}"/>
-              </a:ext>
-            </a:extLst>
-          </p:cNvPr>
-          <p:cNvSpPr/>
-          <p:nvPr/>
-        </p:nvSpPr>
-        <p:spPr>
-          <a:xfrm>
-            <a:off x="2121625" y="1832065"/>
-            <a:ext cx="97972" cy="114301"/>
-          </a:xfrm>
-          <a:prstGeom prst="star5">
-            <a:avLst/>
-          </a:prstGeom>
-          <a:solidFill>
-            <a:schemeClr val="accent6"/>
-          </a:solidFill>
-          <a:ln w="6350"/>
-        </p:spPr>
-        <p:style>
-          <a:lnRef idx="2">
-            <a:schemeClr val="accent1">
-              <a:shade val="15000"/>
-            </a:schemeClr>
-          </a:lnRef>
-          <a:fillRef idx="1">
-            <a:schemeClr val="accent1"/>
-          </a:fillRef>
-          <a:effectRef idx="0">
-            <a:schemeClr val="accent1"/>
-          </a:effectRef>
-          <a:fontRef idx="minor">
-            <a:schemeClr val="lt1"/>
-          </a:fontRef>
-        </p:style>
-        <p:txBody>
-          <a:bodyPr rtlCol="0" anchor="ctr"/>
-          <a:lstStyle/>
-          <a:p>
-            <a:pPr algn="ctr"/>
-            <a:endParaRPr lang="es-ES"/>
-          </a:p>
-        </p:txBody>
-      </p:sp>
-      <p:sp>
-        <p:nvSpPr>
-          <p:cNvPr id="69" name="Estrella: 5 puntas 68">
-            <a:extLst>
-              <a:ext uri="{FF2B5EF4-FFF2-40B4-BE49-F238E27FC236}">
-                <a16:creationId xmlns:a16="http://schemas.microsoft.com/office/drawing/2014/main" id="{6A96B953-3EAE-34E6-E7AB-9509AE1EB014}"/>
-              </a:ext>
-            </a:extLst>
-          </p:cNvPr>
-          <p:cNvSpPr/>
-          <p:nvPr/>
-        </p:nvSpPr>
-        <p:spPr>
-          <a:xfrm>
-            <a:off x="7210697" y="1859279"/>
-            <a:ext cx="97972" cy="114301"/>
-          </a:xfrm>
-          <a:prstGeom prst="star5">
-            <a:avLst/>
-          </a:prstGeom>
-          <a:solidFill>
-            <a:srgbClr val="7030A0"/>
-          </a:solidFill>
-          <a:ln w="6350"/>
-        </p:spPr>
-        <p:style>
-          <a:lnRef idx="2">
-            <a:schemeClr val="accent1">
-              <a:shade val="15000"/>
-            </a:schemeClr>
-          </a:lnRef>
-          <a:fillRef idx="1">
-            <a:schemeClr val="accent1"/>
-          </a:fillRef>
-          <a:effectRef idx="0">
-            <a:schemeClr val="accent1"/>
-          </a:effectRef>
-          <a:fontRef idx="minor">
-            <a:schemeClr val="lt1"/>
-          </a:fontRef>
-        </p:style>
-        <p:txBody>
-          <a:bodyPr rtlCol="0" anchor="ctr"/>
-          <a:lstStyle/>
-          <a:p>
-            <a:pPr algn="ctr"/>
-            <a:endParaRPr lang="es-ES"/>
-          </a:p>
-        </p:txBody>
-      </p:sp>
-      <p:sp>
-        <p:nvSpPr>
-          <p:cNvPr id="71" name="TextBox 14">
-            <a:extLst>
-              <a:ext uri="{FF2B5EF4-FFF2-40B4-BE49-F238E27FC236}">
-                <a16:creationId xmlns:a16="http://schemas.microsoft.com/office/drawing/2014/main" id="{CE1FE641-FA41-1611-A826-E22AF35DB61D}"/>
-              </a:ext>
-            </a:extLst>
-          </p:cNvPr>
-          <p:cNvSpPr txBox="1"/>
-          <p:nvPr/>
-        </p:nvSpPr>
-        <p:spPr>
-          <a:xfrm>
-            <a:off x="5231777" y="1888130"/>
-            <a:ext cx="925474" cy="323165"/>
-          </a:xfrm>
-          <a:prstGeom prst="rect">
-            <a:avLst/>
-          </a:prstGeom>
-          <a:noFill/>
-        </p:spPr>
-        <p:txBody>
-          <a:bodyPr wrap="square" lIns="91440" tIns="45720" rIns="91440" bIns="45720" anchor="t">
-            <a:spAutoFit/>
-          </a:bodyPr>
-          <a:lstStyle/>
-          <a:p>
-            <a:pPr defTabSz="342900">
-              <a:buClrTx/>
-              <a:defRPr sz="1000">
-                <a:solidFill>
-                  <a:srgbClr val="005DAA"/>
-                </a:solidFill>
-              </a:defRPr>
-            </a:pPr>
-            <a:r>
-              <a:rPr sz="750" kern="1200">
-                <a:solidFill>
-                  <a:srgbClr val="005DAA"/>
-                </a:solidFill>
-                <a:latin typeface="Reddit Sans"/>
-                <a:ea typeface="Reddit Sans"/>
-                <a:cs typeface="+mn-cs"/>
-              </a:rPr>
-              <a:t>◆ </a:t>
-            </a:r>
-            <a:r>
-              <a:rPr lang="es-ES" sz="750" kern="1200">
-                <a:solidFill>
-                  <a:srgbClr val="005DAA"/>
-                </a:solidFill>
-                <a:latin typeface="Reddit Sans"/>
-                <a:ea typeface="Reddit Sans"/>
-                <a:cs typeface="+mn-cs"/>
-              </a:rPr>
-              <a:t>Wave </a:t>
-            </a:r>
-            <a:r>
-              <a:rPr lang="es-ES" sz="750" kern="1200" dirty="0">
-                <a:solidFill>
-                  <a:srgbClr val="005DAA"/>
-                </a:solidFill>
-                <a:latin typeface="Reddit Sans"/>
-                <a:ea typeface="Reddit Sans"/>
-                <a:cs typeface="+mn-cs"/>
-              </a:rPr>
-              <a:t>1ª</a:t>
-            </a:r>
-            <a:r>
-              <a:rPr sz="750" kern="1200" dirty="0">
-                <a:solidFill>
-                  <a:srgbClr val="005DAA"/>
-                </a:solidFill>
-                <a:latin typeface="Reddit Sans"/>
-                <a:ea typeface="Reddit Sans"/>
-                <a:cs typeface="+mn-cs"/>
-              </a:rPr>
-              <a:t> Transición</a:t>
-            </a:r>
-            <a:endParaRPr lang="es-ES" sz="750" kern="1200" dirty="0">
-              <a:solidFill>
-                <a:srgbClr val="005DAA"/>
-              </a:solidFill>
-              <a:latin typeface="Reddit Sans"/>
-              <a:ea typeface="Reddit Sans"/>
-              <a:cs typeface="+mn-cs"/>
-            </a:endParaRPr>
-          </a:p>
-        </p:txBody>
-      </p:sp>
-      <p:sp>
-        <p:nvSpPr>
-          <p:cNvPr id="73" name="TextBox 14">
-            <a:extLst>
-              <a:ext uri="{FF2B5EF4-FFF2-40B4-BE49-F238E27FC236}">
-                <a16:creationId xmlns:a16="http://schemas.microsoft.com/office/drawing/2014/main" id="{8CE9423A-756E-9604-472D-001E3E81D468}"/>
-              </a:ext>
-            </a:extLst>
-          </p:cNvPr>
-          <p:cNvSpPr txBox="1"/>
-          <p:nvPr/>
-        </p:nvSpPr>
-        <p:spPr>
-          <a:xfrm>
-            <a:off x="8056620" y="1844586"/>
-            <a:ext cx="709065" cy="328607"/>
-          </a:xfrm>
-          <a:prstGeom prst="rect">
-            <a:avLst/>
-          </a:prstGeom>
-          <a:noFill/>
-        </p:spPr>
-        <p:txBody>
-          <a:bodyPr wrap="square" lIns="91440" tIns="45720" rIns="91440" bIns="45720" anchor="t">
-            <a:spAutoFit/>
-          </a:bodyPr>
-          <a:lstStyle/>
-          <a:p>
-            <a:pPr defTabSz="342900">
-              <a:buClrTx/>
-              <a:defRPr sz="1000">
-                <a:solidFill>
-                  <a:srgbClr val="005DAA"/>
-                </a:solidFill>
-              </a:defRPr>
-            </a:pPr>
-            <a:r>
-              <a:rPr sz="750" kern="1200" dirty="0">
-                <a:solidFill>
-                  <a:srgbClr val="005DAA"/>
-                </a:solidFill>
-                <a:latin typeface="Reddit Sans"/>
-                <a:ea typeface="Reddit Sans"/>
-                <a:cs typeface="+mn-cs"/>
-              </a:rPr>
-              <a:t>◆ </a:t>
-            </a:r>
-            <a:r>
-              <a:rPr lang="es-ES" sz="750" kern="1200">
-                <a:solidFill>
-                  <a:srgbClr val="005DAA"/>
-                </a:solidFill>
-                <a:latin typeface="Reddit Sans"/>
-                <a:ea typeface="Reddit Sans"/>
-                <a:cs typeface="+mn-cs"/>
-              </a:rPr>
-              <a:t>Wave 2</a:t>
-            </a:r>
-            <a:r>
-              <a:rPr lang="es-ES" sz="750" kern="1200" dirty="0">
-                <a:solidFill>
-                  <a:srgbClr val="005DAA"/>
-                </a:solidFill>
-                <a:latin typeface="Reddit Sans"/>
-                <a:ea typeface="Reddit Sans"/>
-                <a:cs typeface="+mn-cs"/>
-              </a:rPr>
-              <a:t>ª</a:t>
-            </a:r>
-            <a:r>
-              <a:rPr sz="750" kern="1200" dirty="0">
-                <a:solidFill>
-                  <a:srgbClr val="005DAA"/>
-                </a:solidFill>
-                <a:latin typeface="Reddit Sans"/>
-                <a:ea typeface="Reddit Sans"/>
-                <a:cs typeface="+mn-cs"/>
-              </a:rPr>
-              <a:t> Transición</a:t>
-            </a:r>
-            <a:endParaRPr lang="es-ES" sz="750" kern="1200" dirty="0">
-              <a:solidFill>
-                <a:srgbClr val="005DAA"/>
-              </a:solidFill>
-              <a:latin typeface="Reddit Sans"/>
-              <a:ea typeface="Reddit Sans"/>
-              <a:cs typeface="+mn-cs"/>
-            </a:endParaRPr>
-          </a:p>
-        </p:txBody>
-      </p:sp>
-      <p:sp>
-        <p:nvSpPr>
-          <p:cNvPr id="75" name="Estrella: 5 puntas 74">
-            <a:extLst>
-              <a:ext uri="{FF2B5EF4-FFF2-40B4-BE49-F238E27FC236}">
-                <a16:creationId xmlns:a16="http://schemas.microsoft.com/office/drawing/2014/main" id="{81F313C5-5B53-A963-0933-5D3806C604DB}"/>
-              </a:ext>
-            </a:extLst>
-          </p:cNvPr>
-          <p:cNvSpPr/>
-          <p:nvPr/>
-        </p:nvSpPr>
-        <p:spPr>
-          <a:xfrm>
-            <a:off x="7999911" y="1859278"/>
-            <a:ext cx="97972" cy="114301"/>
-          </a:xfrm>
-          <a:prstGeom prst="star5">
-            <a:avLst/>
-          </a:prstGeom>
-          <a:solidFill>
-            <a:srgbClr val="92D050"/>
-          </a:solidFill>
-          <a:ln w="6350"/>
-        </p:spPr>
-        <p:style>
-          <a:lnRef idx="2">
-            <a:schemeClr val="accent1">
-              <a:shade val="15000"/>
-            </a:schemeClr>
-          </a:lnRef>
-          <a:fillRef idx="1">
-            <a:schemeClr val="accent1"/>
-          </a:fillRef>
-          <a:effectRef idx="0">
-            <a:schemeClr val="accent1"/>
-          </a:effectRef>
-          <a:fontRef idx="minor">
-            <a:schemeClr val="lt1"/>
-          </a:fontRef>
-        </p:style>
-        <p:txBody>
-          <a:bodyPr rtlCol="0" anchor="ctr"/>
-          <a:lstStyle/>
-          <a:p>
-            <a:pPr algn="ctr"/>
-            <a:endParaRPr lang="es-ES"/>
-          </a:p>
-        </p:txBody>
-      </p:sp>
-      <p:sp>
-        <p:nvSpPr>
-          <p:cNvPr id="77" name="CuadroTexto 76">
-            <a:extLst>
-              <a:ext uri="{FF2B5EF4-FFF2-40B4-BE49-F238E27FC236}">
-                <a16:creationId xmlns:a16="http://schemas.microsoft.com/office/drawing/2014/main" id="{A242F2B6-8686-2AA1-C6E7-A7C77DB8EC93}"/>
-              </a:ext>
-            </a:extLst>
-          </p:cNvPr>
-          <p:cNvSpPr txBox="1"/>
-          <p:nvPr/>
-        </p:nvSpPr>
-        <p:spPr>
-          <a:xfrm>
-            <a:off x="6928759" y="56605"/>
-            <a:ext cx="1475013" cy="200055"/>
-          </a:xfrm>
-          <a:prstGeom prst="rect">
-            <a:avLst/>
-          </a:prstGeom>
-          <a:noFill/>
-        </p:spPr>
-        <p:txBody>
-          <a:bodyPr rot="0" spcFirstLastPara="0" vertOverflow="overflow" horzOverflow="overflow" vert="horz" wrap="square" lIns="91440" tIns="45720" rIns="91440" bIns="45720" numCol="1" spcCol="0" rtlCol="0" fromWordArt="0" anchor="t" anchorCtr="0" forceAA="0" compatLnSpc="1">
-            <a:prstTxWarp prst="textNoShape">
-              <a:avLst/>
-            </a:prstTxWarp>
-            <a:spAutoFit/>
-          </a:bodyPr>
-          <a:lstStyle/>
-          <a:p>
-            <a:r>
-              <a:rPr lang="es-ES" sz="700"/>
-              <a:t>Wave 1 : Sura + </a:t>
-            </a:r>
-            <a:r>
-              <a:rPr lang="es-ES" sz="700" err="1"/>
-              <a:t>Banc</a:t>
-            </a:r>
-            <a:r>
-              <a:rPr lang="es-ES" sz="700"/>
-              <a:t>olombia</a:t>
-            </a:r>
-            <a:endParaRPr lang="es-ES" sz="700" dirty="0"/>
-          </a:p>
-        </p:txBody>
-      </p:sp>
-      <p:sp>
-        <p:nvSpPr>
-          <p:cNvPr id="79" name="Estrella: 5 puntas 78">
-            <a:extLst>
-              <a:ext uri="{FF2B5EF4-FFF2-40B4-BE49-F238E27FC236}">
-                <a16:creationId xmlns:a16="http://schemas.microsoft.com/office/drawing/2014/main" id="{4D253D2B-D6F0-01C7-B0A6-6ABFEA98A181}"/>
-              </a:ext>
-            </a:extLst>
-          </p:cNvPr>
-          <p:cNvSpPr/>
-          <p:nvPr/>
-        </p:nvSpPr>
-        <p:spPr>
-          <a:xfrm>
-            <a:off x="6791598" y="101236"/>
-            <a:ext cx="97972" cy="114301"/>
-          </a:xfrm>
-          <a:prstGeom prst="star5">
-            <a:avLst/>
-          </a:prstGeom>
-          <a:solidFill>
-            <a:schemeClr val="accent6"/>
-          </a:solidFill>
-          <a:ln w="6350"/>
-        </p:spPr>
-        <p:style>
-          <a:lnRef idx="2">
-            <a:schemeClr val="accent1">
-              <a:shade val="15000"/>
-            </a:schemeClr>
-          </a:lnRef>
-          <a:fillRef idx="1">
-            <a:schemeClr val="accent1"/>
-          </a:fillRef>
-          <a:effectRef idx="0">
-            <a:schemeClr val="accent1"/>
-          </a:effectRef>
-          <a:fontRef idx="minor">
-            <a:schemeClr val="lt1"/>
-          </a:fontRef>
-        </p:style>
-        <p:txBody>
-          <a:bodyPr rtlCol="0" anchor="ctr"/>
-          <a:lstStyle/>
-          <a:p>
-            <a:pPr algn="ctr"/>
-            <a:endParaRPr lang="es-ES"/>
-          </a:p>
-        </p:txBody>
-      </p:sp>
-      <p:sp>
-        <p:nvSpPr>
-          <p:cNvPr id="81" name="CuadroTexto 80">
-            <a:extLst>
-              <a:ext uri="{FF2B5EF4-FFF2-40B4-BE49-F238E27FC236}">
-                <a16:creationId xmlns:a16="http://schemas.microsoft.com/office/drawing/2014/main" id="{77344D26-50FF-1B85-A155-2B5D83898AD9}"/>
-              </a:ext>
-            </a:extLst>
-          </p:cNvPr>
-          <p:cNvSpPr txBox="1"/>
-          <p:nvPr/>
-        </p:nvSpPr>
-        <p:spPr>
-          <a:xfrm>
-            <a:off x="6928759" y="274316"/>
-            <a:ext cx="1404255" cy="200055"/>
-          </a:xfrm>
-          <a:prstGeom prst="rect">
-            <a:avLst/>
-          </a:prstGeom>
-          <a:noFill/>
-        </p:spPr>
-        <p:txBody>
-          <a:bodyPr rot="0" spcFirstLastPara="0" vertOverflow="overflow" horzOverflow="overflow" vert="horz" wrap="square" lIns="91440" tIns="45720" rIns="91440" bIns="45720" numCol="1" spcCol="0" rtlCol="0" fromWordArt="0" anchor="t" anchorCtr="0" forceAA="0" compatLnSpc="1">
-            <a:prstTxWarp prst="textNoShape">
-              <a:avLst/>
-            </a:prstTxWarp>
-            <a:spAutoFit/>
-          </a:bodyPr>
-          <a:lstStyle/>
-          <a:p>
-            <a:r>
-              <a:rPr lang="es-ES" sz="700"/>
-              <a:t>Wave 2 : XM, AWS, Medicarte</a:t>
-            </a:r>
-          </a:p>
-        </p:txBody>
-      </p:sp>
-      <p:sp>
-        <p:nvSpPr>
-          <p:cNvPr id="83" name="Estrella: 5 puntas 82">
-            <a:extLst>
-              <a:ext uri="{FF2B5EF4-FFF2-40B4-BE49-F238E27FC236}">
-                <a16:creationId xmlns:a16="http://schemas.microsoft.com/office/drawing/2014/main" id="{D30AAF17-737D-3CBC-3FDD-0324F5E06EAF}"/>
-              </a:ext>
-            </a:extLst>
-          </p:cNvPr>
-          <p:cNvSpPr/>
-          <p:nvPr/>
-        </p:nvSpPr>
-        <p:spPr>
-          <a:xfrm>
-            <a:off x="6791598" y="313507"/>
-            <a:ext cx="97972" cy="114301"/>
-          </a:xfrm>
-          <a:prstGeom prst="star5">
-            <a:avLst/>
-          </a:prstGeom>
-          <a:solidFill>
-            <a:srgbClr val="7030A0"/>
-          </a:solidFill>
-          <a:ln w="6350"/>
-        </p:spPr>
-        <p:style>
-          <a:lnRef idx="2">
-            <a:schemeClr val="accent1">
-              <a:shade val="15000"/>
-            </a:schemeClr>
-          </a:lnRef>
-          <a:fillRef idx="1">
-            <a:schemeClr val="accent1"/>
-          </a:fillRef>
-          <a:effectRef idx="0">
-            <a:schemeClr val="accent1"/>
-          </a:effectRef>
-          <a:fontRef idx="minor">
-            <a:schemeClr val="lt1"/>
-          </a:fontRef>
-        </p:style>
-        <p:txBody>
-          <a:bodyPr rtlCol="0" anchor="ctr"/>
-          <a:lstStyle/>
-          <a:p>
-            <a:pPr algn="ctr"/>
-            <a:endParaRPr lang="es-ES"/>
-          </a:p>
-        </p:txBody>
-      </p:sp>
-      <p:sp>
-        <p:nvSpPr>
-          <p:cNvPr id="85" name="Estrella: 5 puntas 84">
-            <a:extLst>
-              <a:ext uri="{FF2B5EF4-FFF2-40B4-BE49-F238E27FC236}">
-                <a16:creationId xmlns:a16="http://schemas.microsoft.com/office/drawing/2014/main" id="{D96B36E2-EE26-D336-A4A4-5DA35E386A50}"/>
-              </a:ext>
-            </a:extLst>
-          </p:cNvPr>
-          <p:cNvSpPr/>
-          <p:nvPr/>
-        </p:nvSpPr>
-        <p:spPr>
-          <a:xfrm>
-            <a:off x="6797040" y="520335"/>
-            <a:ext cx="97972" cy="114301"/>
-          </a:xfrm>
-          <a:prstGeom prst="star5">
-            <a:avLst/>
-          </a:prstGeom>
-          <a:solidFill>
-            <a:srgbClr val="92D050"/>
-          </a:solidFill>
-          <a:ln w="6350"/>
-        </p:spPr>
-        <p:style>
-          <a:lnRef idx="2">
-            <a:schemeClr val="accent1">
-              <a:shade val="15000"/>
-            </a:schemeClr>
-          </a:lnRef>
-          <a:fillRef idx="1">
-            <a:schemeClr val="accent1"/>
-          </a:fillRef>
-          <a:effectRef idx="0">
-            <a:schemeClr val="accent1"/>
-          </a:effectRef>
-          <a:fontRef idx="minor">
-            <a:schemeClr val="lt1"/>
-          </a:fontRef>
-        </p:style>
-        <p:txBody>
-          <a:bodyPr rtlCol="0" anchor="ctr"/>
-          <a:lstStyle/>
-          <a:p>
-            <a:pPr algn="ctr"/>
-            <a:endParaRPr lang="es-ES"/>
-          </a:p>
-        </p:txBody>
-      </p:sp>
-      <p:sp>
-        <p:nvSpPr>
-          <p:cNvPr id="87" name="CuadroTexto 86">
-            <a:extLst>
-              <a:ext uri="{FF2B5EF4-FFF2-40B4-BE49-F238E27FC236}">
-                <a16:creationId xmlns:a16="http://schemas.microsoft.com/office/drawing/2014/main" id="{7C692534-F65E-5138-FDEF-C0B07CBF6B31}"/>
-              </a:ext>
-            </a:extLst>
-          </p:cNvPr>
-          <p:cNvSpPr txBox="1"/>
-          <p:nvPr/>
-        </p:nvSpPr>
-        <p:spPr>
-          <a:xfrm>
-            <a:off x="6906988" y="464817"/>
-            <a:ext cx="1605640" cy="307777"/>
-          </a:xfrm>
-          <a:prstGeom prst="rect">
-            <a:avLst/>
-          </a:prstGeom>
-          <a:noFill/>
-        </p:spPr>
-        <p:txBody>
-          <a:bodyPr rot="0" spcFirstLastPara="0" vertOverflow="overflow" horzOverflow="overflow" vert="horz" wrap="square" lIns="91440" tIns="45720" rIns="91440" bIns="45720" numCol="1" spcCol="0" rtlCol="0" fromWordArt="0" anchor="t" anchorCtr="0" forceAA="0" compatLnSpc="1">
-            <a:prstTxWarp prst="textNoShape">
-              <a:avLst/>
-            </a:prstTxWarp>
-            <a:spAutoFit/>
-          </a:bodyPr>
-          <a:lstStyle/>
-          <a:p>
-            <a:r>
-              <a:rPr lang="es-ES" sz="700"/>
-              <a:t>Lanzamiento servicio a nuevos clientes</a:t>
-            </a:r>
-            <a:endParaRPr lang="es-ES"/>
-          </a:p>
-        </p:txBody>
-      </p:sp>
-      <p:sp>
-        <p:nvSpPr>
-          <p:cNvPr id="88" name="CuadroTexto 87">
-            <a:extLst>
-              <a:ext uri="{FF2B5EF4-FFF2-40B4-BE49-F238E27FC236}">
-                <a16:creationId xmlns:a16="http://schemas.microsoft.com/office/drawing/2014/main" id="{3C497DDC-BF2A-0C01-A11A-988B41A22048}"/>
-              </a:ext>
-            </a:extLst>
-          </p:cNvPr>
-          <p:cNvSpPr txBox="1"/>
-          <p:nvPr/>
-        </p:nvSpPr>
-        <p:spPr>
-          <a:xfrm>
-            <a:off x="6857997" y="2141763"/>
-            <a:ext cx="1709058" cy="2554545"/>
-          </a:xfrm>
-          <a:prstGeom prst="rect">
-            <a:avLst/>
-          </a:prstGeom>
-          <a:noFill/>
-        </p:spPr>
-        <p:txBody>
-          <a:bodyPr rot="0" spcFirstLastPara="0" vertOverflow="overflow" horzOverflow="overflow" vert="horz" wrap="square" lIns="91440" tIns="45720" rIns="91440" bIns="45720" numCol="1" spcCol="0" rtlCol="0" fromWordArt="0" anchor="t" anchorCtr="0" forceAA="0" compatLnSpc="1">
-            <a:prstTxWarp prst="textNoShape">
-              <a:avLst/>
-            </a:prstTxWarp>
-            <a:spAutoFit/>
-          </a:bodyPr>
-          <a:lstStyle/>
-          <a:p>
-            <a:pPr marL="171450" indent="-171450">
-              <a:buChar char="•"/>
-            </a:pPr>
-            <a:r>
-              <a:rPr lang="es-ES" sz="800" err="1">
-                <a:latin typeface="Reddit Sans"/>
-              </a:rPr>
-              <a:t>Actualizaci</a:t>
-            </a:r>
-            <a:r>
-              <a:rPr lang="es-ES" sz="800" dirty="0">
-                <a:latin typeface="Reddit Sans"/>
-              </a:rPr>
-              <a:t>ón del servicio en </a:t>
-            </a:r>
-            <a:r>
-              <a:rPr lang="es-ES" sz="800">
-                <a:latin typeface="Reddit Sans"/>
-              </a:rPr>
-              <a:t>la herramienta</a:t>
-            </a:r>
-            <a:r>
-              <a:rPr lang="es-ES" sz="800" dirty="0">
-                <a:latin typeface="Reddit Sans"/>
-              </a:rPr>
-              <a:t> de procesos</a:t>
-            </a:r>
-            <a:endParaRPr lang="es-ES" sz="800"/>
-          </a:p>
-          <a:p>
-            <a:pPr marL="171450" indent="-171450">
-              <a:buChar char="•"/>
-            </a:pPr>
-            <a:endParaRPr lang="es-ES" sz="800" dirty="0">
-              <a:latin typeface="Reddit Sans"/>
-            </a:endParaRPr>
-          </a:p>
-          <a:p>
-            <a:pPr marL="171450" indent="-171450">
-              <a:buChar char="•"/>
-            </a:pPr>
-            <a:r>
-              <a:rPr lang="es-ES" sz="800" dirty="0">
-                <a:latin typeface="Reddit Sans"/>
-              </a:rPr>
-              <a:t>Lanzamiento </a:t>
-            </a:r>
-            <a:r>
-              <a:rPr lang="es-ES" sz="800" err="1">
-                <a:latin typeface="Reddit Sans"/>
-              </a:rPr>
-              <a:t>ofici</a:t>
-            </a:r>
-            <a:r>
-              <a:rPr lang="es-ES" sz="800" dirty="0">
-                <a:latin typeface="Reddit Sans"/>
-              </a:rPr>
-              <a:t>al del servicio estandarizado de mesas de servicio de </a:t>
-            </a:r>
-            <a:r>
-              <a:rPr lang="es-ES" sz="800">
-                <a:latin typeface="Reddit Sans"/>
-              </a:rPr>
-              <a:t>próxima</a:t>
-            </a:r>
-            <a:r>
-              <a:rPr lang="es-ES" sz="800" dirty="0">
-                <a:latin typeface="Reddit Sans"/>
-              </a:rPr>
-              <a:t> generación</a:t>
-            </a:r>
-          </a:p>
-          <a:p>
-            <a:pPr marL="171450" indent="-171450">
-              <a:buChar char="•"/>
-            </a:pPr>
-            <a:endParaRPr lang="es-ES" sz="800" dirty="0">
-              <a:latin typeface="Reddit Sans"/>
-            </a:endParaRPr>
-          </a:p>
-          <a:p>
-            <a:pPr marL="171450" indent="-171450">
-              <a:buChar char="•"/>
-            </a:pPr>
-            <a:r>
-              <a:rPr lang="es-ES" sz="800" dirty="0">
-                <a:latin typeface="Reddit Sans"/>
-              </a:rPr>
-              <a:t>Identificar automatizaciones y </a:t>
-            </a:r>
-            <a:r>
-              <a:rPr lang="es-ES" sz="800">
-                <a:latin typeface="Reddit Sans"/>
-              </a:rPr>
-              <a:t>evolución continua del servicio</a:t>
-            </a:r>
-          </a:p>
-          <a:p>
-            <a:pPr marL="171450" indent="-171450">
-              <a:buChar char="•"/>
-            </a:pPr>
-            <a:endParaRPr lang="es-ES" sz="800" dirty="0">
-              <a:latin typeface="Reddit Sans"/>
-            </a:endParaRPr>
-          </a:p>
-          <a:p>
-            <a:pPr marL="171450" indent="-171450">
-              <a:buChar char="•"/>
-            </a:pPr>
-            <a:r>
-              <a:rPr lang="es-ES" sz="800">
-                <a:latin typeface="Reddit Sans"/>
-                <a:ea typeface="Reddit Sans"/>
-              </a:rPr>
-              <a:t>Habilitación equipo de la operación wave 2</a:t>
-            </a:r>
-            <a:endParaRPr lang="es-ES" sz="800" dirty="0">
-              <a:ea typeface="Reddit Sans"/>
-            </a:endParaRPr>
-          </a:p>
-          <a:p>
-            <a:pPr marL="171450" indent="-171450">
-              <a:buChar char="•"/>
-            </a:pPr>
-            <a:endParaRPr lang="es-ES" sz="800" dirty="0">
-              <a:latin typeface="Reddit Sans"/>
-              <a:ea typeface="Reddit Sans"/>
-            </a:endParaRPr>
-          </a:p>
-          <a:p>
-            <a:pPr marL="171450" indent="-171450">
-              <a:buFont typeface="Arial,Sans-Serif"/>
-              <a:buChar char="•"/>
-            </a:pPr>
-            <a:r>
-              <a:rPr lang="es-ES" sz="800">
-                <a:latin typeface="Reddit Sans"/>
-                <a:ea typeface="Reddit Sans"/>
-              </a:rPr>
-              <a:t>Habilitación cliente sobre la evolución del servicio wave 2</a:t>
-            </a:r>
-          </a:p>
-          <a:p>
-            <a:pPr marL="171450" indent="-171450">
-              <a:buFont typeface="Arial,Sans-Serif"/>
-              <a:buChar char="•"/>
-            </a:pPr>
-            <a:endParaRPr lang="es-ES" sz="800" dirty="0">
-              <a:latin typeface="Reddit Sans"/>
-              <a:ea typeface="Reddit Sans"/>
-            </a:endParaRPr>
-          </a:p>
-          <a:p>
-            <a:pPr marL="171450" indent="-171450">
-              <a:buFont typeface="Arial,Sans-Serif"/>
-              <a:buChar char="•"/>
-            </a:pPr>
-            <a:r>
-              <a:rPr lang="es-ES" sz="800">
-                <a:latin typeface="Reddit Sans"/>
-                <a:ea typeface="Reddit Sans"/>
-              </a:rPr>
-              <a:t>Planes de evolución del servicio</a:t>
-            </a:r>
-            <a:endParaRPr lang="es-ES" sz="800" dirty="0">
-              <a:latin typeface="Reddit Sans"/>
-              <a:ea typeface="Reddit Sans"/>
-            </a:endParaRPr>
-          </a:p>
-        </p:txBody>
-      </p:sp>
-    </p:spTree>
-    <p:extLst>
-      <p:ext uri="{BB962C8B-B14F-4D97-AF65-F5344CB8AC3E}">
-        <p14:creationId xmlns:p14="http://schemas.microsoft.com/office/powerpoint/2010/main" val="3541293710"/>
-      </p:ext>
-    </p:extLst>
-  </p:cSld>
-  <p:clrMapOvr>
-    <a:masterClrMapping/>
-  </p:clrMapOvr>
-</p:sld>
-</file>
-
-<file path=ppt/slides/slide11.xml><?xml version="1.0" encoding="utf-8"?>
-<p:sld xmlns:a="http://schemas.openxmlformats.org/drawingml/2006/main" xmlns:r="http://schemas.openxmlformats.org/officeDocument/2006/relationships" xmlns:p="http://schemas.openxmlformats.org/presentationml/2006/main">
+<p:sld xmlns:a="http://schemas.openxmlformats.org/drawingml/2006/main" xmlns:r="http://schemas.openxmlformats.org/officeDocument/2006/relationships" xmlns:p="http://schemas.openxmlformats.org/presentationml/2006/main" show="0">
   <p:cSld>
     <p:spTree>
       <p:nvGrpSpPr>
@@ -17655,7 +15601,7 @@
 </p:sld>
 </file>
 
-<file path=ppt/slides/slide12.xml><?xml version="1.0" encoding="utf-8"?>
+<file path=ppt/slides/slide11.xml><?xml version="1.0" encoding="utf-8"?>
 <p:sld xmlns:a="http://schemas.openxmlformats.org/drawingml/2006/main" xmlns:r="http://schemas.openxmlformats.org/officeDocument/2006/relationships" xmlns:p="http://schemas.openxmlformats.org/presentationml/2006/main">
   <p:cSld>
     <p:spTree>
@@ -17680,7 +15626,7 @@
 </p:sld>
 </file>
 
-<file path=ppt/slides/slide13.xml><?xml version="1.0" encoding="utf-8"?>
+<file path=ppt/slides/slide12.xml><?xml version="1.0" encoding="utf-8"?>
 <p:sld xmlns:a="http://schemas.openxmlformats.org/drawingml/2006/main" xmlns:r="http://schemas.openxmlformats.org/officeDocument/2006/relationships" xmlns:p="http://schemas.openxmlformats.org/presentationml/2006/main">
   <p:cSld>
     <p:spTree>
@@ -17917,8 +15863,8 @@
         </p:nvSpPr>
         <p:spPr>
           <a:xfrm>
-            <a:off x="159965" y="2820693"/>
-            <a:ext cx="5437586" cy="868886"/>
+            <a:off x="361349" y="2820693"/>
+            <a:ext cx="5383159" cy="1554686"/>
           </a:xfrm>
           <a:prstGeom prst="rect">
             <a:avLst/>
@@ -17952,7 +15898,7 @@
                   <a:srgbClr val="FFFFFF"/>
                 </a:highlight>
               </a:rPr>
-              <a:t>La Mesa de Servicio de Nueva Generación transforma el soporte tecnológico de un costo operativo a una </a:t>
+              <a:t>La Mesa de Servicio de Nueva Generación transforma el soporte tecnológico de un costo operativo a una ventaja competitiva sostenible en el tiempo. Estandariza la operación con roles claros, procesos definidos y conocimiento institucionalizado con IA. Convirtiendo la mesa en un servicio predecible, medible y escalable en donde el cliente puede </a:t>
             </a:r>
             <a:r>
               <a:rPr lang="es">
@@ -17963,24 +15909,9 @@
                   <a:srgbClr val="FFFFFF"/>
                 </a:highlight>
               </a:rPr>
-              <a:t>ventaja competitiva</a:t>
-            </a:r>
-            <a:r>
-              <a:rPr lang="es" dirty="0">
-                <a:solidFill>
-                  <a:srgbClr val="222222"/>
-                </a:solidFill>
-                <a:highlight>
-                  <a:srgbClr val="FFFFFF"/>
-                </a:highlight>
-              </a:rPr>
-              <a:t> sostenible en el tiempo.</a:t>
-            </a:r>
-            <a:endParaRPr lang="es-ES" dirty="0">
-              <a:solidFill>
-                <a:srgbClr val="595959"/>
-              </a:solidFill>
-            </a:endParaRPr>
+              <a:t>crecer y confiar. </a:t>
+            </a:r>
+            <a:endParaRPr lang="es-ES"/>
           </a:p>
         </p:txBody>
       </p:sp>
@@ -18129,8 +16060,8 @@
         </p:nvSpPr>
         <p:spPr>
           <a:xfrm>
-            <a:off x="6275615" y="2822122"/>
-            <a:ext cx="2797628" cy="2222211"/>
+            <a:off x="6319158" y="1913166"/>
+            <a:ext cx="2705099" cy="3376374"/>
           </a:xfrm>
           <a:prstGeom prst="rect">
             <a:avLst/>
@@ -18152,7 +16083,7 @@
               </a:lnSpc>
             </a:pPr>
             <a:r>
-              <a:rPr lang="es-ES" sz="800" b="1" i="0" u="none" strike="noStrike" baseline="0">
+              <a:rPr lang="es-ES" sz="1000" b="1" i="0" u="none" strike="noStrike" baseline="0">
                 <a:solidFill>
                   <a:schemeClr val="bg1"/>
                 </a:solidFill>
@@ -18163,7 +16094,7 @@
               <a:t>Para el cliente</a:t>
             </a:r>
             <a:r>
-              <a:rPr lang="en-US" sz="800" b="0" i="0">
+              <a:rPr lang="en-US" sz="1000" b="0" i="0">
                 <a:solidFill>
                   <a:schemeClr val="bg1"/>
                 </a:solidFill>
@@ -18173,7 +16104,7 @@
               </a:rPr>
               <a:t>​</a:t>
             </a:r>
-            <a:endParaRPr lang="en-US" sz="800" b="0" i="0" dirty="0">
+            <a:endParaRPr lang="en-US" sz="1000" b="0" i="0" dirty="0">
               <a:solidFill>
                 <a:schemeClr val="bg1"/>
               </a:solidFill>
@@ -18189,7 +16120,7 @@
               </a:lnSpc>
             </a:pPr>
             <a:r>
-              <a:rPr lang="es-ES" sz="800" b="0" i="0" u="none" strike="noStrike" baseline="0" dirty="0" err="1">
+              <a:rPr lang="es-ES" sz="1000" b="0" i="0" u="none" strike="noStrike" baseline="0" dirty="0" err="1">
                 <a:solidFill>
                   <a:schemeClr val="bg1"/>
                 </a:solidFill>
@@ -18200,7 +16131,7 @@
               <a:t>SLAs</a:t>
             </a:r>
             <a:r>
-              <a:rPr lang="es-ES" sz="800" b="0" i="0" u="none" strike="noStrike" baseline="0" dirty="0">
+              <a:rPr lang="es-ES" sz="1000" b="0" i="0" u="none" strike="noStrike" baseline="0" dirty="0">
                 <a:solidFill>
                   <a:schemeClr val="bg1"/>
                 </a:solidFill>
@@ -18211,7 +16142,7 @@
               <a:t> cumplidos, menos interrupciones y visibilidad real de la </a:t>
             </a:r>
             <a:r>
-              <a:rPr lang="es-ES" sz="800" b="0" i="0" u="none" strike="noStrike" baseline="0" dirty="0" err="1">
+              <a:rPr lang="es-ES" sz="1000" dirty="0">
                 <a:solidFill>
                   <a:schemeClr val="bg1"/>
                 </a:solidFill>
@@ -18219,10 +16150,10 @@
                 <a:ea typeface="Segoe UI"/>
                 <a:cs typeface="Segoe UI"/>
               </a:rPr>
-              <a:t>operacion</a:t>
-            </a:r>
-            <a:r>
-              <a:rPr lang="es-ES" sz="800" b="0" i="0" u="none" strike="noStrike" baseline="0" dirty="0">
+              <a:t>operación</a:t>
+            </a:r>
+            <a:r>
+              <a:rPr lang="es-ES" sz="1000" b="0" i="0" u="none" strike="noStrike" baseline="0" dirty="0">
                 <a:solidFill>
                   <a:schemeClr val="bg1"/>
                 </a:solidFill>
@@ -18233,7 +16164,7 @@
               <a:t> en tiempo real.</a:t>
             </a:r>
             <a:r>
-              <a:rPr lang="en-US" sz="800" b="0" i="0" dirty="0">
+              <a:rPr lang="en-US" sz="1000" b="0" i="0" dirty="0">
                 <a:solidFill>
                   <a:schemeClr val="bg1"/>
                 </a:solidFill>
@@ -18250,7 +16181,7 @@
                 <a:spcPct val="150000"/>
               </a:lnSpc>
             </a:pPr>
-            <a:endParaRPr lang="en-US" sz="800" dirty="0">
+            <a:endParaRPr lang="en-US" sz="1000" dirty="0">
               <a:solidFill>
                 <a:schemeClr val="bg1"/>
               </a:solidFill>
@@ -18266,7 +16197,7 @@
               </a:lnSpc>
             </a:pPr>
             <a:r>
-              <a:rPr lang="es-ES" sz="800" b="1" i="0" u="none" strike="noStrike" baseline="0" dirty="0">
+              <a:rPr lang="es-ES" sz="1000" b="1" i="0" u="none" strike="noStrike" baseline="0" dirty="0">
                 <a:solidFill>
                   <a:schemeClr val="bg1"/>
                 </a:solidFill>
@@ -18277,7 +16208,7 @@
               <a:t>Para </a:t>
             </a:r>
             <a:r>
-              <a:rPr lang="es-ES" sz="800" b="1" i="0" u="none" strike="noStrike" baseline="0" dirty="0" err="1">
+              <a:rPr lang="es-ES" sz="1000" b="1" i="0" u="none" strike="noStrike" baseline="0" dirty="0" err="1">
                 <a:solidFill>
                   <a:schemeClr val="bg1"/>
                 </a:solidFill>
@@ -18288,7 +16219,7 @@
               <a:t>PersonalSoft</a:t>
             </a:r>
             <a:r>
-              <a:rPr lang="en-US" sz="800" b="0" i="0" dirty="0">
+              <a:rPr lang="en-US" sz="1000" b="0" i="0" dirty="0">
                 <a:solidFill>
                   <a:schemeClr val="bg1"/>
                 </a:solidFill>
@@ -18306,7 +16237,7 @@
               </a:lnSpc>
             </a:pPr>
             <a:r>
-              <a:rPr lang="es-ES" sz="800" b="0" i="0" u="none" strike="noStrike" baseline="0" dirty="0" err="1">
+              <a:rPr lang="es-ES" sz="1000">
                 <a:solidFill>
                   <a:schemeClr val="bg1"/>
                 </a:solidFill>
@@ -18314,10 +16245,10 @@
                 <a:ea typeface="Segoe UI"/>
                 <a:cs typeface="Segoe UI"/>
               </a:rPr>
-              <a:t>Margenes</a:t>
-            </a:r>
-            <a:r>
-              <a:rPr lang="es-ES" sz="800" b="0" i="0" u="none" strike="noStrike" baseline="0" dirty="0">
+              <a:t>Márgenes</a:t>
+            </a:r>
+            <a:r>
+              <a:rPr lang="es-ES" sz="1000" b="0" i="0" u="none" strike="noStrike" baseline="0" dirty="0">
                 <a:solidFill>
                   <a:schemeClr val="bg1"/>
                 </a:solidFill>
@@ -18328,7 +16259,7 @@
               <a:t> que mejoran con la </a:t>
             </a:r>
             <a:r>
-              <a:rPr lang="es-ES" sz="800" b="0" i="0" u="none" strike="noStrike" baseline="0" dirty="0" err="1">
+              <a:rPr lang="es-ES" sz="1000">
                 <a:solidFill>
                   <a:schemeClr val="bg1"/>
                 </a:solidFill>
@@ -18336,10 +16267,10 @@
                 <a:ea typeface="Segoe UI"/>
                 <a:cs typeface="Segoe UI"/>
               </a:rPr>
-              <a:t>automatizacion</a:t>
-            </a:r>
-            <a:r>
-              <a:rPr lang="es-ES" sz="800" b="0" i="0" u="none" strike="noStrike" baseline="0" dirty="0">
+              <a:t>automatización</a:t>
+            </a:r>
+            <a:r>
+              <a:rPr lang="es-ES" sz="1000" b="0" i="0" u="none" strike="noStrike" baseline="0" dirty="0">
                 <a:solidFill>
                   <a:schemeClr val="bg1"/>
                 </a:solidFill>
@@ -18350,7 +16281,7 @@
               <a:t>.</a:t>
             </a:r>
             <a:r>
-              <a:rPr lang="en-US" sz="800" b="0" i="0" dirty="0">
+              <a:rPr lang="en-US" sz="1000" b="0" i="0" dirty="0">
                 <a:solidFill>
                   <a:schemeClr val="bg1"/>
                 </a:solidFill>
@@ -18367,7 +16298,7 @@
                 <a:spcPct val="150000"/>
               </a:lnSpc>
             </a:pPr>
-            <a:endParaRPr lang="en-US" sz="800" dirty="0">
+            <a:endParaRPr lang="en-US" sz="1000" dirty="0">
               <a:solidFill>
                 <a:schemeClr val="bg1"/>
               </a:solidFill>
@@ -18383,7 +16314,7 @@
               </a:lnSpc>
             </a:pPr>
             <a:r>
-              <a:rPr lang="es-ES" sz="800" b="1" i="0" u="none" strike="noStrike" baseline="0">
+              <a:rPr lang="es-ES" sz="1000" b="1" i="0" u="none" strike="noStrike" baseline="0">
                 <a:solidFill>
                   <a:schemeClr val="bg1"/>
                 </a:solidFill>
@@ -18394,7 +16325,7 @@
               <a:t>Para el mercado</a:t>
             </a:r>
             <a:r>
-              <a:rPr lang="en-US" sz="800" b="0" i="0">
+              <a:rPr lang="en-US" sz="1000" b="0" i="0">
                 <a:solidFill>
                   <a:schemeClr val="bg1"/>
                 </a:solidFill>
@@ -18404,7 +16335,7 @@
               </a:rPr>
               <a:t>​</a:t>
             </a:r>
-            <a:endParaRPr lang="en-US" sz="800" b="0" i="0" dirty="0">
+            <a:endParaRPr lang="en-US" sz="1000" b="0" i="0" dirty="0">
               <a:solidFill>
                 <a:schemeClr val="bg1"/>
               </a:solidFill>
@@ -18420,7 +16351,7 @@
               </a:lnSpc>
             </a:pPr>
             <a:r>
-              <a:rPr lang="es-ES" sz="800" b="0" i="0" u="none" strike="noStrike" baseline="0">
+              <a:rPr lang="es-ES" sz="1000" b="0" i="0" u="none" strike="noStrike" baseline="0">
                 <a:solidFill>
                   <a:schemeClr val="bg1"/>
                 </a:solidFill>
@@ -18512,13 +16443,13 @@
         </p:nvSpPr>
         <p:spPr>
           <a:xfrm>
-            <a:off x="442459" y="1060903"/>
-            <a:ext cx="6769326" cy="3028950"/>
+            <a:off x="415245" y="712560"/>
+            <a:ext cx="7602083" cy="3894364"/>
           </a:xfrm>
         </p:spPr>
         <p:txBody>
           <a:bodyPr>
-            <a:normAutofit/>
+            <a:normAutofit fontScale="92500" lnSpcReduction="10000"/>
           </a:bodyPr>
           <a:lstStyle/>
           <a:p>
@@ -18532,31 +16463,46 @@
               <a:buNone/>
             </a:pPr>
             <a:r>
-              <a:rPr lang="es" sz="1200" b="1" dirty="0">
+              <a:rPr lang="es" sz="1100" b="1" dirty="0">
                 <a:solidFill>
                   <a:srgbClr val="D0021B"/>
                 </a:solidFill>
               </a:rPr>
-              <a:t>Sin limites claros del servicio ni roles definidos</a:t>
-            </a:r>
-            <a:endParaRPr lang="en-US" sz="1200" dirty="0">
+              <a:t>Sin </a:t>
+            </a:r>
+            <a:r>
+              <a:rPr lang="es" sz="1100" b="1">
+                <a:solidFill>
+                  <a:srgbClr val="D0021B"/>
+                </a:solidFill>
+              </a:rPr>
+              <a:t>límites</a:t>
+            </a:r>
+            <a:r>
+              <a:rPr lang="es" sz="1100" b="1" dirty="0">
+                <a:solidFill>
+                  <a:srgbClr val="D0021B"/>
+                </a:solidFill>
+              </a:rPr>
+              <a:t> claros del servicio ni roles definidos</a:t>
+            </a:r>
+            <a:endParaRPr lang="en-US" sz="1100">
               <a:solidFill>
                 <a:srgbClr val="000000"/>
               </a:solidFill>
             </a:endParaRPr>
           </a:p>
           <a:p>
-            <a:pPr marL="0" indent="0">
+            <a:pPr marL="171450" indent="-171450">
               <a:lnSpc>
                 <a:spcPct val="114999"/>
               </a:lnSpc>
               <a:spcAft>
                 <a:spcPts val="700"/>
               </a:spcAft>
-              <a:buNone/>
             </a:pPr>
             <a:r>
-              <a:rPr lang="es" sz="1000" dirty="0">
+              <a:rPr lang="es" sz="1100" dirty="0">
                 <a:solidFill>
                   <a:srgbClr val="444444"/>
                 </a:solidFill>
@@ -18564,150 +16510,100 @@
               <a:t>No hay un </a:t>
             </a:r>
             <a:r>
-              <a:rPr lang="es" sz="1000" dirty="0" err="1">
+              <a:rPr lang="es" sz="1100">
                 <a:solidFill>
                   <a:srgbClr val="444444"/>
                 </a:solidFill>
               </a:rPr>
-              <a:t>estandar</a:t>
-            </a:r>
-            <a:r>
-              <a:rPr lang="es" sz="1000" dirty="0">
+              <a:t>estándar</a:t>
+            </a:r>
+            <a:r>
+              <a:rPr lang="es" sz="1100" dirty="0">
                 <a:solidFill>
                   <a:srgbClr val="444444"/>
                 </a:solidFill>
               </a:rPr>
-              <a:t> de niveles N1/N2/N3, limites del alcance ni RACI documentado. El Gerente de Mesa y el </a:t>
-            </a:r>
-            <a:r>
-              <a:rPr lang="es" sz="1000" dirty="0" err="1">
+              <a:t> de niveles N1/N2/N3, </a:t>
+            </a:r>
+            <a:r>
+              <a:rPr lang="es" sz="1100">
                 <a:solidFill>
                   <a:srgbClr val="444444"/>
                 </a:solidFill>
               </a:rPr>
-              <a:t>Lider</a:t>
-            </a:r>
-            <a:r>
-              <a:rPr lang="es" sz="1000" dirty="0">
+              <a:t>límites</a:t>
+            </a:r>
+            <a:r>
+              <a:rPr lang="es" sz="1100" dirty="0">
                 <a:solidFill>
                   <a:srgbClr val="444444"/>
                 </a:solidFill>
               </a:rPr>
-              <a:t> </a:t>
-            </a:r>
-            <a:r>
-              <a:rPr lang="es" sz="1000" dirty="0" err="1">
-                <a:solidFill>
-                  <a:srgbClr val="444444"/>
-                </a:solidFill>
-              </a:rPr>
-              <a:t>Tecnico</a:t>
-            </a:r>
-            <a:r>
-              <a:rPr lang="es" sz="1000" dirty="0">
-                <a:solidFill>
-                  <a:srgbClr val="444444"/>
-                </a:solidFill>
-              </a:rPr>
-              <a:t> no tienen roles diferenciados. Cada mesa opera diferente.</a:t>
-            </a:r>
-            <a:endParaRPr lang="en-US" sz="1000" dirty="0">
+              <a:t> del alcance ni RACI documentado. </a:t>
+            </a:r>
+            <a:endParaRPr lang="en-US" sz="1100">
               <a:solidFill>
                 <a:srgbClr val="000000"/>
               </a:solidFill>
             </a:endParaRPr>
           </a:p>
           <a:p>
-            <a:pPr marL="0" indent="0">
+            <a:pPr marL="171450" indent="-171450">
               <a:lnSpc>
                 <a:spcPct val="114999"/>
               </a:lnSpc>
               <a:spcAft>
-                <a:spcPts val="300"/>
-              </a:spcAft>
-              <a:buNone/>
+                <a:spcPts val="700"/>
+              </a:spcAft>
             </a:pPr>
             <a:r>
-              <a:rPr lang="es" sz="1200" b="1" dirty="0">
-                <a:solidFill>
-                  <a:srgbClr val="D0021B"/>
+              <a:rPr lang="es" sz="1100" dirty="0">
+                <a:solidFill>
+                  <a:srgbClr val="444444"/>
                 </a:solidFill>
               </a:rPr>
-              <a:t>Modelo </a:t>
-            </a:r>
-            <a:r>
-              <a:rPr lang="es" sz="1200" b="1" dirty="0" err="1">
-                <a:solidFill>
-                  <a:srgbClr val="D0021B"/>
+              <a:t>El Gerente de Mesa y el </a:t>
+            </a:r>
+            <a:r>
+              <a:rPr lang="es" sz="1100">
+                <a:solidFill>
+                  <a:srgbClr val="444444"/>
                 </a:solidFill>
               </a:rPr>
-              <a:t>economico</a:t>
-            </a:r>
-            <a:r>
-              <a:rPr lang="es" sz="1200" b="1" dirty="0">
-                <a:solidFill>
-                  <a:srgbClr val="D0021B"/>
+              <a:t>Líder</a:t>
+            </a:r>
+            <a:r>
+              <a:rPr lang="es" sz="1100" dirty="0">
+                <a:solidFill>
+                  <a:srgbClr val="444444"/>
                 </a:solidFill>
               </a:rPr>
-              <a:t> indexado al FTE, sin capacidad de escalar</a:t>
-            </a:r>
-            <a:endParaRPr lang="en-US" sz="1200" dirty="0">
+              <a:t> Técnico no tienen roles diferenciados. </a:t>
+            </a:r>
+            <a:endParaRPr lang="en-US" sz="1100">
               <a:solidFill>
                 <a:srgbClr val="000000"/>
               </a:solidFill>
             </a:endParaRPr>
           </a:p>
           <a:p>
-            <a:pPr marL="0" indent="0">
+            <a:pPr marL="171450" indent="-171450">
               <a:lnSpc>
                 <a:spcPct val="114999"/>
               </a:lnSpc>
               <a:spcAft>
                 <a:spcPts val="700"/>
               </a:spcAft>
-              <a:buNone/>
             </a:pPr>
             <a:r>
-              <a:rPr lang="es" sz="1000" dirty="0">
+              <a:rPr lang="es" sz="1100" dirty="0">
                 <a:solidFill>
                   <a:srgbClr val="444444"/>
                 </a:solidFill>
               </a:rPr>
-              <a:t>El costo crece con el volumen de tickets. No hay GAP negociado para temas administrativos. El cliente no quiere pagar mas y PS no tiene como mejorar </a:t>
-            </a:r>
-            <a:r>
-              <a:rPr lang="es" sz="1000" dirty="0" err="1">
-                <a:solidFill>
-                  <a:srgbClr val="444444"/>
-                </a:solidFill>
-              </a:rPr>
-              <a:t>margenes</a:t>
-            </a:r>
-            <a:r>
-              <a:rPr lang="es" sz="1000" dirty="0">
-                <a:solidFill>
-                  <a:srgbClr val="444444"/>
-                </a:solidFill>
-              </a:rPr>
-              <a:t> sin cambiar la base </a:t>
-            </a:r>
-            <a:r>
-              <a:rPr lang="es" sz="1000" dirty="0" err="1">
-                <a:solidFill>
-                  <a:srgbClr val="444444"/>
-                </a:solidFill>
-              </a:rPr>
-              <a:t>economica</a:t>
-            </a:r>
-            <a:r>
-              <a:rPr lang="es" sz="1000" dirty="0">
-                <a:solidFill>
-                  <a:srgbClr val="444444"/>
-                </a:solidFill>
-              </a:rPr>
-              <a:t>.</a:t>
-            </a:r>
-            <a:endParaRPr lang="en-US" sz="1000" dirty="0">
+              <a:t>Cada mesa de servicio opera diferente y de acuerdo a las necesidades/políticas del cliente.</a:t>
+            </a:r>
+            <a:endParaRPr lang="en-US" sz="1100" dirty="0">
               <a:solidFill>
                 <a:srgbClr val="000000"/>
               </a:solidFill>
@@ -18724,102 +16620,76 @@
               <a:buNone/>
             </a:pPr>
             <a:r>
-              <a:rPr lang="es" sz="1200" b="1">
+              <a:rPr lang="es" sz="1100" b="1" dirty="0">
                 <a:solidFill>
                   <a:srgbClr val="D0021B"/>
                 </a:solidFill>
               </a:rPr>
-              <a:t>Tareas manuales, conocimiento en personas y sin base de conocimiento</a:t>
-            </a:r>
-            <a:endParaRPr lang="en-US" sz="1200">
+              <a:t>Modelo </a:t>
+            </a:r>
+            <a:r>
+              <a:rPr lang="es" sz="1100" b="1">
+                <a:solidFill>
+                  <a:srgbClr val="D0021B"/>
+                </a:solidFill>
+              </a:rPr>
+              <a:t>económico</a:t>
+            </a:r>
+            <a:r>
+              <a:rPr lang="es" sz="1100" b="1" dirty="0">
+                <a:solidFill>
+                  <a:srgbClr val="D0021B"/>
+                </a:solidFill>
+              </a:rPr>
+              <a:t> indexado al FTE, sin capacidad de escalar</a:t>
+            </a:r>
+            <a:endParaRPr lang="en-US" sz="1100">
               <a:solidFill>
                 <a:srgbClr val="000000"/>
               </a:solidFill>
             </a:endParaRPr>
           </a:p>
           <a:p>
-            <a:pPr marL="0" indent="0">
+            <a:pPr marL="171450" indent="-171450">
               <a:lnSpc>
                 <a:spcPct val="114999"/>
               </a:lnSpc>
               <a:spcAft>
                 <a:spcPts val="700"/>
               </a:spcAft>
-              <a:buNone/>
             </a:pPr>
             <a:r>
-              <a:rPr lang="es" sz="1000" dirty="0">
+              <a:rPr lang="es" sz="1100">
                 <a:solidFill>
                   <a:srgbClr val="444444"/>
                 </a:solidFill>
               </a:rPr>
-              <a:t>Bus factor critico: cuando rota el equipo, el conocimiento se va. No hay Nivel 0 ni base de conocimiento para que el usuario resuelva solo. El equipo no lo ve como proceso, lo ve como subida de salario.</a:t>
-            </a:r>
-            <a:endParaRPr lang="en-US" sz="1000" dirty="0">
+              <a:t>El costo crece con el volumen de tickets.</a:t>
+            </a:r>
+            <a:endParaRPr lang="en-US" sz="1100">
               <a:solidFill>
                 <a:srgbClr val="000000"/>
               </a:solidFill>
             </a:endParaRPr>
           </a:p>
           <a:p>
-            <a:pPr marL="0" indent="0">
+            <a:pPr marL="171450" indent="-171450">
               <a:lnSpc>
                 <a:spcPct val="114999"/>
               </a:lnSpc>
               <a:spcAft>
-                <a:spcPts val="300"/>
-              </a:spcAft>
-              <a:buNone/>
+                <a:spcPts val="700"/>
+              </a:spcAft>
             </a:pPr>
             <a:r>
-              <a:rPr lang="es" sz="1200" b="1" dirty="0">
-                <a:solidFill>
-                  <a:srgbClr val="D0021B"/>
+              <a:rPr lang="es" sz="1100" dirty="0">
+                <a:solidFill>
+                  <a:srgbClr val="444444"/>
                 </a:solidFill>
               </a:rPr>
-              <a:t>ANS sin medir, </a:t>
-            </a:r>
-            <a:r>
-              <a:rPr lang="es" sz="1200" b="1" dirty="0" err="1">
-                <a:solidFill>
-                  <a:srgbClr val="D0021B"/>
-                </a:solidFill>
-              </a:rPr>
-              <a:t>KPIs</a:t>
-            </a:r>
-            <a:r>
-              <a:rPr lang="es" sz="1200" b="1" dirty="0">
-                <a:solidFill>
-                  <a:srgbClr val="D0021B"/>
-                </a:solidFill>
-              </a:rPr>
-              <a:t> </a:t>
-            </a:r>
-            <a:r>
-              <a:rPr lang="es" sz="1200" b="1" dirty="0" err="1">
-                <a:solidFill>
-                  <a:srgbClr val="D0021B"/>
-                </a:solidFill>
-              </a:rPr>
-              <a:t>empiricos</a:t>
-            </a:r>
-            <a:r>
-              <a:rPr lang="es" sz="1200" b="1" dirty="0">
-                <a:solidFill>
-                  <a:srgbClr val="D0021B"/>
-                </a:solidFill>
-              </a:rPr>
-              <a:t> y herramientas sin </a:t>
-            </a:r>
-            <a:r>
-              <a:rPr lang="es" sz="1200" b="1" dirty="0" err="1">
-                <a:solidFill>
-                  <a:srgbClr val="D0021B"/>
-                </a:solidFill>
-              </a:rPr>
-              <a:t>estandar</a:t>
-            </a:r>
-            <a:endParaRPr lang="en-US" sz="1200" dirty="0" err="1">
+              <a:t>No hay GAP negociado para temas administrativos. El cliente no quiere pagar mas y PS no tiene como mejorar márgenes sin cambiar la base economía.</a:t>
+            </a:r>
+            <a:endParaRPr lang="en-US" sz="1100" dirty="0">
               <a:solidFill>
                 <a:srgbClr val="000000"/>
               </a:solidFill>
@@ -18830,10 +16700,177 @@
               <a:lnSpc>
                 <a:spcPct val="114999"/>
               </a:lnSpc>
+              <a:spcAft>
+                <a:spcPts val="300"/>
+              </a:spcAft>
               <a:buNone/>
             </a:pPr>
             <a:r>
-              <a:rPr lang="es" sz="1000" dirty="0">
+              <a:rPr lang="es" sz="1100" b="1">
+                <a:solidFill>
+                  <a:srgbClr val="D0021B"/>
+                </a:solidFill>
+              </a:rPr>
+              <a:t>Tareas manuales, conocimiento en personas y sin base de conocimiento</a:t>
+            </a:r>
+            <a:endParaRPr lang="en-US" sz="1100">
+              <a:solidFill>
+                <a:srgbClr val="000000"/>
+              </a:solidFill>
+            </a:endParaRPr>
+          </a:p>
+          <a:p>
+            <a:pPr marL="171450" indent="-171450">
+              <a:lnSpc>
+                <a:spcPct val="114999"/>
+              </a:lnSpc>
+              <a:spcAft>
+                <a:spcPts val="700"/>
+              </a:spcAft>
+            </a:pPr>
+            <a:r>
+              <a:rPr lang="es" sz="1100" dirty="0">
+                <a:solidFill>
+                  <a:srgbClr val="444444"/>
+                </a:solidFill>
+              </a:rPr>
+              <a:t>Bus factor </a:t>
+            </a:r>
+            <a:r>
+              <a:rPr lang="es" sz="1100">
+                <a:solidFill>
+                  <a:srgbClr val="444444"/>
+                </a:solidFill>
+              </a:rPr>
+              <a:t>crítico</a:t>
+            </a:r>
+            <a:r>
+              <a:rPr lang="es" sz="1100" dirty="0">
+                <a:solidFill>
+                  <a:srgbClr val="444444"/>
+                </a:solidFill>
+              </a:rPr>
+              <a:t>: cuando rota el equipo, el conocimiento se va. </a:t>
+            </a:r>
+            <a:endParaRPr lang="en-US" sz="1100">
+              <a:solidFill>
+                <a:srgbClr val="000000"/>
+              </a:solidFill>
+            </a:endParaRPr>
+          </a:p>
+          <a:p>
+            <a:pPr marL="171450" indent="-171450">
+              <a:lnSpc>
+                <a:spcPct val="114999"/>
+              </a:lnSpc>
+              <a:spcAft>
+                <a:spcPts val="700"/>
+              </a:spcAft>
+            </a:pPr>
+            <a:r>
+              <a:rPr lang="es" sz="1100">
+                <a:solidFill>
+                  <a:srgbClr val="444444"/>
+                </a:solidFill>
+              </a:rPr>
+              <a:t>No hay Nivel 0 ni base de conocimiento para que el usuario </a:t>
+            </a:r>
+            <a:r>
+              <a:rPr lang="es" sz="1100" dirty="0">
+                <a:solidFill>
+                  <a:srgbClr val="444444"/>
+                </a:solidFill>
+              </a:rPr>
+              <a:t>resuelva solo. </a:t>
+            </a:r>
+            <a:endParaRPr lang="en-US" sz="1100">
+              <a:solidFill>
+                <a:srgbClr val="000000"/>
+              </a:solidFill>
+            </a:endParaRPr>
+          </a:p>
+          <a:p>
+            <a:pPr marL="171450" indent="-171450">
+              <a:lnSpc>
+                <a:spcPct val="114999"/>
+              </a:lnSpc>
+              <a:spcAft>
+                <a:spcPts val="700"/>
+              </a:spcAft>
+            </a:pPr>
+            <a:r>
+              <a:rPr lang="es" sz="1100">
+                <a:solidFill>
+                  <a:srgbClr val="444444"/>
+                </a:solidFill>
+              </a:rPr>
+              <a:t>El equipo no lo ve como proceso, lo ve como subida de </a:t>
+            </a:r>
+            <a:r>
+              <a:rPr lang="es" sz="1100" dirty="0">
+                <a:solidFill>
+                  <a:srgbClr val="444444"/>
+                </a:solidFill>
+              </a:rPr>
+              <a:t>salario.</a:t>
+            </a:r>
+            <a:endParaRPr lang="en-US" sz="1100">
+              <a:solidFill>
+                <a:srgbClr val="000000"/>
+              </a:solidFill>
+            </a:endParaRPr>
+          </a:p>
+          <a:p>
+            <a:pPr marL="0" indent="0">
+              <a:lnSpc>
+                <a:spcPct val="114999"/>
+              </a:lnSpc>
+              <a:spcAft>
+                <a:spcPts val="300"/>
+              </a:spcAft>
+              <a:buNone/>
+            </a:pPr>
+            <a:r>
+              <a:rPr lang="es" sz="1100" b="1" dirty="0">
+                <a:solidFill>
+                  <a:srgbClr val="D0021B"/>
+                </a:solidFill>
+              </a:rPr>
+              <a:t>ANS sin medir, </a:t>
+            </a:r>
+            <a:r>
+              <a:rPr lang="es" sz="1100" b="1" dirty="0" err="1">
+                <a:solidFill>
+                  <a:srgbClr val="D0021B"/>
+                </a:solidFill>
+              </a:rPr>
+              <a:t>KPIs</a:t>
+            </a:r>
+            <a:r>
+              <a:rPr lang="es" sz="1100" b="1" dirty="0">
+                <a:solidFill>
+                  <a:srgbClr val="D0021B"/>
+                </a:solidFill>
+              </a:rPr>
+              <a:t> empíricos y herramientas sin estándar</a:t>
+            </a:r>
+            <a:endParaRPr lang="en-US" sz="1100" dirty="0">
+              <a:solidFill>
+                <a:srgbClr val="000000"/>
+              </a:solidFill>
+            </a:endParaRPr>
+          </a:p>
+          <a:p>
+            <a:pPr marL="171450" indent="-171450">
+              <a:lnSpc>
+                <a:spcPct val="124999"/>
+              </a:lnSpc>
+              <a:spcAft>
+                <a:spcPts val="700"/>
+              </a:spcAft>
+            </a:pPr>
+            <a:r>
+              <a:rPr lang="es" sz="1100" dirty="0">
                 <a:solidFill>
                   <a:srgbClr val="444444"/>
                 </a:solidFill>
@@ -18841,7 +16878,7 @@
               <a:t>Cada cliente tiene su herramienta (VMC en SURA, </a:t>
             </a:r>
             <a:r>
-              <a:rPr lang="es" sz="1000" dirty="0" err="1">
+              <a:rPr lang="es" sz="1100" dirty="0" err="1">
                 <a:solidFill>
                   <a:srgbClr val="444444"/>
                 </a:solidFill>
@@ -18849,7 +16886,7 @@
               <a:t>Computer</a:t>
             </a:r>
             <a:r>
-              <a:rPr lang="es" sz="1000" dirty="0">
+              <a:rPr lang="es" sz="1100" dirty="0">
                 <a:solidFill>
                   <a:srgbClr val="444444"/>
                 </a:solidFill>
@@ -18857,7 +16894,7 @@
               <a:t> </a:t>
             </a:r>
             <a:r>
-              <a:rPr lang="es" sz="1000" dirty="0" err="1">
+              <a:rPr lang="es" sz="1100" dirty="0" err="1">
                 <a:solidFill>
                   <a:srgbClr val="444444"/>
                 </a:solidFill>
@@ -18865,47 +16902,38 @@
               <a:t>Associates</a:t>
             </a:r>
             <a:r>
-              <a:rPr lang="es" sz="1000" dirty="0">
+              <a:rPr lang="es" sz="1100" dirty="0">
                 <a:solidFill>
                   <a:srgbClr val="444444"/>
                 </a:solidFill>
               </a:rPr>
-              <a:t>, Service Now) y PS no tiene la suya. Los informes son manuales, las penalidades no se miden </a:t>
-            </a:r>
-            <a:r>
-              <a:rPr lang="es" sz="1000" dirty="0" err="1">
+              <a:t>, Service Now) y PS no tiene la suya. </a:t>
+            </a:r>
+            <a:endParaRPr lang="es-ES" sz="1100">
+              <a:solidFill>
+                <a:srgbClr val="444444"/>
+              </a:solidFill>
+            </a:endParaRPr>
+          </a:p>
+          <a:p>
+            <a:pPr marL="171450" indent="-171450">
+              <a:lnSpc>
+                <a:spcPct val="124999"/>
+              </a:lnSpc>
+              <a:spcAft>
+                <a:spcPts val="700"/>
+              </a:spcAft>
+            </a:pPr>
+            <a:r>
+              <a:rPr lang="es" sz="1100" dirty="0">
                 <a:solidFill>
                   <a:srgbClr val="444444"/>
                 </a:solidFill>
               </a:rPr>
-              <a:t>sistematicamente</a:t>
-            </a:r>
-            <a:r>
-              <a:rPr lang="es" sz="1000" dirty="0">
-                <a:solidFill>
-                  <a:srgbClr val="444444"/>
-                </a:solidFill>
-              </a:rPr>
-              <a:t> y no hay </a:t>
-            </a:r>
-            <a:r>
-              <a:rPr lang="es" sz="1000" dirty="0" err="1">
-                <a:solidFill>
-                  <a:srgbClr val="444444"/>
-                </a:solidFill>
-              </a:rPr>
-              <a:t>taxonomia</a:t>
-            </a:r>
-            <a:r>
-              <a:rPr lang="es" sz="1000" dirty="0">
-                <a:solidFill>
-                  <a:srgbClr val="444444"/>
-                </a:solidFill>
-              </a:rPr>
-              <a:t> de </a:t>
-            </a:r>
-            <a:r>
-              <a:rPr lang="es" sz="1000" dirty="0" err="1">
+              <a:t>Los informes son manuales, las penalidades no se miden sistemáticamente y no hay taxonomía de </a:t>
+            </a:r>
+            <a:r>
+              <a:rPr lang="es" sz="1100" dirty="0" err="1">
                 <a:solidFill>
                   <a:srgbClr val="444444"/>
                 </a:solidFill>
@@ -18913,14 +16941,18 @@
               <a:t>KPIs</a:t>
             </a:r>
             <a:r>
-              <a:rPr lang="es" sz="1000" dirty="0">
+              <a:rPr lang="es" sz="1100" dirty="0">
                 <a:solidFill>
                   <a:srgbClr val="444444"/>
                 </a:solidFill>
               </a:rPr>
               <a:t> estandarizada.</a:t>
             </a:r>
-            <a:endParaRPr lang="es-ES" dirty="0"/>
+            <a:endParaRPr lang="es-ES" sz="1100">
+              <a:solidFill>
+                <a:srgbClr val="444444"/>
+              </a:solidFill>
+            </a:endParaRPr>
           </a:p>
           <a:p>
             <a:pPr>
@@ -19025,7 +17057,7 @@
         </p:nvSpPr>
         <p:spPr>
           <a:xfrm>
-            <a:off x="463050" y="1089100"/>
+            <a:off x="463050" y="1464657"/>
             <a:ext cx="3757500" cy="1939800"/>
           </a:xfrm>
           <a:prstGeom prst="rect">
@@ -19043,14 +17075,13 @@
           <a:lstStyle/>
           <a:p>
             <a:r>
+              <a:rPr lang="es" dirty="0"/>
+              <a:t>Nuestros </a:t>
+            </a:r>
+            <a:r>
               <a:rPr lang="es"/>
-              <a:t>Nuestros</a:t>
-            </a:r>
-            <a:r>
-              <a:rPr lang="es" dirty="0"/>
-              <a:t> Clientes</a:t>
-            </a:r>
-            <a:endParaRPr lang="es-ES" dirty="0"/>
+              <a:t>Operación Actual</a:t>
+            </a:r>
           </a:p>
         </p:txBody>
       </p:sp>
@@ -19705,7 +17736,15 @@
           <a:p>
             <a:r>
               <a:rPr lang="es-ES" dirty="0"/>
-              <a:t>Nivel de Madurez de las Mesas de – A donde queremos llegar</a:t>
+              <a:t>Nivel de Madurez de las Mesas de – A </a:t>
+            </a:r>
+            <a:r>
+              <a:rPr lang="es-ES"/>
+              <a:t>dónde</a:t>
+            </a:r>
+            <a:r>
+              <a:rPr lang="es-ES" dirty="0"/>
+              <a:t> queremos llegar</a:t>
             </a:r>
           </a:p>
         </p:txBody>
@@ -19717,18 +17756,29 @@
             <a:spLocks noGrp="1"/>
           </p:cNvSpPr>
           <p:nvPr>
-            <p:ph type="subTitle" idx="1"/>
+            <p:ph type="subTitle" idx="4294967295"/>
           </p:nvPr>
         </p:nvSpPr>
-        <p:spPr/>
+        <p:spPr>
+          <a:xfrm>
+            <a:off x="239486" y="542698"/>
+            <a:ext cx="6194199" cy="563790"/>
+          </a:xfrm>
+        </p:spPr>
         <p:txBody>
-          <a:bodyPr/>
+          <a:bodyPr>
+            <a:normAutofit/>
+          </a:bodyPr>
           <a:lstStyle/>
           <a:p>
-            <a:r>
-              <a:rPr lang="es-ES" dirty="0"/>
-              <a:t>ITIL v5 · Escala N0 a N5 · 4 dimensiones · 17 practicas evaluadas</a:t>
-            </a:r>
+            <a:pPr marL="114300" indent="0">
+              <a:buNone/>
+            </a:pPr>
+            <a:r>
+              <a:rPr lang="es-ES" sz="1000"/>
+              <a:t>ITIL v5 · Escala N0 a N5 · 4 dimensiones · 17 practicas a evaluar</a:t>
+            </a:r>
+            <a:endParaRPr lang="es-ES" sz="1000" dirty="0"/>
           </a:p>
         </p:txBody>
       </p:sp>
@@ -20232,12 +18282,12 @@
               <a:t>Procesos por mesa. Herramienta como </a:t>
             </a:r>
             <a:r>
-              <a:rPr lang="es" sz="900" dirty="0" err="1">
+              <a:rPr lang="es" sz="900">
                 <a:solidFill>
                   <a:srgbClr val="666666"/>
                 </a:solidFill>
               </a:rPr>
-              <a:t>bitacora</a:t>
+              <a:t>bitácora</a:t>
             </a:r>
             <a:r>
               <a:rPr lang="es" sz="900" dirty="0">
@@ -20320,7 +18370,15 @@
                   <a:srgbClr val="0E337C"/>
                 </a:solidFill>
               </a:rPr>
-              <a:t> Mesa de Soporte. META WAVE 1.</a:t>
+              <a:t> Mesa de </a:t>
+            </a:r>
+            <a:r>
+              <a:rPr lang="es" sz="900" b="1">
+                <a:solidFill>
+                  <a:srgbClr val="0E337C"/>
+                </a:solidFill>
+              </a:rPr>
+              <a:t>Soporte. </a:t>
             </a:r>
           </a:p>
         </p:txBody>
@@ -20539,7 +18597,15 @@
                   <a:srgbClr val="085041"/>
                 </a:solidFill>
               </a:rPr>
-              <a:t>Autonomo e Inteligente</a:t>
+              <a:t>Autónomo</a:t>
+            </a:r>
+            <a:r>
+              <a:rPr lang="es" sz="1000" b="1" dirty="0">
+                <a:solidFill>
+                  <a:srgbClr val="085041"/>
+                </a:solidFill>
+              </a:rPr>
+              <a:t> e Inteligente</a:t>
             </a:r>
           </a:p>
         </p:txBody>
@@ -20552,7 +18618,7 @@
         </p:nvSpPr>
         <p:spPr>
           <a:xfrm>
-            <a:off x="457200" y="4057200"/>
+            <a:off x="457200" y="4089857"/>
             <a:ext cx="8229600" cy="342900"/>
           </a:xfrm>
           <a:prstGeom prst="rect">
@@ -20606,121 +18672,6 @@
 </file>
 
 <file path=ppt/slides/slide7.xml><?xml version="1.0" encoding="utf-8"?>
-<p:sld xmlns:a="http://schemas.openxmlformats.org/drawingml/2006/main" xmlns:r="http://schemas.openxmlformats.org/officeDocument/2006/relationships" xmlns:p="http://schemas.openxmlformats.org/presentationml/2006/main" show="0">
-  <p:cSld>
-    <p:spTree>
-      <p:nvGrpSpPr>
-        <p:cNvPr id="1" name="Shape 138"/>
-        <p:cNvGrpSpPr/>
-        <p:nvPr/>
-      </p:nvGrpSpPr>
-      <p:grpSpPr>
-        <a:xfrm>
-          <a:off x="0" y="0"/>
-          <a:ext cx="0" cy="0"/>
-          <a:chOff x="0" y="0"/>
-          <a:chExt cx="0" cy="0"/>
-        </a:xfrm>
-      </p:grpSpPr>
-      <p:sp>
-        <p:nvSpPr>
-          <p:cNvPr id="139" name="Google Shape;139;p3"/>
-          <p:cNvSpPr txBox="1">
-            <a:spLocks noGrp="1"/>
-          </p:cNvSpPr>
-          <p:nvPr>
-            <p:ph type="title"/>
-          </p:nvPr>
-        </p:nvSpPr>
-        <p:spPr>
-          <a:xfrm>
-            <a:off x="490250" y="1101350"/>
-            <a:ext cx="8313000" cy="2609100"/>
-          </a:xfrm>
-          <a:prstGeom prst="rect">
-            <a:avLst/>
-          </a:prstGeom>
-          <a:noFill/>
-          <a:ln>
-            <a:noFill/>
-          </a:ln>
-        </p:spPr>
-        <p:txBody>
-          <a:bodyPr spcFirstLastPara="1" wrap="square" lIns="91425" tIns="91425" rIns="91425" bIns="91425" anchor="ctr" anchorCtr="0">
-            <a:normAutofit/>
-          </a:bodyPr>
-          <a:lstStyle/>
-          <a:p>
-            <a:pPr marL="0" lvl="0" indent="0" algn="l" rtl="0">
-              <a:lnSpc>
-                <a:spcPct val="100000"/>
-              </a:lnSpc>
-              <a:spcBef>
-                <a:spcPts val="0"/>
-              </a:spcBef>
-              <a:spcAft>
-                <a:spcPts val="0"/>
-              </a:spcAft>
-              <a:buSzPts val="4800"/>
-              <a:buNone/>
-            </a:pPr>
-            <a:r>
-              <a:rPr lang="es" sz="5100"/>
-              <a:t>La unión de personas</a:t>
-            </a:r>
-            <a:endParaRPr sz="5100"/>
-          </a:p>
-          <a:p>
-            <a:pPr marL="0" lvl="0" indent="0" algn="l" rtl="0">
-              <a:lnSpc>
-                <a:spcPct val="100000"/>
-              </a:lnSpc>
-              <a:spcBef>
-                <a:spcPts val="0"/>
-              </a:spcBef>
-              <a:spcAft>
-                <a:spcPts val="0"/>
-              </a:spcAft>
-              <a:buSzPts val="4800"/>
-              <a:buNone/>
-            </a:pPr>
-            <a:r>
-              <a:rPr lang="es" sz="5100"/>
-              <a:t>y tecnología puede</a:t>
-            </a:r>
-            <a:endParaRPr sz="5100"/>
-          </a:p>
-          <a:p>
-            <a:pPr marL="0" lvl="0" indent="0" algn="l" rtl="0">
-              <a:lnSpc>
-                <a:spcPct val="100000"/>
-              </a:lnSpc>
-              <a:spcBef>
-                <a:spcPts val="0"/>
-              </a:spcBef>
-              <a:spcAft>
-                <a:spcPts val="0"/>
-              </a:spcAft>
-              <a:buSzPts val="4800"/>
-              <a:buNone/>
-            </a:pPr>
-            <a:r>
-              <a:rPr lang="es" sz="5100"/>
-              <a:t>transformar el mundo </a:t>
-            </a:r>
-            <a:endParaRPr sz="5100"/>
-          </a:p>
-        </p:txBody>
-      </p:sp>
-    </p:spTree>
-  </p:cSld>
-  <p:clrMapOvr>
-    <a:masterClrMapping/>
-  </p:clrMapOvr>
-</p:sld>
-</file>
-
-<file path=ppt/slides/slide8.xml><?xml version="1.0" encoding="utf-8"?>
 <p:sld xmlns:a="http://schemas.openxmlformats.org/drawingml/2006/main" xmlns:r="http://schemas.openxmlformats.org/officeDocument/2006/relationships" xmlns:p="http://schemas.openxmlformats.org/presentationml/2006/main" show="0">
   <p:cSld>
     <p:spTree>
@@ -29766,7 +27717,7 @@
 </p:sld>
 </file>
 
-<file path=ppt/slides/slide9.xml><?xml version="1.0" encoding="utf-8"?>
+<file path=ppt/slides/slide8.xml><?xml version="1.0" encoding="utf-8"?>
 <p:sld xmlns:a="http://schemas.openxmlformats.org/drawingml/2006/main" xmlns:r="http://schemas.openxmlformats.org/officeDocument/2006/relationships" xmlns:p="http://schemas.openxmlformats.org/presentationml/2006/main">
   <p:cSld>
     <p:spTree>
@@ -31558,7 +29509,7 @@
           <a:p>
             <a:r>
               <a:rPr lang="es-ES" sz="700"/>
-              <a:t>Wave 2 : XM, AWS, Medicarte</a:t>
+              <a:t>Wave 2 : XM, AES, Medicarte</a:t>
             </a:r>
           </a:p>
         </p:txBody>
@@ -32978,8 +30929,8 @@
         </p:nvSpPr>
         <p:spPr>
           <a:xfrm>
-            <a:off x="3398402" y="2712172"/>
-            <a:ext cx="1831140" cy="94053"/>
+            <a:off x="2952089" y="2728499"/>
+            <a:ext cx="2315552" cy="77726"/>
           </a:xfrm>
           <a:prstGeom prst="roundRect">
             <a:avLst/>
@@ -33037,8 +30988,8 @@
         </p:nvSpPr>
         <p:spPr>
           <a:xfrm>
-            <a:off x="3396341" y="2348591"/>
-            <a:ext cx="1524001" cy="369332"/>
+            <a:off x="2939141" y="2462891"/>
+            <a:ext cx="1937658" cy="276999"/>
           </a:xfrm>
           <a:prstGeom prst="rect">
             <a:avLst/>
@@ -33087,8 +31038,8 @@
         </p:nvSpPr>
         <p:spPr>
           <a:xfrm>
-            <a:off x="4399888" y="2962544"/>
-            <a:ext cx="1085469" cy="88612"/>
+            <a:off x="4133189" y="2984315"/>
+            <a:ext cx="3137426" cy="83169"/>
           </a:xfrm>
           <a:prstGeom prst="roundRect">
             <a:avLst/>
@@ -33146,8 +31097,8 @@
         </p:nvSpPr>
         <p:spPr>
           <a:xfrm>
-            <a:off x="4142013" y="2729589"/>
-            <a:ext cx="1714500" cy="276999"/>
+            <a:off x="4076697" y="2838446"/>
+            <a:ext cx="3167744" cy="184666"/>
           </a:xfrm>
           <a:prstGeom prst="rect">
             <a:avLst/>
@@ -33356,8 +31307,8 @@
         </p:nvSpPr>
         <p:spPr>
           <a:xfrm>
-            <a:off x="5306785" y="2326819"/>
-            <a:ext cx="1104901" cy="276999"/>
+            <a:off x="5268685" y="2397576"/>
+            <a:ext cx="1431473" cy="276999"/>
           </a:xfrm>
           <a:prstGeom prst="rect">
             <a:avLst/>
@@ -33380,25 +31331,19 @@
               <a:rPr lang="es-ES" sz="600" dirty="0">
                 <a:latin typeface="Reddit Sans"/>
               </a:rPr>
-              <a:t>Piloto herramientas para la </a:t>
+              <a:t>Piloto </a:t>
             </a:r>
             <a:r>
               <a:rPr lang="es-ES" sz="600" dirty="0" err="1">
                 <a:latin typeface="Reddit Sans"/>
               </a:rPr>
-              <a:t>operació</a:t>
+              <a:t>dashboards</a:t>
             </a:r>
             <a:r>
               <a:rPr lang="es-ES" sz="600" dirty="0">
                 <a:latin typeface="Reddit Sans"/>
               </a:rPr>
-              <a:t>n de </a:t>
-            </a:r>
-            <a:r>
-              <a:rPr lang="es-ES" sz="600" dirty="0" err="1">
-                <a:latin typeface="Reddit Sans"/>
-              </a:rPr>
-              <a:t>PersonalSoft</a:t>
+              <a:t> ejecutivos internos PersonalSoft</a:t>
             </a:r>
             <a:endParaRPr lang="es-ES" dirty="0" err="1"/>
           </a:p>
@@ -33586,10 +31531,16 @@
           <a:lstStyle/>
           <a:p>
             <a:r>
+              <a:rPr lang="es-ES" sz="600" dirty="0">
+                <a:latin typeface="Reddit Sans"/>
+              </a:rPr>
+              <a:t>Priorizar las </a:t>
+            </a:r>
+            <a:r>
               <a:rPr lang="es-ES" sz="600">
                 <a:latin typeface="Reddit Sans"/>
               </a:rPr>
-              <a:t>Priorizar clientes</a:t>
+              <a:t>mesas</a:t>
             </a:r>
           </a:p>
         </p:txBody>
@@ -34180,8 +32131,8 @@
         </p:nvSpPr>
         <p:spPr>
           <a:xfrm>
-            <a:off x="5034641" y="3056159"/>
-            <a:ext cx="1660073" cy="276999"/>
+            <a:off x="5034641" y="3126916"/>
+            <a:ext cx="1208316" cy="276999"/>
           </a:xfrm>
           <a:prstGeom prst="rect">
             <a:avLst/>
@@ -34210,37 +32161,13 @@
               <a:rPr lang="es-ES" sz="600" dirty="0" err="1">
                 <a:latin typeface="Reddit Sans"/>
               </a:rPr>
-              <a:t>help</a:t>
+              <a:t>helpdesk</a:t>
             </a:r>
             <a:r>
               <a:rPr lang="es-ES" sz="600" dirty="0">
                 <a:latin typeface="Reddit Sans"/>
               </a:rPr>
-              <a:t> </a:t>
-            </a:r>
-            <a:r>
-              <a:rPr lang="es-ES" sz="600" dirty="0" err="1">
-                <a:latin typeface="Reddit Sans"/>
-              </a:rPr>
-              <a:t>desk</a:t>
-            </a:r>
-            <a:r>
-              <a:rPr lang="es-ES" sz="600" dirty="0">
-                <a:latin typeface="Reddit Sans"/>
-              </a:rPr>
-              <a:t> y </a:t>
-            </a:r>
-            <a:r>
-              <a:rPr lang="es-ES" sz="600" dirty="0" err="1">
-                <a:latin typeface="Reddit Sans"/>
-              </a:rPr>
-              <a:t>operació</a:t>
-            </a:r>
-            <a:r>
-              <a:rPr lang="es-ES" sz="600" dirty="0">
-                <a:latin typeface="Reddit Sans"/>
-              </a:rPr>
-              <a:t>n)</a:t>
+              <a:t> y operación)</a:t>
             </a:r>
             <a:endParaRPr lang="es-ES" dirty="0"/>
           </a:p>
@@ -34260,8 +32187,8 @@
         </p:nvSpPr>
         <p:spPr>
           <a:xfrm>
-            <a:off x="5570101" y="3523157"/>
-            <a:ext cx="818769" cy="77726"/>
+            <a:off x="5570101" y="3523156"/>
+            <a:ext cx="1341282" cy="77726"/>
           </a:xfrm>
           <a:prstGeom prst="roundRect">
             <a:avLst/>
@@ -34319,7 +32246,7 @@
         </p:nvSpPr>
         <p:spPr>
           <a:xfrm>
-            <a:off x="5328555" y="3328304"/>
+            <a:off x="5464627" y="3371848"/>
             <a:ext cx="1289958" cy="276999"/>
           </a:xfrm>
           <a:prstGeom prst="rect">
@@ -34504,8 +32431,8 @@
         </p:nvSpPr>
         <p:spPr>
           <a:xfrm>
-            <a:off x="6582472" y="3267342"/>
-            <a:ext cx="818769" cy="77726"/>
+            <a:off x="6206915" y="3153045"/>
+            <a:ext cx="2293781" cy="88612"/>
           </a:xfrm>
           <a:prstGeom prst="roundRect">
             <a:avLst/>
@@ -34563,8 +32490,8 @@
         </p:nvSpPr>
         <p:spPr>
           <a:xfrm>
-            <a:off x="6504212" y="3007174"/>
-            <a:ext cx="1045030" cy="276999"/>
+            <a:off x="6330039" y="3023501"/>
+            <a:ext cx="1779816" cy="184666"/>
           </a:xfrm>
           <a:prstGeom prst="rect">
             <a:avLst/>
@@ -34587,7 +32514,7 @@
               <a:rPr lang="es-ES" sz="600">
                 <a:latin typeface="Reddit Sans"/>
               </a:rPr>
-              <a:t>Diseñar artefactos equipo comercial</a:t>
+              <a:t>Diseñar artefactos nuevo equipo comercial</a:t>
             </a:r>
             <a:endParaRPr lang="es-ES"/>
           </a:p>
@@ -34690,7 +32617,110 @@
         </p:nvSpPr>
         <p:spPr>
           <a:xfrm>
-            <a:off x="6587915" y="3583027"/>
+            <a:off x="6435515" y="3370755"/>
+            <a:ext cx="2037968" cy="83168"/>
+          </a:xfrm>
+          <a:prstGeom prst="roundRect">
+            <a:avLst/>
+          </a:prstGeom>
+          <a:solidFill>
+            <a:schemeClr val="accent2">
+              <a:lumMod val="25000"/>
+              <a:lumOff val="75000"/>
+            </a:schemeClr>
+          </a:solidFill>
+          <a:ln>
+            <a:noFill/>
+          </a:ln>
+        </p:spPr>
+        <p:style>
+          <a:lnRef idx="1">
+            <a:schemeClr val="accent1"/>
+          </a:lnRef>
+          <a:fillRef idx="3">
+            <a:schemeClr val="accent1"/>
+          </a:fillRef>
+          <a:effectRef idx="2">
+            <a:schemeClr val="accent1"/>
+          </a:effectRef>
+          <a:fontRef idx="minor">
+            <a:schemeClr val="lt1"/>
+          </a:fontRef>
+        </p:style>
+        <p:txBody>
+          <a:bodyPr lIns="91440" tIns="45720" rIns="91440" bIns="45720" rtlCol="0" anchor="ctr"/>
+          <a:lstStyle/>
+          <a:p>
+            <a:pPr algn="ctr" defTabSz="342900"/>
+            <a:endParaRPr lang="es-ES" sz="600" kern="1200" dirty="0">
+              <a:solidFill>
+                <a:srgbClr val="000000"/>
+              </a:solidFill>
+              <a:latin typeface="Reddit Sans"/>
+              <a:ea typeface="Reddit Sans"/>
+            </a:endParaRPr>
+          </a:p>
+        </p:txBody>
+      </p:sp>
+      <p:sp>
+        <p:nvSpPr>
+          <p:cNvPr id="206" name="CuadroTexto 205">
+            <a:extLst>
+              <a:ext uri="{FF2B5EF4-FFF2-40B4-BE49-F238E27FC236}">
+                <a16:creationId xmlns:a16="http://schemas.microsoft.com/office/drawing/2014/main" id="{EAB8AC16-1A75-B07B-67E5-8D9032D8199F}"/>
+              </a:ext>
+            </a:extLst>
+          </p:cNvPr>
+          <p:cNvSpPr txBox="1"/>
+          <p:nvPr/>
+        </p:nvSpPr>
+        <p:spPr>
+          <a:xfrm>
+            <a:off x="6476997" y="3241217"/>
+            <a:ext cx="2046516" cy="184666"/>
+          </a:xfrm>
+          <a:prstGeom prst="rect">
+            <a:avLst/>
+          </a:prstGeom>
+          <a:noFill/>
+          <a:ln>
+            <a:noFill/>
+          </a:ln>
+        </p:spPr>
+        <p:txBody>
+          <a:bodyPr rot="0" spcFirstLastPara="0" vertOverflow="overflow" horzOverflow="overflow" vert="horz" wrap="square" lIns="91440" tIns="45720" rIns="91440" bIns="45720" numCol="1" spcCol="0" rtlCol="0" fromWordArt="0" anchor="t" anchorCtr="0" forceAA="0" compatLnSpc="1">
+            <a:prstTxWarp prst="textNoShape">
+              <a:avLst/>
+            </a:prstTxWarp>
+            <a:spAutoFit/>
+          </a:bodyPr>
+          <a:lstStyle/>
+          <a:p>
+            <a:r>
+              <a:rPr lang="es-ES" sz="600">
+                <a:latin typeface="Reddit Sans"/>
+              </a:rPr>
+              <a:t>Diseñar artefactos nuevos equipo de la operación</a:t>
+            </a:r>
+            <a:endParaRPr lang="es-ES"/>
+          </a:p>
+        </p:txBody>
+      </p:sp>
+      <p:sp>
+        <p:nvSpPr>
+          <p:cNvPr id="207" name="Rounded Rectangle 21">
+            <a:extLst>
+              <a:ext uri="{FF2B5EF4-FFF2-40B4-BE49-F238E27FC236}">
+                <a16:creationId xmlns:a16="http://schemas.microsoft.com/office/drawing/2014/main" id="{9EC06F50-C9B0-C182-6C30-B084237CFC3F}"/>
+              </a:ext>
+            </a:extLst>
+          </p:cNvPr>
+          <p:cNvSpPr/>
+          <p:nvPr/>
+        </p:nvSpPr>
+        <p:spPr>
+          <a:xfrm>
+            <a:off x="7698258" y="3501384"/>
             <a:ext cx="818769" cy="77726"/>
           </a:xfrm>
           <a:prstGeom prst="roundRect">
@@ -34737,10 +32767,10 @@
       </p:sp>
       <p:sp>
         <p:nvSpPr>
-          <p:cNvPr id="206" name="CuadroTexto 205">
+          <p:cNvPr id="208" name="CuadroTexto 207">
             <a:extLst>
               <a:ext uri="{FF2B5EF4-FFF2-40B4-BE49-F238E27FC236}">
-                <a16:creationId xmlns:a16="http://schemas.microsoft.com/office/drawing/2014/main" id="{EAB8AC16-1A75-B07B-67E5-8D9032D8199F}"/>
+                <a16:creationId xmlns:a16="http://schemas.microsoft.com/office/drawing/2014/main" id="{BD3B7044-81A8-6135-06D6-F5AE7632D3C3}"/>
               </a:ext>
             </a:extLst>
           </p:cNvPr>
@@ -34749,8 +32779,8 @@
         </p:nvSpPr>
         <p:spPr>
           <a:xfrm>
-            <a:off x="6509655" y="3322859"/>
-            <a:ext cx="1045030" cy="276999"/>
+            <a:off x="7647214" y="3399058"/>
+            <a:ext cx="1328057" cy="276999"/>
           </a:xfrm>
           <a:prstGeom prst="rect">
             <a:avLst/>
@@ -34770,131 +32800,16 @@
           <a:lstStyle/>
           <a:p>
             <a:r>
+              <a:rPr lang="es-ES" sz="600">
+                <a:latin typeface="Reddit Sans"/>
+              </a:rPr>
+              <a:t>Inicio actualización del servicio en la </a:t>
+            </a:r>
+            <a:r>
               <a:rPr lang="es-ES" sz="600" dirty="0">
                 <a:latin typeface="Reddit Sans"/>
               </a:rPr>
-              <a:t>Diseñar artefactos </a:t>
-            </a:r>
-            <a:r>
-              <a:rPr lang="es-ES" sz="600">
-                <a:latin typeface="Reddit Sans"/>
-              </a:rPr>
-              <a:t>equipo de la operación</a:t>
-            </a:r>
-            <a:endParaRPr lang="es-ES"/>
-          </a:p>
-        </p:txBody>
-      </p:sp>
-      <p:sp>
-        <p:nvSpPr>
-          <p:cNvPr id="207" name="Rounded Rectangle 21">
-            <a:extLst>
-              <a:ext uri="{FF2B5EF4-FFF2-40B4-BE49-F238E27FC236}">
-                <a16:creationId xmlns:a16="http://schemas.microsoft.com/office/drawing/2014/main" id="{9EC06F50-C9B0-C182-6C30-B084237CFC3F}"/>
-              </a:ext>
-            </a:extLst>
-          </p:cNvPr>
-          <p:cNvSpPr/>
-          <p:nvPr/>
-        </p:nvSpPr>
-        <p:spPr>
-          <a:xfrm>
-            <a:off x="7605729" y="3387084"/>
-            <a:ext cx="818769" cy="77726"/>
-          </a:xfrm>
-          <a:prstGeom prst="roundRect">
-            <a:avLst/>
-          </a:prstGeom>
-          <a:solidFill>
-            <a:schemeClr val="accent2">
-              <a:lumMod val="25000"/>
-              <a:lumOff val="75000"/>
-            </a:schemeClr>
-          </a:solidFill>
-          <a:ln>
-            <a:noFill/>
-          </a:ln>
-        </p:spPr>
-        <p:style>
-          <a:lnRef idx="1">
-            <a:schemeClr val="accent1"/>
-          </a:lnRef>
-          <a:fillRef idx="3">
-            <a:schemeClr val="accent1"/>
-          </a:fillRef>
-          <a:effectRef idx="2">
-            <a:schemeClr val="accent1"/>
-          </a:effectRef>
-          <a:fontRef idx="minor">
-            <a:schemeClr val="lt1"/>
-          </a:fontRef>
-        </p:style>
-        <p:txBody>
-          <a:bodyPr lIns="91440" tIns="45720" rIns="91440" bIns="45720" rtlCol="0" anchor="ctr"/>
-          <a:lstStyle/>
-          <a:p>
-            <a:pPr algn="ctr" defTabSz="342900"/>
-            <a:endParaRPr lang="es-ES" sz="600" kern="1200" dirty="0">
-              <a:solidFill>
-                <a:srgbClr val="000000"/>
-              </a:solidFill>
-              <a:latin typeface="Reddit Sans"/>
-              <a:ea typeface="Reddit Sans"/>
-            </a:endParaRPr>
-          </a:p>
-        </p:txBody>
-      </p:sp>
-      <p:sp>
-        <p:nvSpPr>
-          <p:cNvPr id="208" name="CuadroTexto 207">
-            <a:extLst>
-              <a:ext uri="{FF2B5EF4-FFF2-40B4-BE49-F238E27FC236}">
-                <a16:creationId xmlns:a16="http://schemas.microsoft.com/office/drawing/2014/main" id="{BD3B7044-81A8-6135-06D6-F5AE7632D3C3}"/>
-              </a:ext>
-            </a:extLst>
-          </p:cNvPr>
-          <p:cNvSpPr txBox="1"/>
-          <p:nvPr/>
-        </p:nvSpPr>
-        <p:spPr>
-          <a:xfrm>
-            <a:off x="7478483" y="3061602"/>
-            <a:ext cx="1045030" cy="369332"/>
-          </a:xfrm>
-          <a:prstGeom prst="rect">
-            <a:avLst/>
-          </a:prstGeom>
-          <a:noFill/>
-          <a:ln>
-            <a:noFill/>
-          </a:ln>
-        </p:spPr>
-        <p:txBody>
-          <a:bodyPr rot="0" spcFirstLastPara="0" vertOverflow="overflow" horzOverflow="overflow" vert="horz" wrap="square" lIns="91440" tIns="45720" rIns="91440" bIns="45720" numCol="1" spcCol="0" rtlCol="0" fromWordArt="0" anchor="t" anchorCtr="0" forceAA="0" compatLnSpc="1">
-            <a:prstTxWarp prst="textNoShape">
-              <a:avLst/>
-            </a:prstTxWarp>
-            <a:spAutoFit/>
-          </a:bodyPr>
-          <a:lstStyle/>
-          <a:p>
-            <a:r>
-              <a:rPr lang="es-ES" sz="600" dirty="0">
-                <a:latin typeface="Reddit Sans"/>
-              </a:rPr>
-              <a:t>Actualización del servicio en la </a:t>
-            </a:r>
-            <a:r>
-              <a:rPr lang="es-ES" sz="600">
-                <a:latin typeface="Reddit Sans"/>
-              </a:rPr>
-              <a:t>herramienta</a:t>
-            </a:r>
-            <a:r>
-              <a:rPr lang="es-ES" sz="600" dirty="0">
-                <a:latin typeface="Reddit Sans"/>
-              </a:rPr>
-              <a:t> de procesos</a:t>
+              <a:t>herramienta de procesos</a:t>
             </a:r>
             <a:endParaRPr lang="es-ES" dirty="0" err="1"/>
           </a:p>
@@ -35042,6 +32957,2423 @@
         </p:txBody>
       </p:sp>
     </p:spTree>
+  </p:cSld>
+  <p:clrMapOvr>
+    <a:masterClrMapping/>
+  </p:clrMapOvr>
+</p:sld>
+</file>
+
+<file path=ppt/slides/slide9.xml><?xml version="1.0" encoding="utf-8"?>
+<p:sld xmlns:a="http://schemas.openxmlformats.org/drawingml/2006/main" xmlns:r="http://schemas.openxmlformats.org/officeDocument/2006/relationships" xmlns:p="http://schemas.openxmlformats.org/presentationml/2006/main">
+  <p:cSld>
+    <p:spTree>
+      <p:nvGrpSpPr>
+        <p:cNvPr id="1" name=""/>
+        <p:cNvGrpSpPr/>
+        <p:nvPr/>
+      </p:nvGrpSpPr>
+      <p:grpSpPr>
+        <a:xfrm>
+          <a:off x="0" y="0"/>
+          <a:ext cx="0" cy="0"/>
+          <a:chOff x="0" y="0"/>
+          <a:chExt cx="0" cy="0"/>
+        </a:xfrm>
+      </p:grpSpPr>
+      <p:sp>
+        <p:nvSpPr>
+          <p:cNvPr id="5" name="CuadroTexto 4">
+            <a:extLst>
+              <a:ext uri="{FF2B5EF4-FFF2-40B4-BE49-F238E27FC236}">
+                <a16:creationId xmlns:a16="http://schemas.microsoft.com/office/drawing/2014/main" id="{145F327D-4348-70E7-13D6-32A2BAE2F8BE}"/>
+              </a:ext>
+            </a:extLst>
+          </p:cNvPr>
+          <p:cNvSpPr txBox="1"/>
+          <p:nvPr/>
+        </p:nvSpPr>
+        <p:spPr>
+          <a:xfrm>
+            <a:off x="332015" y="884464"/>
+            <a:ext cx="4572000" cy="553998"/>
+          </a:xfrm>
+          <a:prstGeom prst="rect">
+            <a:avLst/>
+          </a:prstGeom>
+          <a:noFill/>
+        </p:spPr>
+        <p:txBody>
+          <a:bodyPr rot="0" spcFirstLastPara="0" vertOverflow="overflow" horzOverflow="overflow" vert="horz" wrap="square" lIns="91440" tIns="45720" rIns="91440" bIns="45720" numCol="1" spcCol="0" rtlCol="0" fromWordArt="0" anchor="t" anchorCtr="0" forceAA="0" compatLnSpc="1">
+            <a:prstTxWarp prst="textNoShape">
+              <a:avLst/>
+            </a:prstTxWarp>
+            <a:spAutoFit/>
+          </a:bodyPr>
+          <a:lstStyle/>
+          <a:p>
+            <a:r>
+              <a:rPr lang="es-ES" sz="1600" b="1" i="0" u="none" strike="noStrike" baseline="0">
+                <a:solidFill>
+                  <a:srgbClr val="0E337C"/>
+                </a:solidFill>
+                <a:latin typeface="Reddit Sans"/>
+              </a:rPr>
+              <a:t>Entregables</a:t>
+            </a:r>
+            <a:endParaRPr lang="es-ES"/>
+          </a:p>
+          <a:p>
+            <a:pPr algn="ctr"/>
+            <a:endParaRPr lang="es-ES"/>
+          </a:p>
+        </p:txBody>
+      </p:sp>
+      <p:cxnSp>
+        <p:nvCxnSpPr>
+          <p:cNvPr id="7" name="Google Shape;179;g3657f5ba65c_1_33">
+            <a:extLst>
+              <a:ext uri="{FF2B5EF4-FFF2-40B4-BE49-F238E27FC236}">
+                <a16:creationId xmlns:a16="http://schemas.microsoft.com/office/drawing/2014/main" id="{F4156A76-728E-D91D-CFF1-BF69AF932F73}"/>
+              </a:ext>
+            </a:extLst>
+          </p:cNvPr>
+          <p:cNvCxnSpPr/>
+          <p:nvPr/>
+        </p:nvCxnSpPr>
+        <p:spPr>
+          <a:xfrm rot="10800000" flipH="1">
+            <a:off x="394425" y="824004"/>
+            <a:ext cx="8103300" cy="28800"/>
+          </a:xfrm>
+          <a:prstGeom prst="straightConnector1">
+            <a:avLst/>
+          </a:prstGeom>
+          <a:noFill/>
+          <a:ln w="19050" cap="flat" cmpd="sng">
+            <a:solidFill>
+              <a:srgbClr val="0E337C"/>
+            </a:solidFill>
+            <a:prstDash val="solid"/>
+            <a:round/>
+            <a:headEnd type="none" w="sm" len="sm"/>
+            <a:tailEnd type="none" w="sm" len="sm"/>
+          </a:ln>
+        </p:spPr>
+      </p:cxnSp>
+      <p:sp>
+        <p:nvSpPr>
+          <p:cNvPr id="11" name="Google Shape;176;g3657f5ba65c_1_33">
+            <a:extLst>
+              <a:ext uri="{FF2B5EF4-FFF2-40B4-BE49-F238E27FC236}">
+                <a16:creationId xmlns:a16="http://schemas.microsoft.com/office/drawing/2014/main" id="{E1A0AA3D-88E5-3D13-D465-B35D6F9C4502}"/>
+              </a:ext>
+            </a:extLst>
+          </p:cNvPr>
+          <p:cNvSpPr txBox="1">
+            <a:spLocks noGrp="1"/>
+          </p:cNvSpPr>
+          <p:nvPr>
+            <p:ph type="title"/>
+          </p:nvPr>
+        </p:nvSpPr>
+        <p:spPr>
+          <a:xfrm>
+            <a:off x="329690" y="434140"/>
+            <a:ext cx="5554885" cy="616242"/>
+          </a:xfrm>
+          <a:prstGeom prst="rect">
+            <a:avLst/>
+          </a:prstGeom>
+        </p:spPr>
+        <p:txBody>
+          <a:bodyPr spcFirstLastPara="1" wrap="square" lIns="91425" tIns="91425" rIns="91425" bIns="91425" anchor="t" anchorCtr="0">
+            <a:normAutofit/>
+          </a:bodyPr>
+          <a:lstStyle/>
+          <a:p>
+            <a:r>
+              <a:rPr lang="es-ES" dirty="0" err="1"/>
+              <a:t>Roadmap</a:t>
+            </a:r>
+            <a:r>
+              <a:rPr lang="es-ES" dirty="0"/>
+              <a:t> Mesa de Servicios de Nueva Generación</a:t>
+            </a:r>
+            <a:endParaRPr dirty="0"/>
+          </a:p>
+        </p:txBody>
+      </p:sp>
+      <p:sp>
+        <p:nvSpPr>
+          <p:cNvPr id="19" name="CuadroTexto 18">
+            <a:extLst>
+              <a:ext uri="{FF2B5EF4-FFF2-40B4-BE49-F238E27FC236}">
+                <a16:creationId xmlns:a16="http://schemas.microsoft.com/office/drawing/2014/main" id="{E3FA27DD-8793-A77E-F267-901278F387A3}"/>
+              </a:ext>
+            </a:extLst>
+          </p:cNvPr>
+          <p:cNvSpPr txBox="1"/>
+          <p:nvPr/>
+        </p:nvSpPr>
+        <p:spPr>
+          <a:xfrm>
+            <a:off x="97970" y="1254576"/>
+            <a:ext cx="1251859" cy="400110"/>
+          </a:xfrm>
+          <a:prstGeom prst="rect">
+            <a:avLst/>
+          </a:prstGeom>
+          <a:noFill/>
+        </p:spPr>
+        <p:txBody>
+          <a:bodyPr rot="0" spcFirstLastPara="0" vertOverflow="overflow" horzOverflow="overflow" vert="horz" wrap="square" lIns="91440" tIns="45720" rIns="91440" bIns="45720" numCol="1" spcCol="0" rtlCol="0" fromWordArt="0" anchor="t" anchorCtr="0" forceAA="0" compatLnSpc="1">
+            <a:prstTxWarp prst="textNoShape">
+              <a:avLst/>
+            </a:prstTxWarp>
+            <a:spAutoFit/>
+          </a:bodyPr>
+          <a:lstStyle/>
+          <a:p>
+            <a:pPr algn="ctr"/>
+            <a:r>
+              <a:rPr lang="es-ES" sz="1000" b="1" dirty="0">
+                <a:solidFill>
+                  <a:srgbClr val="595959"/>
+                </a:solidFill>
+                <a:latin typeface="Reddit Sans"/>
+              </a:rPr>
+              <a:t>Modelos</a:t>
+            </a:r>
+            <a:r>
+              <a:rPr lang="es-ES" sz="1000" b="1" u="none" strike="noStrike" baseline="0" dirty="0">
+                <a:solidFill>
+                  <a:srgbClr val="595959"/>
+                </a:solidFill>
+                <a:latin typeface="Reddit Sans"/>
+              </a:rPr>
+              <a:t> </a:t>
+            </a:r>
+            <a:r>
+              <a:rPr lang="es-ES" sz="1000" b="1">
+                <a:solidFill>
+                  <a:srgbClr val="595959"/>
+                </a:solidFill>
+                <a:latin typeface="Reddit Sans"/>
+              </a:rPr>
+              <a:t>de operación</a:t>
+            </a:r>
+            <a:endParaRPr lang="es-ES" b="1">
+              <a:solidFill>
+                <a:srgbClr val="595959"/>
+              </a:solidFill>
+              <a:ea typeface="Reddit Sans"/>
+            </a:endParaRPr>
+          </a:p>
+        </p:txBody>
+      </p:sp>
+      <p:sp>
+        <p:nvSpPr>
+          <p:cNvPr id="23" name="Rounded Rectangle 2">
+            <a:extLst>
+              <a:ext uri="{FF2B5EF4-FFF2-40B4-BE49-F238E27FC236}">
+                <a16:creationId xmlns:a16="http://schemas.microsoft.com/office/drawing/2014/main" id="{E9408C5F-E950-AF15-64CE-64E635604BF3}"/>
+              </a:ext>
+            </a:extLst>
+          </p:cNvPr>
+          <p:cNvSpPr/>
+          <p:nvPr/>
+        </p:nvSpPr>
+        <p:spPr>
+          <a:xfrm>
+            <a:off x="1229096" y="1313904"/>
+            <a:ext cx="3134542" cy="281396"/>
+          </a:xfrm>
+          <a:prstGeom prst="roundRect">
+            <a:avLst/>
+          </a:prstGeom>
+          <a:ln/>
+        </p:spPr>
+        <p:style>
+          <a:lnRef idx="2">
+            <a:schemeClr val="accent5"/>
+          </a:lnRef>
+          <a:fillRef idx="1">
+            <a:schemeClr val="lt1"/>
+          </a:fillRef>
+          <a:effectRef idx="0">
+            <a:schemeClr val="accent5"/>
+          </a:effectRef>
+          <a:fontRef idx="minor">
+            <a:schemeClr val="dk1"/>
+          </a:fontRef>
+        </p:style>
+        <p:txBody>
+          <a:bodyPr lIns="91440" tIns="45720" rIns="91440" bIns="45720" rtlCol="0" anchor="ctr"/>
+          <a:lstStyle/>
+          <a:p>
+            <a:pPr algn="ctr" defTabSz="342900">
+              <a:defRPr sz="1500" b="1">
+                <a:solidFill>
+                  <a:srgbClr val="FFFFFF"/>
+                </a:solidFill>
+              </a:defRPr>
+            </a:pPr>
+            <a:r>
+              <a:rPr lang="es-ES" sz="900" b="1" kern="1200">
+                <a:solidFill>
+                  <a:schemeClr val="tx1"/>
+                </a:solidFill>
+                <a:latin typeface="Reddit Sans"/>
+                <a:ea typeface="Reddit Sans"/>
+              </a:rPr>
+              <a:t>Reactivo y Crecimiento Automatizado</a:t>
+            </a:r>
+            <a:endParaRPr lang="es-ES" sz="900">
+              <a:solidFill>
+                <a:schemeClr val="tx1"/>
+              </a:solidFill>
+              <a:cs typeface="Arial"/>
+            </a:endParaRPr>
+          </a:p>
+        </p:txBody>
+      </p:sp>
+      <p:sp>
+        <p:nvSpPr>
+          <p:cNvPr id="25" name="Rounded Rectangle 2">
+            <a:extLst>
+              <a:ext uri="{FF2B5EF4-FFF2-40B4-BE49-F238E27FC236}">
+                <a16:creationId xmlns:a16="http://schemas.microsoft.com/office/drawing/2014/main" id="{3A53E36D-15CA-5D71-2B69-A70F4DDB6310}"/>
+              </a:ext>
+            </a:extLst>
+          </p:cNvPr>
+          <p:cNvSpPr/>
+          <p:nvPr/>
+        </p:nvSpPr>
+        <p:spPr>
+          <a:xfrm>
+            <a:off x="4364185" y="1313907"/>
+            <a:ext cx="2236469" cy="286838"/>
+          </a:xfrm>
+          <a:prstGeom prst="roundRect">
+            <a:avLst/>
+          </a:prstGeom>
+          <a:ln/>
+        </p:spPr>
+        <p:style>
+          <a:lnRef idx="2">
+            <a:schemeClr val="accent5"/>
+          </a:lnRef>
+          <a:fillRef idx="1">
+            <a:schemeClr val="lt1"/>
+          </a:fillRef>
+          <a:effectRef idx="0">
+            <a:schemeClr val="accent5"/>
+          </a:effectRef>
+          <a:fontRef idx="minor">
+            <a:schemeClr val="dk1"/>
+          </a:fontRef>
+        </p:style>
+        <p:txBody>
+          <a:bodyPr lIns="91440" tIns="45720" rIns="91440" bIns="45720" rtlCol="0" anchor="ctr"/>
+          <a:lstStyle/>
+          <a:p>
+            <a:pPr algn="ctr" defTabSz="342900">
+              <a:defRPr sz="1500" b="1">
+                <a:solidFill>
+                  <a:srgbClr val="FFFFFF"/>
+                </a:solidFill>
+              </a:defRPr>
+            </a:pPr>
+            <a:r>
+              <a:rPr lang="es-ES" sz="900" b="1" kern="1200">
+                <a:solidFill>
+                  <a:schemeClr val="tx1"/>
+                </a:solidFill>
+                <a:latin typeface="Reddit Sans"/>
+                <a:ea typeface="Reddit Sans"/>
+              </a:rPr>
+              <a:t>Predictivo y Evolutivo</a:t>
+            </a:r>
+            <a:endParaRPr lang="es-ES" sz="900">
+              <a:solidFill>
+                <a:schemeClr val="tx1"/>
+              </a:solidFill>
+            </a:endParaRPr>
+          </a:p>
+        </p:txBody>
+      </p:sp>
+      <p:sp>
+        <p:nvSpPr>
+          <p:cNvPr id="27" name="Rounded Rectangle 2">
+            <a:extLst>
+              <a:ext uri="{FF2B5EF4-FFF2-40B4-BE49-F238E27FC236}">
+                <a16:creationId xmlns:a16="http://schemas.microsoft.com/office/drawing/2014/main" id="{E414F6A8-1018-D7BC-1DD7-6692C22AEF41}"/>
+              </a:ext>
+            </a:extLst>
+          </p:cNvPr>
+          <p:cNvSpPr/>
+          <p:nvPr/>
+        </p:nvSpPr>
+        <p:spPr>
+          <a:xfrm>
+            <a:off x="6617526" y="1292133"/>
+            <a:ext cx="1877241" cy="308610"/>
+          </a:xfrm>
+          <a:prstGeom prst="roundRect">
+            <a:avLst/>
+          </a:prstGeom>
+          <a:ln/>
+        </p:spPr>
+        <p:style>
+          <a:lnRef idx="2">
+            <a:schemeClr val="accent5"/>
+          </a:lnRef>
+          <a:fillRef idx="1">
+            <a:schemeClr val="lt1"/>
+          </a:fillRef>
+          <a:effectRef idx="0">
+            <a:schemeClr val="accent5"/>
+          </a:effectRef>
+          <a:fontRef idx="minor">
+            <a:schemeClr val="dk1"/>
+          </a:fontRef>
+        </p:style>
+        <p:txBody>
+          <a:bodyPr lIns="91440" tIns="45720" rIns="91440" bIns="45720" rtlCol="0" anchor="ctr"/>
+          <a:lstStyle/>
+          <a:p>
+            <a:pPr algn="ctr" defTabSz="342900">
+              <a:defRPr sz="1500" b="1">
+                <a:solidFill>
+                  <a:srgbClr val="FFFFFF"/>
+                </a:solidFill>
+              </a:defRPr>
+            </a:pPr>
+            <a:r>
+              <a:rPr lang="es-ES" sz="900" kern="1200">
+                <a:solidFill>
+                  <a:schemeClr val="tx1"/>
+                </a:solidFill>
+                <a:latin typeface="Reddit Sans"/>
+                <a:ea typeface="Reddit Sans"/>
+                <a:cs typeface="Arial"/>
+              </a:rPr>
+              <a:t>Autónomo e Inteligente</a:t>
+            </a:r>
+          </a:p>
+        </p:txBody>
+      </p:sp>
+      <p:sp>
+        <p:nvSpPr>
+          <p:cNvPr id="29" name="OTLSHAPE_TB_00000000000000000000000000000000_ScaleContainer">
+            <a:extLst>
+              <a:ext uri="{FF2B5EF4-FFF2-40B4-BE49-F238E27FC236}">
+                <a16:creationId xmlns:a16="http://schemas.microsoft.com/office/drawing/2014/main" id="{9633E68C-6E3F-DB3B-22B6-05B421634494}"/>
+              </a:ext>
+            </a:extLst>
+          </p:cNvPr>
+          <p:cNvSpPr/>
+          <p:nvPr/>
+        </p:nvSpPr>
+        <p:spPr>
+          <a:xfrm>
+            <a:off x="1224351" y="1604767"/>
+            <a:ext cx="7272393" cy="172532"/>
+          </a:xfrm>
+          <a:prstGeom prst="roundRect">
+            <a:avLst>
+              <a:gd name="adj" fmla="val 16667"/>
+            </a:avLst>
+          </a:prstGeom>
+          <a:solidFill>
+            <a:srgbClr val="44546A"/>
+          </a:solidFill>
+          <a:ln w="12700">
+            <a:miter lim="400000"/>
+          </a:ln>
+        </p:spPr>
+        <p:txBody>
+          <a:bodyPr lIns="34289" rIns="34289" anchor="ctr"/>
+          <a:lstStyle>
+            <a:defPPr>
+              <a:defRPr lang="es-CO"/>
+            </a:defPPr>
+            <a:lvl1pPr marL="0" algn="l" defTabSz="685800" rtl="0" eaLnBrk="1" latinLnBrk="0" hangingPunct="1">
+              <a:defRPr sz="1350" kern="1200">
+                <a:solidFill>
+                  <a:schemeClr val="tx1"/>
+                </a:solidFill>
+                <a:latin typeface="+mn-lt"/>
+                <a:ea typeface="+mn-ea"/>
+                <a:cs typeface="+mn-cs"/>
+              </a:defRPr>
+            </a:lvl1pPr>
+            <a:lvl2pPr marL="342900" algn="l" defTabSz="685800" rtl="0" eaLnBrk="1" latinLnBrk="0" hangingPunct="1">
+              <a:defRPr sz="1350" kern="1200">
+                <a:solidFill>
+                  <a:schemeClr val="tx1"/>
+                </a:solidFill>
+                <a:latin typeface="+mn-lt"/>
+                <a:ea typeface="+mn-ea"/>
+                <a:cs typeface="+mn-cs"/>
+              </a:defRPr>
+            </a:lvl2pPr>
+            <a:lvl3pPr marL="685800" algn="l" defTabSz="685800" rtl="0" eaLnBrk="1" latinLnBrk="0" hangingPunct="1">
+              <a:defRPr sz="1350" kern="1200">
+                <a:solidFill>
+                  <a:schemeClr val="tx1"/>
+                </a:solidFill>
+                <a:latin typeface="+mn-lt"/>
+                <a:ea typeface="+mn-ea"/>
+                <a:cs typeface="+mn-cs"/>
+              </a:defRPr>
+            </a:lvl3pPr>
+            <a:lvl4pPr marL="1028700" algn="l" defTabSz="685800" rtl="0" eaLnBrk="1" latinLnBrk="0" hangingPunct="1">
+              <a:defRPr sz="1350" kern="1200">
+                <a:solidFill>
+                  <a:schemeClr val="tx1"/>
+                </a:solidFill>
+                <a:latin typeface="+mn-lt"/>
+                <a:ea typeface="+mn-ea"/>
+                <a:cs typeface="+mn-cs"/>
+              </a:defRPr>
+            </a:lvl4pPr>
+            <a:lvl5pPr marL="1371600" algn="l" defTabSz="685800" rtl="0" eaLnBrk="1" latinLnBrk="0" hangingPunct="1">
+              <a:defRPr sz="1350" kern="1200">
+                <a:solidFill>
+                  <a:schemeClr val="tx1"/>
+                </a:solidFill>
+                <a:latin typeface="+mn-lt"/>
+                <a:ea typeface="+mn-ea"/>
+                <a:cs typeface="+mn-cs"/>
+              </a:defRPr>
+            </a:lvl5pPr>
+            <a:lvl6pPr marL="1714500" algn="l" defTabSz="685800" rtl="0" eaLnBrk="1" latinLnBrk="0" hangingPunct="1">
+              <a:defRPr sz="1350" kern="1200">
+                <a:solidFill>
+                  <a:schemeClr val="tx1"/>
+                </a:solidFill>
+                <a:latin typeface="+mn-lt"/>
+                <a:ea typeface="+mn-ea"/>
+                <a:cs typeface="+mn-cs"/>
+              </a:defRPr>
+            </a:lvl6pPr>
+            <a:lvl7pPr marL="2057400" algn="l" defTabSz="685800" rtl="0" eaLnBrk="1" latinLnBrk="0" hangingPunct="1">
+              <a:defRPr sz="1350" kern="1200">
+                <a:solidFill>
+                  <a:schemeClr val="tx1"/>
+                </a:solidFill>
+                <a:latin typeface="+mn-lt"/>
+                <a:ea typeface="+mn-ea"/>
+                <a:cs typeface="+mn-cs"/>
+              </a:defRPr>
+            </a:lvl7pPr>
+            <a:lvl8pPr marL="2400300" algn="l" defTabSz="685800" rtl="0" eaLnBrk="1" latinLnBrk="0" hangingPunct="1">
+              <a:defRPr sz="1350" kern="1200">
+                <a:solidFill>
+                  <a:schemeClr val="tx1"/>
+                </a:solidFill>
+                <a:latin typeface="+mn-lt"/>
+                <a:ea typeface="+mn-ea"/>
+                <a:cs typeface="+mn-cs"/>
+              </a:defRPr>
+            </a:lvl8pPr>
+            <a:lvl9pPr marL="2743200" algn="l" defTabSz="685800" rtl="0" eaLnBrk="1" latinLnBrk="0" hangingPunct="1">
+              <a:defRPr sz="1350" kern="1200">
+                <a:solidFill>
+                  <a:schemeClr val="tx1"/>
+                </a:solidFill>
+                <a:latin typeface="+mn-lt"/>
+                <a:ea typeface="+mn-ea"/>
+                <a:cs typeface="+mn-cs"/>
+              </a:defRPr>
+            </a:lvl9pPr>
+          </a:lstStyle>
+          <a:p>
+            <a:pPr algn="ctr">
+              <a:defRPr>
+                <a:solidFill>
+                  <a:srgbClr val="FFFFFF"/>
+                </a:solidFill>
+              </a:defRPr>
+            </a:pPr>
+            <a:endParaRPr sz="1013"/>
+          </a:p>
+        </p:txBody>
+      </p:sp>
+      <p:sp>
+        <p:nvSpPr>
+          <p:cNvPr id="31" name="CuadroTexto 30">
+            <a:extLst>
+              <a:ext uri="{FF2B5EF4-FFF2-40B4-BE49-F238E27FC236}">
+                <a16:creationId xmlns:a16="http://schemas.microsoft.com/office/drawing/2014/main" id="{4B050ACB-3FB6-E019-C71A-4572E0D00025}"/>
+              </a:ext>
+            </a:extLst>
+          </p:cNvPr>
+          <p:cNvSpPr txBox="1"/>
+          <p:nvPr/>
+        </p:nvSpPr>
+        <p:spPr>
+          <a:xfrm>
+            <a:off x="4000500" y="1602918"/>
+            <a:ext cx="1039586" cy="215444"/>
+          </a:xfrm>
+          <a:prstGeom prst="rect">
+            <a:avLst/>
+          </a:prstGeom>
+          <a:noFill/>
+        </p:spPr>
+        <p:txBody>
+          <a:bodyPr rot="0" spcFirstLastPara="0" vertOverflow="overflow" horzOverflow="overflow" vert="horz" wrap="square" lIns="91440" tIns="45720" rIns="91440" bIns="45720" numCol="1" spcCol="0" rtlCol="0" fromWordArt="0" anchor="t" anchorCtr="0" forceAA="0" compatLnSpc="1">
+            <a:prstTxWarp prst="textNoShape">
+              <a:avLst/>
+            </a:prstTxWarp>
+            <a:spAutoFit/>
+          </a:bodyPr>
+          <a:lstStyle/>
+          <a:p>
+            <a:r>
+              <a:rPr lang="es-ES" sz="800" b="1">
+                <a:solidFill>
+                  <a:srgbClr val="FFFFFF"/>
+                </a:solidFill>
+                <a:latin typeface="Reddit Sans"/>
+              </a:rPr>
+              <a:t>Q3</a:t>
+            </a:r>
+            <a:endParaRPr lang="es-ES" sz="800">
+              <a:solidFill>
+                <a:srgbClr val="FFFFFF"/>
+              </a:solidFill>
+            </a:endParaRPr>
+          </a:p>
+        </p:txBody>
+      </p:sp>
+      <p:sp>
+        <p:nvSpPr>
+          <p:cNvPr id="33" name="CuadroTexto 32">
+            <a:extLst>
+              <a:ext uri="{FF2B5EF4-FFF2-40B4-BE49-F238E27FC236}">
+                <a16:creationId xmlns:a16="http://schemas.microsoft.com/office/drawing/2014/main" id="{A9723865-5A41-F725-C91B-0057835821BF}"/>
+              </a:ext>
+            </a:extLst>
+          </p:cNvPr>
+          <p:cNvSpPr txBox="1"/>
+          <p:nvPr/>
+        </p:nvSpPr>
+        <p:spPr>
+          <a:xfrm>
+            <a:off x="7222670" y="1602919"/>
+            <a:ext cx="1039586" cy="215444"/>
+          </a:xfrm>
+          <a:prstGeom prst="rect">
+            <a:avLst/>
+          </a:prstGeom>
+          <a:noFill/>
+        </p:spPr>
+        <p:txBody>
+          <a:bodyPr rot="0" spcFirstLastPara="0" vertOverflow="overflow" horzOverflow="overflow" vert="horz" wrap="square" lIns="91440" tIns="45720" rIns="91440" bIns="45720" numCol="1" spcCol="0" rtlCol="0" fromWordArt="0" anchor="t" anchorCtr="0" forceAA="0" compatLnSpc="1">
+            <a:prstTxWarp prst="textNoShape">
+              <a:avLst/>
+            </a:prstTxWarp>
+            <a:spAutoFit/>
+          </a:bodyPr>
+          <a:lstStyle/>
+          <a:p>
+            <a:r>
+              <a:rPr lang="es-ES" sz="800" b="1">
+                <a:solidFill>
+                  <a:srgbClr val="FFFFFF"/>
+                </a:solidFill>
+                <a:latin typeface="Reddit Sans"/>
+              </a:rPr>
+              <a:t>Q4</a:t>
+            </a:r>
+            <a:endParaRPr lang="es-ES" sz="800">
+              <a:solidFill>
+                <a:srgbClr val="FFFFFF"/>
+              </a:solidFill>
+            </a:endParaRPr>
+          </a:p>
+        </p:txBody>
+      </p:sp>
+      <p:cxnSp>
+        <p:nvCxnSpPr>
+          <p:cNvPr id="35" name="Conector recto de flecha 34">
+            <a:extLst>
+              <a:ext uri="{FF2B5EF4-FFF2-40B4-BE49-F238E27FC236}">
+                <a16:creationId xmlns:a16="http://schemas.microsoft.com/office/drawing/2014/main" id="{0CD3CD7E-9620-69A8-67EC-DED704E8E1E1}"/>
+              </a:ext>
+            </a:extLst>
+          </p:cNvPr>
+          <p:cNvCxnSpPr/>
+          <p:nvPr/>
+        </p:nvCxnSpPr>
+        <p:spPr>
+          <a:xfrm>
+            <a:off x="6618514" y="1612447"/>
+            <a:ext cx="2177" cy="171448"/>
+          </a:xfrm>
+          <a:prstGeom prst="straightConnector1">
+            <a:avLst/>
+          </a:prstGeom>
+          <a:ln>
+            <a:solidFill>
+              <a:schemeClr val="bg1"/>
+            </a:solidFill>
+          </a:ln>
+        </p:spPr>
+        <p:style>
+          <a:lnRef idx="1">
+            <a:schemeClr val="accent1"/>
+          </a:lnRef>
+          <a:fillRef idx="0">
+            <a:schemeClr val="accent1"/>
+          </a:fillRef>
+          <a:effectRef idx="0">
+            <a:schemeClr val="accent1"/>
+          </a:effectRef>
+          <a:fontRef idx="minor">
+            <a:schemeClr val="tx1"/>
+          </a:fontRef>
+        </p:style>
+      </p:cxnSp>
+      <p:sp>
+        <p:nvSpPr>
+          <p:cNvPr id="37" name="CuadroTexto 36">
+            <a:extLst>
+              <a:ext uri="{FF2B5EF4-FFF2-40B4-BE49-F238E27FC236}">
+                <a16:creationId xmlns:a16="http://schemas.microsoft.com/office/drawing/2014/main" id="{EE04F3D4-2E69-CCF8-C888-FC89A4983DD7}"/>
+              </a:ext>
+            </a:extLst>
+          </p:cNvPr>
+          <p:cNvSpPr txBox="1"/>
+          <p:nvPr/>
+        </p:nvSpPr>
+        <p:spPr>
+          <a:xfrm>
+            <a:off x="1963509" y="1786617"/>
+            <a:ext cx="751115" cy="246221"/>
+          </a:xfrm>
+          <a:prstGeom prst="rect">
+            <a:avLst/>
+          </a:prstGeom>
+          <a:noFill/>
+        </p:spPr>
+        <p:txBody>
+          <a:bodyPr rot="0" spcFirstLastPara="0" vertOverflow="overflow" horzOverflow="overflow" vert="horz" wrap="square" lIns="91440" tIns="45720" rIns="91440" bIns="45720" numCol="1" spcCol="0" rtlCol="0" fromWordArt="0" anchor="t" anchorCtr="0" forceAA="0" compatLnSpc="1">
+            <a:prstTxWarp prst="textNoShape">
+              <a:avLst/>
+            </a:prstTxWarp>
+            <a:spAutoFit/>
+          </a:bodyPr>
+          <a:lstStyle/>
+          <a:p>
+            <a:pPr algn="l"/>
+            <a:r>
+              <a:rPr lang="es-ES" sz="1000">
+                <a:solidFill>
+                  <a:schemeClr val="bg2"/>
+                </a:solidFill>
+              </a:rPr>
+              <a:t>Julio</a:t>
+            </a:r>
+          </a:p>
+        </p:txBody>
+      </p:sp>
+      <p:sp>
+        <p:nvSpPr>
+          <p:cNvPr id="39" name="CuadroTexto 38">
+            <a:extLst>
+              <a:ext uri="{FF2B5EF4-FFF2-40B4-BE49-F238E27FC236}">
+                <a16:creationId xmlns:a16="http://schemas.microsoft.com/office/drawing/2014/main" id="{B4970034-3526-F52C-92F3-D759F2021FAF}"/>
+              </a:ext>
+            </a:extLst>
+          </p:cNvPr>
+          <p:cNvSpPr txBox="1"/>
+          <p:nvPr/>
+        </p:nvSpPr>
+        <p:spPr>
+          <a:xfrm>
+            <a:off x="3710665" y="1792060"/>
+            <a:ext cx="751115" cy="246221"/>
+          </a:xfrm>
+          <a:prstGeom prst="rect">
+            <a:avLst/>
+          </a:prstGeom>
+          <a:noFill/>
+        </p:spPr>
+        <p:txBody>
+          <a:bodyPr rot="0" spcFirstLastPara="0" vertOverflow="overflow" horzOverflow="overflow" vert="horz" wrap="square" lIns="91440" tIns="45720" rIns="91440" bIns="45720" numCol="1" spcCol="0" rtlCol="0" fromWordArt="0" anchor="t" anchorCtr="0" forceAA="0" compatLnSpc="1">
+            <a:prstTxWarp prst="textNoShape">
+              <a:avLst/>
+            </a:prstTxWarp>
+            <a:spAutoFit/>
+          </a:bodyPr>
+          <a:lstStyle/>
+          <a:p>
+            <a:pPr algn="l"/>
+            <a:r>
+              <a:rPr lang="es-ES" sz="1000">
+                <a:solidFill>
+                  <a:schemeClr val="bg2"/>
+                </a:solidFill>
+              </a:rPr>
+              <a:t>Agosto</a:t>
+            </a:r>
+          </a:p>
+        </p:txBody>
+      </p:sp>
+      <p:sp>
+        <p:nvSpPr>
+          <p:cNvPr id="41" name="CuadroTexto 40">
+            <a:extLst>
+              <a:ext uri="{FF2B5EF4-FFF2-40B4-BE49-F238E27FC236}">
+                <a16:creationId xmlns:a16="http://schemas.microsoft.com/office/drawing/2014/main" id="{F8A3F251-7D3F-1B69-7AB5-392781C71481}"/>
+              </a:ext>
+            </a:extLst>
+          </p:cNvPr>
+          <p:cNvSpPr txBox="1"/>
+          <p:nvPr/>
+        </p:nvSpPr>
+        <p:spPr>
+          <a:xfrm>
+            <a:off x="5343521" y="1786617"/>
+            <a:ext cx="1094015" cy="246221"/>
+          </a:xfrm>
+          <a:prstGeom prst="rect">
+            <a:avLst/>
+          </a:prstGeom>
+          <a:noFill/>
+        </p:spPr>
+        <p:txBody>
+          <a:bodyPr rot="0" spcFirstLastPara="0" vertOverflow="overflow" horzOverflow="overflow" vert="horz" wrap="square" lIns="91440" tIns="45720" rIns="91440" bIns="45720" numCol="1" spcCol="0" rtlCol="0" fromWordArt="0" anchor="t" anchorCtr="0" forceAA="0" compatLnSpc="1">
+            <a:prstTxWarp prst="textNoShape">
+              <a:avLst/>
+            </a:prstTxWarp>
+            <a:spAutoFit/>
+          </a:bodyPr>
+          <a:lstStyle/>
+          <a:p>
+            <a:pPr algn="l"/>
+            <a:r>
+              <a:rPr lang="es-ES" sz="1000">
+                <a:solidFill>
+                  <a:schemeClr val="bg2"/>
+                </a:solidFill>
+              </a:rPr>
+              <a:t>Septiembre</a:t>
+            </a:r>
+          </a:p>
+        </p:txBody>
+      </p:sp>
+      <p:sp>
+        <p:nvSpPr>
+          <p:cNvPr id="43" name="CuadroTexto 42">
+            <a:extLst>
+              <a:ext uri="{FF2B5EF4-FFF2-40B4-BE49-F238E27FC236}">
+                <a16:creationId xmlns:a16="http://schemas.microsoft.com/office/drawing/2014/main" id="{BE015285-C0C4-0359-3C2B-226C613353D8}"/>
+              </a:ext>
+            </a:extLst>
+          </p:cNvPr>
+          <p:cNvSpPr txBox="1"/>
+          <p:nvPr/>
+        </p:nvSpPr>
+        <p:spPr>
+          <a:xfrm>
+            <a:off x="7123337" y="1786617"/>
+            <a:ext cx="821873" cy="251663"/>
+          </a:xfrm>
+          <a:prstGeom prst="rect">
+            <a:avLst/>
+          </a:prstGeom>
+          <a:noFill/>
+        </p:spPr>
+        <p:txBody>
+          <a:bodyPr rot="0" spcFirstLastPara="0" vertOverflow="overflow" horzOverflow="overflow" vert="horz" wrap="square" lIns="91440" tIns="45720" rIns="91440" bIns="45720" numCol="1" spcCol="0" rtlCol="0" fromWordArt="0" anchor="t" anchorCtr="0" forceAA="0" compatLnSpc="1">
+            <a:prstTxWarp prst="textNoShape">
+              <a:avLst/>
+            </a:prstTxWarp>
+            <a:spAutoFit/>
+          </a:bodyPr>
+          <a:lstStyle/>
+          <a:p>
+            <a:pPr algn="l"/>
+            <a:r>
+              <a:rPr lang="es-ES" sz="1000">
+                <a:solidFill>
+                  <a:schemeClr val="bg2"/>
+                </a:solidFill>
+              </a:rPr>
+              <a:t>Octubre</a:t>
+            </a:r>
+          </a:p>
+        </p:txBody>
+      </p:sp>
+      <p:cxnSp>
+        <p:nvCxnSpPr>
+          <p:cNvPr id="45" name="Conector recto de flecha 44">
+            <a:extLst>
+              <a:ext uri="{FF2B5EF4-FFF2-40B4-BE49-F238E27FC236}">
+                <a16:creationId xmlns:a16="http://schemas.microsoft.com/office/drawing/2014/main" id="{45014E92-E35F-0381-2BD8-5CDA490D1AB8}"/>
+              </a:ext>
+            </a:extLst>
+          </p:cNvPr>
+          <p:cNvCxnSpPr/>
+          <p:nvPr/>
+        </p:nvCxnSpPr>
+        <p:spPr>
+          <a:xfrm>
+            <a:off x="3042558" y="1819274"/>
+            <a:ext cx="18504" cy="2567667"/>
+          </a:xfrm>
+          <a:prstGeom prst="straightConnector1">
+            <a:avLst/>
+          </a:prstGeom>
+          <a:ln w="12700">
+            <a:solidFill>
+              <a:schemeClr val="bg2">
+                <a:lumMod val="20000"/>
+                <a:lumOff val="80000"/>
+              </a:schemeClr>
+            </a:solidFill>
+            <a:prstDash val="dash"/>
+          </a:ln>
+        </p:spPr>
+        <p:style>
+          <a:lnRef idx="1">
+            <a:schemeClr val="accent1"/>
+          </a:lnRef>
+          <a:fillRef idx="0">
+            <a:schemeClr val="accent1"/>
+          </a:fillRef>
+          <a:effectRef idx="0">
+            <a:schemeClr val="accent1"/>
+          </a:effectRef>
+          <a:fontRef idx="minor">
+            <a:schemeClr val="tx1"/>
+          </a:fontRef>
+        </p:style>
+      </p:cxnSp>
+      <p:cxnSp>
+        <p:nvCxnSpPr>
+          <p:cNvPr id="47" name="Conector recto de flecha 46">
+            <a:extLst>
+              <a:ext uri="{FF2B5EF4-FFF2-40B4-BE49-F238E27FC236}">
+                <a16:creationId xmlns:a16="http://schemas.microsoft.com/office/drawing/2014/main" id="{93F2F33F-D377-1629-4288-1ADCDA614014}"/>
+              </a:ext>
+            </a:extLst>
+          </p:cNvPr>
+          <p:cNvCxnSpPr>
+            <a:cxnSpLocks/>
+          </p:cNvCxnSpPr>
+          <p:nvPr/>
+        </p:nvCxnSpPr>
+        <p:spPr>
+          <a:xfrm>
+            <a:off x="4887686" y="1792059"/>
+            <a:ext cx="13062" cy="2605767"/>
+          </a:xfrm>
+          <a:prstGeom prst="straightConnector1">
+            <a:avLst/>
+          </a:prstGeom>
+          <a:ln w="12700">
+            <a:solidFill>
+              <a:schemeClr val="bg2">
+                <a:lumMod val="20000"/>
+                <a:lumOff val="80000"/>
+              </a:schemeClr>
+            </a:solidFill>
+            <a:prstDash val="dash"/>
+          </a:ln>
+        </p:spPr>
+        <p:style>
+          <a:lnRef idx="1">
+            <a:schemeClr val="accent1"/>
+          </a:lnRef>
+          <a:fillRef idx="0">
+            <a:schemeClr val="accent1"/>
+          </a:fillRef>
+          <a:effectRef idx="0">
+            <a:schemeClr val="accent1"/>
+          </a:effectRef>
+          <a:fontRef idx="minor">
+            <a:schemeClr val="tx1"/>
+          </a:fontRef>
+        </p:style>
+      </p:cxnSp>
+      <p:cxnSp>
+        <p:nvCxnSpPr>
+          <p:cNvPr id="49" name="Conector recto de flecha 48">
+            <a:extLst>
+              <a:ext uri="{FF2B5EF4-FFF2-40B4-BE49-F238E27FC236}">
+                <a16:creationId xmlns:a16="http://schemas.microsoft.com/office/drawing/2014/main" id="{F5C5A59F-D40D-E871-B46E-4447C66ED326}"/>
+              </a:ext>
+            </a:extLst>
+          </p:cNvPr>
+          <p:cNvCxnSpPr>
+            <a:cxnSpLocks/>
+          </p:cNvCxnSpPr>
+          <p:nvPr/>
+        </p:nvCxnSpPr>
+        <p:spPr>
+          <a:xfrm>
+            <a:off x="6645728" y="1797502"/>
+            <a:ext cx="34835" cy="2589439"/>
+          </a:xfrm>
+          <a:prstGeom prst="straightConnector1">
+            <a:avLst/>
+          </a:prstGeom>
+          <a:ln w="12700">
+            <a:solidFill>
+              <a:schemeClr val="bg2">
+                <a:lumMod val="20000"/>
+                <a:lumOff val="80000"/>
+              </a:schemeClr>
+            </a:solidFill>
+            <a:prstDash val="dash"/>
+          </a:ln>
+        </p:spPr>
+        <p:style>
+          <a:lnRef idx="1">
+            <a:schemeClr val="accent1"/>
+          </a:lnRef>
+          <a:fillRef idx="0">
+            <a:schemeClr val="accent1"/>
+          </a:fillRef>
+          <a:effectRef idx="0">
+            <a:schemeClr val="accent1"/>
+          </a:effectRef>
+          <a:fontRef idx="minor">
+            <a:schemeClr val="tx1"/>
+          </a:fontRef>
+        </p:style>
+      </p:cxnSp>
+      <p:sp>
+        <p:nvSpPr>
+          <p:cNvPr id="53" name="CuadroTexto 52">
+            <a:extLst>
+              <a:ext uri="{FF2B5EF4-FFF2-40B4-BE49-F238E27FC236}">
+                <a16:creationId xmlns:a16="http://schemas.microsoft.com/office/drawing/2014/main" id="{DC991B8E-021B-EC77-E034-CBEA633B4016}"/>
+              </a:ext>
+            </a:extLst>
+          </p:cNvPr>
+          <p:cNvSpPr txBox="1"/>
+          <p:nvPr/>
+        </p:nvSpPr>
+        <p:spPr>
+          <a:xfrm>
+            <a:off x="1202869" y="2288720"/>
+            <a:ext cx="1850572" cy="1169551"/>
+          </a:xfrm>
+          <a:prstGeom prst="rect">
+            <a:avLst/>
+          </a:prstGeom>
+          <a:noFill/>
+        </p:spPr>
+        <p:txBody>
+          <a:bodyPr rot="0" spcFirstLastPara="0" vertOverflow="overflow" horzOverflow="overflow" vert="horz" wrap="square" lIns="91440" tIns="45720" rIns="91440" bIns="45720" numCol="1" spcCol="0" rtlCol="0" fromWordArt="0" anchor="t" anchorCtr="0" forceAA="0" compatLnSpc="1">
+            <a:prstTxWarp prst="textNoShape">
+              <a:avLst/>
+            </a:prstTxWarp>
+            <a:spAutoFit/>
+          </a:bodyPr>
+          <a:lstStyle/>
+          <a:p>
+            <a:pPr marL="171450" indent="-171450">
+              <a:buChar char="•"/>
+            </a:pPr>
+            <a:r>
+              <a:rPr lang="es-ES" sz="700" dirty="0">
+                <a:latin typeface="Reddit Sans"/>
+              </a:rPr>
+              <a:t>Nivel de madurez mesas </a:t>
+            </a:r>
+            <a:r>
+              <a:rPr lang="es-ES" sz="700">
+                <a:latin typeface="Reddit Sans"/>
+              </a:rPr>
+              <a:t>actuales</a:t>
+            </a:r>
+            <a:endParaRPr lang="es-ES" sz="700"/>
+          </a:p>
+          <a:p>
+            <a:pPr marL="171450" indent="-171450">
+              <a:buChar char="•"/>
+            </a:pPr>
+            <a:endParaRPr lang="es-ES" sz="700" dirty="0">
+              <a:latin typeface="Reddit Sans"/>
+            </a:endParaRPr>
+          </a:p>
+          <a:p>
+            <a:pPr marL="171450" indent="-171450">
+              <a:buChar char="•"/>
+            </a:pPr>
+            <a:r>
+              <a:rPr lang="es-ES" sz="700" dirty="0">
+                <a:latin typeface="Reddit Sans"/>
+              </a:rPr>
+              <a:t>Dolores de la operación - Pain </a:t>
+            </a:r>
+            <a:r>
+              <a:rPr lang="es-ES" sz="700" dirty="0" err="1">
+                <a:latin typeface="Reddit Sans"/>
+              </a:rPr>
+              <a:t>point</a:t>
+            </a:r>
+          </a:p>
+          <a:p>
+            <a:pPr marL="171450" indent="-171450">
+              <a:buChar char="•"/>
+            </a:pPr>
+            <a:endParaRPr lang="es-ES" sz="700" dirty="0">
+              <a:latin typeface="Reddit Sans"/>
+            </a:endParaRPr>
+          </a:p>
+          <a:p>
+            <a:pPr marL="171450" indent="-171450">
+              <a:buChar char="•"/>
+            </a:pPr>
+            <a:r>
+              <a:rPr lang="es-ES" sz="700">
+                <a:latin typeface="Reddit Sans"/>
+              </a:rPr>
+              <a:t>Oferta de valor</a:t>
+            </a:r>
+            <a:endParaRPr lang="es-ES" sz="700" dirty="0">
+              <a:latin typeface="Reddit Sans"/>
+            </a:endParaRPr>
+          </a:p>
+          <a:p>
+            <a:pPr marL="171450" indent="-171450">
+              <a:buChar char="•"/>
+            </a:pPr>
+            <a:endParaRPr lang="es-ES" sz="700" dirty="0">
+              <a:latin typeface="Reddit Sans"/>
+            </a:endParaRPr>
+          </a:p>
+          <a:p>
+            <a:pPr marL="171450" indent="-171450">
+              <a:buChar char="•"/>
+            </a:pPr>
+            <a:r>
+              <a:rPr lang="es-ES" sz="700" dirty="0">
+                <a:latin typeface="Reddit Sans"/>
+              </a:rPr>
+              <a:t>Esquema general del servicio – Service </a:t>
+            </a:r>
+            <a:r>
+              <a:rPr lang="es-ES" sz="700" dirty="0" err="1">
+                <a:latin typeface="Reddit Sans"/>
+              </a:rPr>
+              <a:t>Design</a:t>
+            </a:r>
+            <a:r>
+              <a:rPr lang="es-ES" sz="700" dirty="0">
+                <a:latin typeface="Reddit Sans"/>
+              </a:rPr>
+              <a:t> Blue </a:t>
+            </a:r>
+            <a:r>
+              <a:rPr lang="es-ES" sz="700" dirty="0" err="1">
+                <a:latin typeface="Reddit Sans"/>
+              </a:rPr>
+              <a:t>Print</a:t>
+            </a:r>
+          </a:p>
+          <a:p>
+            <a:pPr marL="171450" indent="-171450">
+              <a:buChar char="•"/>
+            </a:pPr>
+            <a:endParaRPr lang="es-ES" sz="700" dirty="0">
+              <a:latin typeface="Reddit Sans"/>
+            </a:endParaRPr>
+          </a:p>
+          <a:p>
+            <a:pPr marL="171450" indent="-171450">
+              <a:buChar char="•"/>
+            </a:pPr>
+            <a:endParaRPr lang="es-ES" sz="700" dirty="0">
+              <a:latin typeface="Reddit Sans"/>
+            </a:endParaRPr>
+          </a:p>
+        </p:txBody>
+      </p:sp>
+      <p:sp>
+        <p:nvSpPr>
+          <p:cNvPr id="64" name="CuadroTexto 63">
+            <a:extLst>
+              <a:ext uri="{FF2B5EF4-FFF2-40B4-BE49-F238E27FC236}">
+                <a16:creationId xmlns:a16="http://schemas.microsoft.com/office/drawing/2014/main" id="{BFC94FAC-A03D-2BBF-4601-BBD72FF20A2A}"/>
+              </a:ext>
+            </a:extLst>
+          </p:cNvPr>
+          <p:cNvSpPr txBox="1"/>
+          <p:nvPr/>
+        </p:nvSpPr>
+        <p:spPr>
+          <a:xfrm>
+            <a:off x="3053440" y="2288720"/>
+            <a:ext cx="1850572" cy="2246769"/>
+          </a:xfrm>
+          <a:prstGeom prst="rect">
+            <a:avLst/>
+          </a:prstGeom>
+          <a:noFill/>
+        </p:spPr>
+        <p:txBody>
+          <a:bodyPr rot="0" spcFirstLastPara="0" vertOverflow="overflow" horzOverflow="overflow" vert="horz" wrap="square" lIns="91440" tIns="45720" rIns="91440" bIns="45720" numCol="1" spcCol="0" rtlCol="0" fromWordArt="0" anchor="t" anchorCtr="0" forceAA="0" compatLnSpc="1">
+            <a:prstTxWarp prst="textNoShape">
+              <a:avLst/>
+            </a:prstTxWarp>
+            <a:spAutoFit/>
+          </a:bodyPr>
+          <a:lstStyle/>
+          <a:p>
+            <a:pPr marL="171450" indent="-171450">
+              <a:buChar char="•"/>
+            </a:pPr>
+            <a:r>
+              <a:rPr lang="es-ES" sz="700" dirty="0">
+                <a:latin typeface="Reddit Sans"/>
+              </a:rPr>
+              <a:t>Slide </a:t>
+            </a:r>
+            <a:r>
+              <a:rPr lang="es-ES" sz="700" dirty="0" err="1">
+                <a:latin typeface="Reddit Sans"/>
+              </a:rPr>
+              <a:t>deck</a:t>
+            </a:r>
+            <a:r>
+              <a:rPr lang="es-ES" sz="700" dirty="0">
+                <a:latin typeface="Reddit Sans"/>
+              </a:rPr>
+              <a:t> para comercial transición del servicio</a:t>
+            </a:r>
+            <a:endParaRPr lang="es-ES" sz="700" dirty="0"/>
+          </a:p>
+          <a:p>
+            <a:pPr marL="171450" indent="-171450">
+              <a:buChar char="•"/>
+            </a:pPr>
+            <a:endParaRPr lang="es-ES" sz="700" dirty="0">
+              <a:latin typeface="Reddit Sans"/>
+            </a:endParaRPr>
+          </a:p>
+          <a:p>
+            <a:pPr marL="171450" indent="-171450">
+              <a:buChar char="•"/>
+            </a:pPr>
+            <a:r>
+              <a:rPr lang="es-ES" sz="700" dirty="0">
+                <a:latin typeface="Reddit Sans"/>
+              </a:rPr>
+              <a:t>Slide </a:t>
+            </a:r>
+            <a:r>
+              <a:rPr lang="es-ES" sz="700" dirty="0" err="1">
+                <a:latin typeface="Reddit Sans"/>
+              </a:rPr>
+              <a:t>deck</a:t>
+            </a:r>
+            <a:r>
+              <a:rPr lang="es-ES" sz="700" dirty="0">
+                <a:latin typeface="Reddit Sans"/>
+              </a:rPr>
+              <a:t> para operación transición del servicio</a:t>
+            </a:r>
+          </a:p>
+          <a:p>
+            <a:pPr marL="171450" indent="-171450">
+              <a:buChar char="•"/>
+            </a:pPr>
+            <a:endParaRPr lang="es-ES" sz="700" dirty="0">
+              <a:latin typeface="Reddit Sans"/>
+            </a:endParaRPr>
+          </a:p>
+          <a:p>
+            <a:pPr marL="171450" indent="-171450">
+              <a:buChar char="•"/>
+            </a:pPr>
+            <a:r>
+              <a:rPr lang="es-ES" sz="700" dirty="0">
+                <a:latin typeface="Reddit Sans"/>
+              </a:rPr>
+              <a:t>Validación </a:t>
+            </a:r>
+            <a:r>
+              <a:rPr lang="es-ES" sz="700" dirty="0" err="1">
+                <a:latin typeface="Reddit Sans"/>
+              </a:rPr>
+              <a:t>estandarizacion</a:t>
+            </a:r>
+            <a:r>
+              <a:rPr lang="es-ES" sz="700" dirty="0">
+                <a:latin typeface="Reddit Sans"/>
+              </a:rPr>
+              <a:t> del </a:t>
+            </a:r>
+            <a:r>
+              <a:rPr lang="es-ES" sz="700" dirty="0" err="1">
+                <a:latin typeface="Reddit Sans"/>
+              </a:rPr>
+              <a:t>servicion</a:t>
+            </a:r>
+            <a:r>
+              <a:rPr lang="es-ES" sz="700" dirty="0">
+                <a:latin typeface="Reddit Sans"/>
+              </a:rPr>
+              <a:t> con comercial</a:t>
+            </a:r>
+          </a:p>
+          <a:p>
+            <a:pPr marL="171450" indent="-171450">
+              <a:buChar char="•"/>
+            </a:pPr>
+            <a:endParaRPr lang="es-ES" sz="700" dirty="0">
+              <a:latin typeface="Reddit Sans"/>
+            </a:endParaRPr>
+          </a:p>
+          <a:p>
+            <a:pPr marL="171450" indent="-171450">
+              <a:buChar char="•"/>
+            </a:pPr>
+            <a:r>
+              <a:rPr lang="es-ES" sz="700">
+                <a:latin typeface="Reddit Sans"/>
+              </a:rPr>
+              <a:t>Diseñar plan de transición operación actual</a:t>
+            </a:r>
+            <a:endParaRPr lang="es-ES" sz="700" dirty="0">
+              <a:latin typeface="Reddit Sans"/>
+            </a:endParaRPr>
+          </a:p>
+          <a:p>
+            <a:pPr marL="171450" indent="-171450">
+              <a:buChar char="•"/>
+            </a:pPr>
+            <a:endParaRPr lang="es-ES" sz="700" dirty="0">
+              <a:latin typeface="Reddit Sans"/>
+            </a:endParaRPr>
+          </a:p>
+          <a:p>
+            <a:pPr marL="171450" indent="-171450">
+              <a:buChar char="•"/>
+            </a:pPr>
+            <a:r>
+              <a:rPr lang="es-ES" sz="700" dirty="0" err="1">
+                <a:latin typeface="Reddit Sans"/>
+              </a:rPr>
+              <a:t>Habilitacion</a:t>
+            </a:r>
+            <a:r>
+              <a:rPr lang="es-ES" sz="700" dirty="0">
+                <a:latin typeface="Reddit Sans"/>
+              </a:rPr>
+              <a:t> equipo comercial</a:t>
+            </a:r>
+          </a:p>
+          <a:p>
+            <a:pPr marL="171450" indent="-171450">
+              <a:buChar char="•"/>
+            </a:pPr>
+            <a:endParaRPr lang="es-ES" sz="700" dirty="0">
+              <a:latin typeface="Reddit Sans"/>
+            </a:endParaRPr>
+          </a:p>
+          <a:p>
+            <a:pPr marL="171450" indent="-171450">
+              <a:buChar char="•"/>
+            </a:pPr>
+            <a:r>
+              <a:rPr lang="es-ES" sz="700" dirty="0">
+                <a:latin typeface="Reddit Sans"/>
+              </a:rPr>
+              <a:t>Habilitación equipo de la operación </a:t>
+            </a:r>
+            <a:r>
+              <a:rPr lang="es-ES" sz="700">
+                <a:latin typeface="Reddit Sans"/>
+              </a:rPr>
+              <a:t>wave 1</a:t>
+            </a:r>
+            <a:endParaRPr lang="es-ES" sz="700" dirty="0">
+              <a:latin typeface="Reddit Sans"/>
+            </a:endParaRPr>
+          </a:p>
+          <a:p>
+            <a:endParaRPr lang="es-ES" sz="700" dirty="0">
+              <a:latin typeface="Reddit Sans"/>
+            </a:endParaRPr>
+          </a:p>
+          <a:p>
+            <a:pPr marL="171450" indent="-171450">
+              <a:buChar char="•"/>
+            </a:pPr>
+            <a:endParaRPr lang="es-ES" sz="700" dirty="0">
+              <a:latin typeface="Reddit Sans"/>
+            </a:endParaRPr>
+          </a:p>
+          <a:p>
+            <a:pPr marL="171450" indent="-171450">
+              <a:buChar char="•"/>
+            </a:pPr>
+            <a:endParaRPr lang="es-ES" sz="700" dirty="0">
+              <a:latin typeface="Reddit Sans"/>
+            </a:endParaRPr>
+          </a:p>
+          <a:p>
+            <a:pPr marL="171450" indent="-171450">
+              <a:buChar char="•"/>
+            </a:pPr>
+            <a:endParaRPr lang="es-ES" sz="700" dirty="0">
+              <a:latin typeface="Reddit Sans"/>
+            </a:endParaRPr>
+          </a:p>
+        </p:txBody>
+      </p:sp>
+      <p:sp>
+        <p:nvSpPr>
+          <p:cNvPr id="65" name="CuadroTexto 64">
+            <a:extLst>
+              <a:ext uri="{FF2B5EF4-FFF2-40B4-BE49-F238E27FC236}">
+                <a16:creationId xmlns:a16="http://schemas.microsoft.com/office/drawing/2014/main" id="{4D67D610-C9FA-B84E-1049-D4AA7C737DDC}"/>
+              </a:ext>
+            </a:extLst>
+          </p:cNvPr>
+          <p:cNvSpPr txBox="1"/>
+          <p:nvPr/>
+        </p:nvSpPr>
+        <p:spPr>
+          <a:xfrm>
+            <a:off x="4855026" y="2288720"/>
+            <a:ext cx="1850572" cy="1923604"/>
+          </a:xfrm>
+          <a:prstGeom prst="rect">
+            <a:avLst/>
+          </a:prstGeom>
+          <a:noFill/>
+        </p:spPr>
+        <p:txBody>
+          <a:bodyPr rot="0" spcFirstLastPara="0" vertOverflow="overflow" horzOverflow="overflow" vert="horz" wrap="square" lIns="91440" tIns="45720" rIns="91440" bIns="45720" numCol="1" spcCol="0" rtlCol="0" fromWordArt="0" anchor="t" anchorCtr="0" forceAA="0" compatLnSpc="1">
+            <a:prstTxWarp prst="textNoShape">
+              <a:avLst/>
+            </a:prstTxWarp>
+            <a:spAutoFit/>
+          </a:bodyPr>
+          <a:lstStyle/>
+          <a:p>
+            <a:pPr marL="171450" indent="-171450">
+              <a:buChar char="•"/>
+            </a:pPr>
+            <a:r>
+              <a:rPr lang="es-ES" sz="700" dirty="0">
+                <a:latin typeface="Reddit Sans"/>
+              </a:rPr>
+              <a:t>Habilitación cliente sobre la evoluci</a:t>
+            </a:r>
+            <a:r>
+              <a:rPr lang="es-ES" sz="700">
+                <a:latin typeface="Reddit Sans"/>
+              </a:rPr>
+              <a:t>ón del servicio wave 1</a:t>
+            </a:r>
+            <a:endParaRPr lang="es-ES" sz="700" dirty="0">
+              <a:latin typeface="Reddit Sans"/>
+            </a:endParaRPr>
+          </a:p>
+          <a:p>
+            <a:pPr marL="171450" indent="-171450">
+              <a:buFont typeface="Arial"/>
+              <a:buChar char="•"/>
+            </a:pPr>
+            <a:endParaRPr lang="es-ES" sz="700" dirty="0">
+              <a:latin typeface="Reddit Sans"/>
+              <a:ea typeface="Reddit Sans"/>
+            </a:endParaRPr>
+          </a:p>
+          <a:p>
+            <a:pPr marL="171450" indent="-171450">
+              <a:buFont typeface="Arial,Sans-Serif"/>
+              <a:buChar char="•"/>
+            </a:pPr>
+            <a:r>
+              <a:rPr lang="es-ES" sz="700">
+                <a:latin typeface="Reddit Sans"/>
+                <a:ea typeface="Reddit Sans"/>
+              </a:rPr>
+              <a:t>Ejecutar</a:t>
+            </a:r>
+            <a:r>
+              <a:rPr lang="es-ES" sz="700" dirty="0">
+                <a:latin typeface="Reddit Sans"/>
+                <a:ea typeface="Reddit Sans"/>
+              </a:rPr>
+              <a:t> plan de transición para los clientes de la wave 1</a:t>
+            </a:r>
+          </a:p>
+          <a:p>
+            <a:pPr marL="171450" indent="-171450">
+              <a:buFont typeface="Arial,Sans-Serif"/>
+              <a:buChar char="•"/>
+            </a:pPr>
+            <a:endParaRPr lang="es-ES" sz="700" dirty="0">
+              <a:latin typeface="Reddit Sans"/>
+              <a:ea typeface="Reddit Sans"/>
+            </a:endParaRPr>
+          </a:p>
+          <a:p>
+            <a:pPr marL="171450" indent="-171450">
+              <a:buFont typeface="Arial,Sans-Serif"/>
+              <a:buChar char="•"/>
+            </a:pPr>
+            <a:r>
+              <a:rPr lang="es-ES" sz="700" dirty="0">
+                <a:latin typeface="Reddit Sans"/>
+                <a:ea typeface="Reddit Sans"/>
+              </a:rPr>
+              <a:t>Calculadora del servicio (plantilla de </a:t>
+            </a:r>
+            <a:r>
+              <a:rPr lang="es-ES" sz="700">
+                <a:latin typeface="Reddit Sans"/>
+                <a:ea typeface="Reddit Sans"/>
+              </a:rPr>
+              <a:t>estimación)</a:t>
+            </a:r>
+          </a:p>
+          <a:p>
+            <a:pPr marL="171450" indent="-171450">
+              <a:buFont typeface="Arial,Sans-Serif"/>
+              <a:buChar char="•"/>
+            </a:pPr>
+            <a:endParaRPr lang="es-ES" sz="700" dirty="0">
+              <a:latin typeface="Reddit Sans"/>
+              <a:ea typeface="Reddit Sans"/>
+            </a:endParaRPr>
+          </a:p>
+          <a:p>
+            <a:pPr marL="171450" indent="-171450">
+              <a:buFont typeface="Arial,Sans-Serif"/>
+              <a:buChar char="•"/>
+            </a:pPr>
+            <a:r>
+              <a:rPr lang="es-ES" sz="700">
+                <a:latin typeface="Reddit Sans"/>
+                <a:ea typeface="Reddit Sans"/>
+              </a:rPr>
+              <a:t>Inicio creación artefactos equipos comercial (propuestas, contratos, ...) del servicio nuevo</a:t>
+            </a:r>
+          </a:p>
+          <a:p>
+            <a:pPr marL="171450" indent="-171450">
+              <a:buFont typeface="Arial,Sans-Serif"/>
+              <a:buChar char="•"/>
+            </a:pPr>
+            <a:endParaRPr lang="es-ES" sz="700" dirty="0">
+              <a:latin typeface="Reddit Sans"/>
+              <a:ea typeface="Reddit Sans"/>
+            </a:endParaRPr>
+          </a:p>
+          <a:p>
+            <a:pPr marL="171450" indent="-171450">
+              <a:buFont typeface="Arial,Sans-Serif"/>
+              <a:buChar char="•"/>
+            </a:pPr>
+            <a:r>
+              <a:rPr lang="es-ES" sz="700">
+                <a:latin typeface="Reddit Sans"/>
+                <a:ea typeface="Reddit Sans"/>
+              </a:rPr>
+              <a:t>Inicio creación artefactos equipos de la operación del servicio nuevo</a:t>
+            </a:r>
+            <a:endParaRPr lang="es-ES" sz="700" dirty="0"/>
+          </a:p>
+          <a:p>
+            <a:pPr marL="171450" indent="-171450">
+              <a:buFont typeface="Arial,Sans-Serif"/>
+              <a:buChar char="•"/>
+            </a:pPr>
+            <a:endParaRPr lang="es-ES" sz="700" dirty="0">
+              <a:latin typeface="Reddit Sans"/>
+              <a:ea typeface="Reddit Sans"/>
+            </a:endParaRPr>
+          </a:p>
+          <a:p>
+            <a:pPr marL="171450" indent="-171450">
+              <a:buChar char="•"/>
+            </a:pPr>
+            <a:endParaRPr lang="es-ES" sz="700" dirty="0">
+              <a:latin typeface="Reddit Sans"/>
+            </a:endParaRPr>
+          </a:p>
+        </p:txBody>
+      </p:sp>
+      <p:sp>
+        <p:nvSpPr>
+          <p:cNvPr id="67" name="Estrella: 5 puntas 66">
+            <a:extLst>
+              <a:ext uri="{FF2B5EF4-FFF2-40B4-BE49-F238E27FC236}">
+                <a16:creationId xmlns:a16="http://schemas.microsoft.com/office/drawing/2014/main" id="{FE56A9FC-4DA0-EA9E-B693-65DC3D0DFD1C}"/>
+              </a:ext>
+            </a:extLst>
+          </p:cNvPr>
+          <p:cNvSpPr/>
+          <p:nvPr/>
+        </p:nvSpPr>
+        <p:spPr>
+          <a:xfrm>
+            <a:off x="1865811" y="1832065"/>
+            <a:ext cx="97972" cy="114301"/>
+          </a:xfrm>
+          <a:prstGeom prst="star5">
+            <a:avLst/>
+          </a:prstGeom>
+          <a:solidFill>
+            <a:schemeClr val="accent6"/>
+          </a:solidFill>
+          <a:ln w="6350"/>
+        </p:spPr>
+        <p:style>
+          <a:lnRef idx="2">
+            <a:schemeClr val="accent1">
+              <a:shade val="15000"/>
+            </a:schemeClr>
+          </a:lnRef>
+          <a:fillRef idx="1">
+            <a:schemeClr val="accent1"/>
+          </a:fillRef>
+          <a:effectRef idx="0">
+            <a:schemeClr val="accent1"/>
+          </a:effectRef>
+          <a:fontRef idx="minor">
+            <a:schemeClr val="lt1"/>
+          </a:fontRef>
+        </p:style>
+        <p:txBody>
+          <a:bodyPr rtlCol="0" anchor="ctr"/>
+          <a:lstStyle/>
+          <a:p>
+            <a:pPr algn="ctr"/>
+            <a:endParaRPr lang="es-ES"/>
+          </a:p>
+        </p:txBody>
+      </p:sp>
+      <p:sp>
+        <p:nvSpPr>
+          <p:cNvPr id="69" name="Estrella: 5 puntas 68">
+            <a:extLst>
+              <a:ext uri="{FF2B5EF4-FFF2-40B4-BE49-F238E27FC236}">
+                <a16:creationId xmlns:a16="http://schemas.microsoft.com/office/drawing/2014/main" id="{6A96B953-3EAE-34E6-E7AB-9509AE1EB014}"/>
+              </a:ext>
+            </a:extLst>
+          </p:cNvPr>
+          <p:cNvSpPr/>
+          <p:nvPr/>
+        </p:nvSpPr>
+        <p:spPr>
+          <a:xfrm>
+            <a:off x="6954883" y="1859279"/>
+            <a:ext cx="97972" cy="114301"/>
+          </a:xfrm>
+          <a:prstGeom prst="star5">
+            <a:avLst/>
+          </a:prstGeom>
+          <a:solidFill>
+            <a:srgbClr val="7030A0"/>
+          </a:solidFill>
+          <a:ln w="6350"/>
+        </p:spPr>
+        <p:style>
+          <a:lnRef idx="2">
+            <a:schemeClr val="accent1">
+              <a:shade val="15000"/>
+            </a:schemeClr>
+          </a:lnRef>
+          <a:fillRef idx="1">
+            <a:schemeClr val="accent1"/>
+          </a:fillRef>
+          <a:effectRef idx="0">
+            <a:schemeClr val="accent1"/>
+          </a:effectRef>
+          <a:fontRef idx="minor">
+            <a:schemeClr val="lt1"/>
+          </a:fontRef>
+        </p:style>
+        <p:txBody>
+          <a:bodyPr rtlCol="0" anchor="ctr"/>
+          <a:lstStyle/>
+          <a:p>
+            <a:pPr algn="ctr"/>
+            <a:endParaRPr lang="es-ES"/>
+          </a:p>
+        </p:txBody>
+      </p:sp>
+      <p:sp>
+        <p:nvSpPr>
+          <p:cNvPr id="71" name="TextBox 14">
+            <a:extLst>
+              <a:ext uri="{FF2B5EF4-FFF2-40B4-BE49-F238E27FC236}">
+                <a16:creationId xmlns:a16="http://schemas.microsoft.com/office/drawing/2014/main" id="{CE1FE641-FA41-1611-A826-E22AF35DB61D}"/>
+              </a:ext>
+            </a:extLst>
+          </p:cNvPr>
+          <p:cNvSpPr txBox="1"/>
+          <p:nvPr/>
+        </p:nvSpPr>
+        <p:spPr>
+          <a:xfrm>
+            <a:off x="4975963" y="1888130"/>
+            <a:ext cx="925474" cy="323165"/>
+          </a:xfrm>
+          <a:prstGeom prst="rect">
+            <a:avLst/>
+          </a:prstGeom>
+          <a:noFill/>
+        </p:spPr>
+        <p:txBody>
+          <a:bodyPr wrap="square" lIns="91440" tIns="45720" rIns="91440" bIns="45720" anchor="t">
+            <a:spAutoFit/>
+          </a:bodyPr>
+          <a:lstStyle/>
+          <a:p>
+            <a:pPr defTabSz="342900">
+              <a:buClrTx/>
+              <a:defRPr sz="1000">
+                <a:solidFill>
+                  <a:srgbClr val="005DAA"/>
+                </a:solidFill>
+              </a:defRPr>
+            </a:pPr>
+            <a:r>
+              <a:rPr sz="750" kern="1200">
+                <a:solidFill>
+                  <a:srgbClr val="005DAA"/>
+                </a:solidFill>
+                <a:latin typeface="Reddit Sans"/>
+                <a:ea typeface="Reddit Sans"/>
+                <a:cs typeface="+mn-cs"/>
+              </a:rPr>
+              <a:t>◆ </a:t>
+            </a:r>
+            <a:r>
+              <a:rPr lang="es-ES" sz="750" kern="1200">
+                <a:solidFill>
+                  <a:srgbClr val="005DAA"/>
+                </a:solidFill>
+                <a:latin typeface="Reddit Sans"/>
+                <a:ea typeface="Reddit Sans"/>
+                <a:cs typeface="+mn-cs"/>
+              </a:rPr>
+              <a:t>Wave </a:t>
+            </a:r>
+            <a:r>
+              <a:rPr lang="es-ES" sz="750" kern="1200" dirty="0">
+                <a:solidFill>
+                  <a:srgbClr val="005DAA"/>
+                </a:solidFill>
+                <a:latin typeface="Reddit Sans"/>
+                <a:ea typeface="Reddit Sans"/>
+                <a:cs typeface="+mn-cs"/>
+              </a:rPr>
+              <a:t>1ª</a:t>
+            </a:r>
+            <a:r>
+              <a:rPr sz="750" kern="1200" dirty="0">
+                <a:solidFill>
+                  <a:srgbClr val="005DAA"/>
+                </a:solidFill>
+                <a:latin typeface="Reddit Sans"/>
+                <a:ea typeface="Reddit Sans"/>
+                <a:cs typeface="+mn-cs"/>
+              </a:rPr>
+              <a:t> Transición</a:t>
+            </a:r>
+            <a:endParaRPr lang="es-ES" sz="750" kern="1200" dirty="0">
+              <a:solidFill>
+                <a:srgbClr val="005DAA"/>
+              </a:solidFill>
+              <a:latin typeface="Reddit Sans"/>
+              <a:ea typeface="Reddit Sans"/>
+              <a:cs typeface="+mn-cs"/>
+            </a:endParaRPr>
+          </a:p>
+        </p:txBody>
+      </p:sp>
+      <p:sp>
+        <p:nvSpPr>
+          <p:cNvPr id="73" name="TextBox 14">
+            <a:extLst>
+              <a:ext uri="{FF2B5EF4-FFF2-40B4-BE49-F238E27FC236}">
+                <a16:creationId xmlns:a16="http://schemas.microsoft.com/office/drawing/2014/main" id="{8CE9423A-756E-9604-472D-001E3E81D468}"/>
+              </a:ext>
+            </a:extLst>
+          </p:cNvPr>
+          <p:cNvSpPr txBox="1"/>
+          <p:nvPr/>
+        </p:nvSpPr>
+        <p:spPr>
+          <a:xfrm>
+            <a:off x="7893335" y="1833700"/>
+            <a:ext cx="709065" cy="328607"/>
+          </a:xfrm>
+          <a:prstGeom prst="rect">
+            <a:avLst/>
+          </a:prstGeom>
+          <a:noFill/>
+        </p:spPr>
+        <p:txBody>
+          <a:bodyPr wrap="square" lIns="91440" tIns="45720" rIns="91440" bIns="45720" anchor="t">
+            <a:spAutoFit/>
+          </a:bodyPr>
+          <a:lstStyle/>
+          <a:p>
+            <a:pPr defTabSz="342900">
+              <a:buClrTx/>
+              <a:defRPr sz="1000">
+                <a:solidFill>
+                  <a:srgbClr val="005DAA"/>
+                </a:solidFill>
+              </a:defRPr>
+            </a:pPr>
+            <a:r>
+              <a:rPr sz="750" kern="1200" dirty="0">
+                <a:solidFill>
+                  <a:srgbClr val="005DAA"/>
+                </a:solidFill>
+                <a:latin typeface="Reddit Sans"/>
+                <a:ea typeface="Reddit Sans"/>
+                <a:cs typeface="+mn-cs"/>
+              </a:rPr>
+              <a:t>◆ </a:t>
+            </a:r>
+            <a:r>
+              <a:rPr lang="es-ES" sz="750" kern="1200">
+                <a:solidFill>
+                  <a:srgbClr val="005DAA"/>
+                </a:solidFill>
+                <a:latin typeface="Reddit Sans"/>
+                <a:ea typeface="Reddit Sans"/>
+                <a:cs typeface="+mn-cs"/>
+              </a:rPr>
+              <a:t>Wave 2</a:t>
+            </a:r>
+            <a:r>
+              <a:rPr lang="es-ES" sz="750" kern="1200" dirty="0">
+                <a:solidFill>
+                  <a:srgbClr val="005DAA"/>
+                </a:solidFill>
+                <a:latin typeface="Reddit Sans"/>
+                <a:ea typeface="Reddit Sans"/>
+                <a:cs typeface="+mn-cs"/>
+              </a:rPr>
+              <a:t>ª</a:t>
+            </a:r>
+            <a:r>
+              <a:rPr sz="750" kern="1200" dirty="0">
+                <a:solidFill>
+                  <a:srgbClr val="005DAA"/>
+                </a:solidFill>
+                <a:latin typeface="Reddit Sans"/>
+                <a:ea typeface="Reddit Sans"/>
+                <a:cs typeface="+mn-cs"/>
+              </a:rPr>
+              <a:t> Transición</a:t>
+            </a:r>
+            <a:endParaRPr lang="es-ES" sz="750" kern="1200" dirty="0">
+              <a:solidFill>
+                <a:srgbClr val="005DAA"/>
+              </a:solidFill>
+              <a:latin typeface="Reddit Sans"/>
+              <a:ea typeface="Reddit Sans"/>
+              <a:cs typeface="+mn-cs"/>
+            </a:endParaRPr>
+          </a:p>
+        </p:txBody>
+      </p:sp>
+      <p:sp>
+        <p:nvSpPr>
+          <p:cNvPr id="75" name="Estrella: 5 puntas 74">
+            <a:extLst>
+              <a:ext uri="{FF2B5EF4-FFF2-40B4-BE49-F238E27FC236}">
+                <a16:creationId xmlns:a16="http://schemas.microsoft.com/office/drawing/2014/main" id="{81F313C5-5B53-A963-0933-5D3806C604DB}"/>
+              </a:ext>
+            </a:extLst>
+          </p:cNvPr>
+          <p:cNvSpPr/>
+          <p:nvPr/>
+        </p:nvSpPr>
+        <p:spPr>
+          <a:xfrm>
+            <a:off x="7744097" y="1859278"/>
+            <a:ext cx="97972" cy="114301"/>
+          </a:xfrm>
+          <a:prstGeom prst="star5">
+            <a:avLst/>
+          </a:prstGeom>
+          <a:solidFill>
+            <a:srgbClr val="92D050"/>
+          </a:solidFill>
+          <a:ln w="6350"/>
+        </p:spPr>
+        <p:style>
+          <a:lnRef idx="2">
+            <a:schemeClr val="accent1">
+              <a:shade val="15000"/>
+            </a:schemeClr>
+          </a:lnRef>
+          <a:fillRef idx="1">
+            <a:schemeClr val="accent1"/>
+          </a:fillRef>
+          <a:effectRef idx="0">
+            <a:schemeClr val="accent1"/>
+          </a:effectRef>
+          <a:fontRef idx="minor">
+            <a:schemeClr val="lt1"/>
+          </a:fontRef>
+        </p:style>
+        <p:txBody>
+          <a:bodyPr rtlCol="0" anchor="ctr"/>
+          <a:lstStyle/>
+          <a:p>
+            <a:pPr algn="ctr"/>
+            <a:endParaRPr lang="es-ES"/>
+          </a:p>
+        </p:txBody>
+      </p:sp>
+      <p:sp>
+        <p:nvSpPr>
+          <p:cNvPr id="77" name="CuadroTexto 76">
+            <a:extLst>
+              <a:ext uri="{FF2B5EF4-FFF2-40B4-BE49-F238E27FC236}">
+                <a16:creationId xmlns:a16="http://schemas.microsoft.com/office/drawing/2014/main" id="{A242F2B6-8686-2AA1-C6E7-A7C77DB8EC93}"/>
+              </a:ext>
+            </a:extLst>
+          </p:cNvPr>
+          <p:cNvSpPr txBox="1"/>
+          <p:nvPr/>
+        </p:nvSpPr>
+        <p:spPr>
+          <a:xfrm>
+            <a:off x="6928759" y="56605"/>
+            <a:ext cx="1475013" cy="200055"/>
+          </a:xfrm>
+          <a:prstGeom prst="rect">
+            <a:avLst/>
+          </a:prstGeom>
+          <a:noFill/>
+        </p:spPr>
+        <p:txBody>
+          <a:bodyPr rot="0" spcFirstLastPara="0" vertOverflow="overflow" horzOverflow="overflow" vert="horz" wrap="square" lIns="91440" tIns="45720" rIns="91440" bIns="45720" numCol="1" spcCol="0" rtlCol="0" fromWordArt="0" anchor="t" anchorCtr="0" forceAA="0" compatLnSpc="1">
+            <a:prstTxWarp prst="textNoShape">
+              <a:avLst/>
+            </a:prstTxWarp>
+            <a:spAutoFit/>
+          </a:bodyPr>
+          <a:lstStyle/>
+          <a:p>
+            <a:r>
+              <a:rPr lang="es-ES" sz="700"/>
+              <a:t>Wave 1 : Sura + </a:t>
+            </a:r>
+            <a:r>
+              <a:rPr lang="es-ES" sz="700" err="1"/>
+              <a:t>Banc</a:t>
+            </a:r>
+            <a:r>
+              <a:rPr lang="es-ES" sz="700"/>
+              <a:t>olombia</a:t>
+            </a:r>
+            <a:endParaRPr lang="es-ES" sz="700" dirty="0"/>
+          </a:p>
+        </p:txBody>
+      </p:sp>
+      <p:sp>
+        <p:nvSpPr>
+          <p:cNvPr id="79" name="Estrella: 5 puntas 78">
+            <a:extLst>
+              <a:ext uri="{FF2B5EF4-FFF2-40B4-BE49-F238E27FC236}">
+                <a16:creationId xmlns:a16="http://schemas.microsoft.com/office/drawing/2014/main" id="{4D253D2B-D6F0-01C7-B0A6-6ABFEA98A181}"/>
+              </a:ext>
+            </a:extLst>
+          </p:cNvPr>
+          <p:cNvSpPr/>
+          <p:nvPr/>
+        </p:nvSpPr>
+        <p:spPr>
+          <a:xfrm>
+            <a:off x="6791598" y="101236"/>
+            <a:ext cx="97972" cy="114301"/>
+          </a:xfrm>
+          <a:prstGeom prst="star5">
+            <a:avLst/>
+          </a:prstGeom>
+          <a:solidFill>
+            <a:schemeClr val="accent6"/>
+          </a:solidFill>
+          <a:ln w="6350"/>
+        </p:spPr>
+        <p:style>
+          <a:lnRef idx="2">
+            <a:schemeClr val="accent1">
+              <a:shade val="15000"/>
+            </a:schemeClr>
+          </a:lnRef>
+          <a:fillRef idx="1">
+            <a:schemeClr val="accent1"/>
+          </a:fillRef>
+          <a:effectRef idx="0">
+            <a:schemeClr val="accent1"/>
+          </a:effectRef>
+          <a:fontRef idx="minor">
+            <a:schemeClr val="lt1"/>
+          </a:fontRef>
+        </p:style>
+        <p:txBody>
+          <a:bodyPr rtlCol="0" anchor="ctr"/>
+          <a:lstStyle/>
+          <a:p>
+            <a:pPr algn="ctr"/>
+            <a:endParaRPr lang="es-ES"/>
+          </a:p>
+        </p:txBody>
+      </p:sp>
+      <p:sp>
+        <p:nvSpPr>
+          <p:cNvPr id="81" name="CuadroTexto 80">
+            <a:extLst>
+              <a:ext uri="{FF2B5EF4-FFF2-40B4-BE49-F238E27FC236}">
+                <a16:creationId xmlns:a16="http://schemas.microsoft.com/office/drawing/2014/main" id="{77344D26-50FF-1B85-A155-2B5D83898AD9}"/>
+              </a:ext>
+            </a:extLst>
+          </p:cNvPr>
+          <p:cNvSpPr txBox="1"/>
+          <p:nvPr/>
+        </p:nvSpPr>
+        <p:spPr>
+          <a:xfrm>
+            <a:off x="6928759" y="274316"/>
+            <a:ext cx="1404255" cy="200055"/>
+          </a:xfrm>
+          <a:prstGeom prst="rect">
+            <a:avLst/>
+          </a:prstGeom>
+          <a:noFill/>
+        </p:spPr>
+        <p:txBody>
+          <a:bodyPr rot="0" spcFirstLastPara="0" vertOverflow="overflow" horzOverflow="overflow" vert="horz" wrap="square" lIns="91440" tIns="45720" rIns="91440" bIns="45720" numCol="1" spcCol="0" rtlCol="0" fromWordArt="0" anchor="t" anchorCtr="0" forceAA="0" compatLnSpc="1">
+            <a:prstTxWarp prst="textNoShape">
+              <a:avLst/>
+            </a:prstTxWarp>
+            <a:spAutoFit/>
+          </a:bodyPr>
+          <a:lstStyle/>
+          <a:p>
+            <a:r>
+              <a:rPr lang="es-ES" sz="700"/>
+              <a:t>Wave 2 : XM, AWS, Medicarte</a:t>
+            </a:r>
+          </a:p>
+        </p:txBody>
+      </p:sp>
+      <p:sp>
+        <p:nvSpPr>
+          <p:cNvPr id="83" name="Estrella: 5 puntas 82">
+            <a:extLst>
+              <a:ext uri="{FF2B5EF4-FFF2-40B4-BE49-F238E27FC236}">
+                <a16:creationId xmlns:a16="http://schemas.microsoft.com/office/drawing/2014/main" id="{D30AAF17-737D-3CBC-3FDD-0324F5E06EAF}"/>
+              </a:ext>
+            </a:extLst>
+          </p:cNvPr>
+          <p:cNvSpPr/>
+          <p:nvPr/>
+        </p:nvSpPr>
+        <p:spPr>
+          <a:xfrm>
+            <a:off x="6791598" y="313507"/>
+            <a:ext cx="97972" cy="114301"/>
+          </a:xfrm>
+          <a:prstGeom prst="star5">
+            <a:avLst/>
+          </a:prstGeom>
+          <a:solidFill>
+            <a:srgbClr val="7030A0"/>
+          </a:solidFill>
+          <a:ln w="6350"/>
+        </p:spPr>
+        <p:style>
+          <a:lnRef idx="2">
+            <a:schemeClr val="accent1">
+              <a:shade val="15000"/>
+            </a:schemeClr>
+          </a:lnRef>
+          <a:fillRef idx="1">
+            <a:schemeClr val="accent1"/>
+          </a:fillRef>
+          <a:effectRef idx="0">
+            <a:schemeClr val="accent1"/>
+          </a:effectRef>
+          <a:fontRef idx="minor">
+            <a:schemeClr val="lt1"/>
+          </a:fontRef>
+        </p:style>
+        <p:txBody>
+          <a:bodyPr rtlCol="0" anchor="ctr"/>
+          <a:lstStyle/>
+          <a:p>
+            <a:pPr algn="ctr"/>
+            <a:endParaRPr lang="es-ES"/>
+          </a:p>
+        </p:txBody>
+      </p:sp>
+      <p:sp>
+        <p:nvSpPr>
+          <p:cNvPr id="85" name="Estrella: 5 puntas 84">
+            <a:extLst>
+              <a:ext uri="{FF2B5EF4-FFF2-40B4-BE49-F238E27FC236}">
+                <a16:creationId xmlns:a16="http://schemas.microsoft.com/office/drawing/2014/main" id="{D96B36E2-EE26-D336-A4A4-5DA35E386A50}"/>
+              </a:ext>
+            </a:extLst>
+          </p:cNvPr>
+          <p:cNvSpPr/>
+          <p:nvPr/>
+        </p:nvSpPr>
+        <p:spPr>
+          <a:xfrm>
+            <a:off x="6797040" y="520335"/>
+            <a:ext cx="97972" cy="114301"/>
+          </a:xfrm>
+          <a:prstGeom prst="star5">
+            <a:avLst/>
+          </a:prstGeom>
+          <a:solidFill>
+            <a:srgbClr val="92D050"/>
+          </a:solidFill>
+          <a:ln w="6350"/>
+        </p:spPr>
+        <p:style>
+          <a:lnRef idx="2">
+            <a:schemeClr val="accent1">
+              <a:shade val="15000"/>
+            </a:schemeClr>
+          </a:lnRef>
+          <a:fillRef idx="1">
+            <a:schemeClr val="accent1"/>
+          </a:fillRef>
+          <a:effectRef idx="0">
+            <a:schemeClr val="accent1"/>
+          </a:effectRef>
+          <a:fontRef idx="minor">
+            <a:schemeClr val="lt1"/>
+          </a:fontRef>
+        </p:style>
+        <p:txBody>
+          <a:bodyPr rtlCol="0" anchor="ctr"/>
+          <a:lstStyle/>
+          <a:p>
+            <a:pPr algn="ctr"/>
+            <a:endParaRPr lang="es-ES"/>
+          </a:p>
+        </p:txBody>
+      </p:sp>
+      <p:sp>
+        <p:nvSpPr>
+          <p:cNvPr id="87" name="CuadroTexto 86">
+            <a:extLst>
+              <a:ext uri="{FF2B5EF4-FFF2-40B4-BE49-F238E27FC236}">
+                <a16:creationId xmlns:a16="http://schemas.microsoft.com/office/drawing/2014/main" id="{7C692534-F65E-5138-FDEF-C0B07CBF6B31}"/>
+              </a:ext>
+            </a:extLst>
+          </p:cNvPr>
+          <p:cNvSpPr txBox="1"/>
+          <p:nvPr/>
+        </p:nvSpPr>
+        <p:spPr>
+          <a:xfrm>
+            <a:off x="6906988" y="464817"/>
+            <a:ext cx="1605640" cy="307777"/>
+          </a:xfrm>
+          <a:prstGeom prst="rect">
+            <a:avLst/>
+          </a:prstGeom>
+          <a:noFill/>
+        </p:spPr>
+        <p:txBody>
+          <a:bodyPr rot="0" spcFirstLastPara="0" vertOverflow="overflow" horzOverflow="overflow" vert="horz" wrap="square" lIns="91440" tIns="45720" rIns="91440" bIns="45720" numCol="1" spcCol="0" rtlCol="0" fromWordArt="0" anchor="t" anchorCtr="0" forceAA="0" compatLnSpc="1">
+            <a:prstTxWarp prst="textNoShape">
+              <a:avLst/>
+            </a:prstTxWarp>
+            <a:spAutoFit/>
+          </a:bodyPr>
+          <a:lstStyle/>
+          <a:p>
+            <a:r>
+              <a:rPr lang="es-ES" sz="700"/>
+              <a:t>Lanzamiento servicio a nuevos clientes</a:t>
+            </a:r>
+            <a:endParaRPr lang="es-ES"/>
+          </a:p>
+        </p:txBody>
+      </p:sp>
+      <p:sp>
+        <p:nvSpPr>
+          <p:cNvPr id="88" name="CuadroTexto 87">
+            <a:extLst>
+              <a:ext uri="{FF2B5EF4-FFF2-40B4-BE49-F238E27FC236}">
+                <a16:creationId xmlns:a16="http://schemas.microsoft.com/office/drawing/2014/main" id="{3C497DDC-BF2A-0C01-A11A-988B41A22048}"/>
+              </a:ext>
+            </a:extLst>
+          </p:cNvPr>
+          <p:cNvSpPr txBox="1"/>
+          <p:nvPr/>
+        </p:nvSpPr>
+        <p:spPr>
+          <a:xfrm>
+            <a:off x="6623954" y="2207077"/>
+            <a:ext cx="1975758" cy="2569934"/>
+          </a:xfrm>
+          <a:prstGeom prst="rect">
+            <a:avLst/>
+          </a:prstGeom>
+          <a:noFill/>
+        </p:spPr>
+        <p:txBody>
+          <a:bodyPr rot="0" spcFirstLastPara="0" vertOverflow="overflow" horzOverflow="overflow" vert="horz" wrap="square" lIns="91440" tIns="45720" rIns="91440" bIns="45720" numCol="1" spcCol="0" rtlCol="0" fromWordArt="0" anchor="t" anchorCtr="0" forceAA="0" compatLnSpc="1">
+            <a:prstTxWarp prst="textNoShape">
+              <a:avLst/>
+            </a:prstTxWarp>
+            <a:spAutoFit/>
+          </a:bodyPr>
+          <a:lstStyle/>
+          <a:p>
+            <a:pPr marL="171450" indent="-171450">
+              <a:buFont typeface="Arial,Sans-Serif"/>
+              <a:buChar char="•"/>
+            </a:pPr>
+            <a:r>
+              <a:rPr lang="es-ES" sz="700">
+                <a:latin typeface="Reddit Sans"/>
+                <a:ea typeface="Reddit Sans"/>
+              </a:rPr>
+              <a:t>Artefactos nuevos equipos comercial (propuestas, contratos, ...)</a:t>
+            </a:r>
+            <a:endParaRPr lang="es-ES" sz="700" dirty="0">
+              <a:latin typeface="Reddit Sans"/>
+              <a:ea typeface="Reddit Sans"/>
+            </a:endParaRPr>
+          </a:p>
+          <a:p>
+            <a:pPr marL="171450" indent="-171450">
+              <a:buFont typeface="Arial,Sans-Serif"/>
+              <a:buChar char="•"/>
+            </a:pPr>
+            <a:endParaRPr lang="es-ES" sz="700" dirty="0">
+              <a:latin typeface="Reddit Sans"/>
+              <a:ea typeface="Reddit Sans"/>
+            </a:endParaRPr>
+          </a:p>
+          <a:p>
+            <a:pPr marL="171450" indent="-171450">
+              <a:buFont typeface="Arial,Sans-Serif"/>
+              <a:buChar char="•"/>
+            </a:pPr>
+            <a:r>
+              <a:rPr lang="es-ES" sz="700">
+                <a:latin typeface="Reddit Sans"/>
+                <a:ea typeface="Reddit Sans"/>
+              </a:rPr>
+              <a:t>Artefactos nuevos equipos de la operación</a:t>
+            </a:r>
+            <a:endParaRPr lang="es-ES" sz="700" dirty="0">
+              <a:latin typeface="Reddit Sans"/>
+              <a:ea typeface="Reddit Sans"/>
+            </a:endParaRPr>
+          </a:p>
+          <a:p>
+            <a:pPr marL="171450" indent="-171450">
+              <a:buFont typeface="Arial,Sans-Serif"/>
+              <a:buChar char="•"/>
+            </a:pPr>
+            <a:endParaRPr lang="es-ES" sz="700" dirty="0">
+              <a:latin typeface="Reddit Sans"/>
+              <a:ea typeface="Reddit Sans"/>
+            </a:endParaRPr>
+          </a:p>
+          <a:p>
+            <a:pPr marL="171450" indent="-171450">
+              <a:buChar char="•"/>
+            </a:pPr>
+            <a:r>
+              <a:rPr lang="es-ES" sz="700">
+                <a:latin typeface="Reddit Sans"/>
+              </a:rPr>
+              <a:t>Actualización del servicio en la herramienta</a:t>
+            </a:r>
+            <a:r>
+              <a:rPr lang="es-ES" sz="700" dirty="0">
+                <a:latin typeface="Reddit Sans"/>
+              </a:rPr>
+              <a:t> de procesos</a:t>
+            </a:r>
+            <a:endParaRPr lang="es-ES" sz="700"/>
+          </a:p>
+          <a:p>
+            <a:pPr marL="171450" indent="-171450">
+              <a:buChar char="•"/>
+            </a:pPr>
+            <a:endParaRPr lang="es-ES" sz="700" dirty="0">
+              <a:latin typeface="Reddit Sans"/>
+            </a:endParaRPr>
+          </a:p>
+          <a:p>
+            <a:pPr marL="171450" indent="-171450">
+              <a:buChar char="•"/>
+            </a:pPr>
+            <a:r>
+              <a:rPr lang="es-ES" sz="700" dirty="0">
+                <a:latin typeface="Reddit Sans"/>
+              </a:rPr>
+              <a:t>Lanzamiento </a:t>
+            </a:r>
+            <a:r>
+              <a:rPr lang="es-ES" sz="700">
+                <a:latin typeface="Reddit Sans"/>
+              </a:rPr>
+              <a:t>ofici</a:t>
+            </a:r>
+            <a:r>
+              <a:rPr lang="es-ES" sz="700" dirty="0">
+                <a:latin typeface="Reddit Sans"/>
+              </a:rPr>
+              <a:t>al del servicio estandarizado de mesas de servicio de </a:t>
+            </a:r>
+            <a:r>
+              <a:rPr lang="es-ES" sz="700">
+                <a:latin typeface="Reddit Sans"/>
+              </a:rPr>
+              <a:t>próxima</a:t>
+            </a:r>
+            <a:r>
+              <a:rPr lang="es-ES" sz="700" dirty="0">
+                <a:latin typeface="Reddit Sans"/>
+              </a:rPr>
+              <a:t> generación</a:t>
+            </a:r>
+          </a:p>
+          <a:p>
+            <a:pPr marL="171450" indent="-171450">
+              <a:buChar char="•"/>
+            </a:pPr>
+            <a:endParaRPr lang="es-ES" sz="700" dirty="0">
+              <a:latin typeface="Reddit Sans"/>
+            </a:endParaRPr>
+          </a:p>
+          <a:p>
+            <a:pPr marL="171450" indent="-171450">
+              <a:buChar char="•"/>
+            </a:pPr>
+            <a:r>
+              <a:rPr lang="es-ES" sz="700" dirty="0">
+                <a:latin typeface="Reddit Sans"/>
+              </a:rPr>
+              <a:t>Identificar automatizaciones y </a:t>
+            </a:r>
+            <a:r>
+              <a:rPr lang="es-ES" sz="700">
+                <a:latin typeface="Reddit Sans"/>
+              </a:rPr>
+              <a:t>evolución continua del servicio</a:t>
+            </a:r>
+            <a:endParaRPr lang="es-ES" sz="700" dirty="0">
+              <a:latin typeface="Reddit Sans"/>
+            </a:endParaRPr>
+          </a:p>
+          <a:p>
+            <a:pPr marL="171450" indent="-171450">
+              <a:buChar char="•"/>
+            </a:pPr>
+            <a:endParaRPr lang="es-ES" sz="700" dirty="0">
+              <a:latin typeface="Reddit Sans"/>
+            </a:endParaRPr>
+          </a:p>
+          <a:p>
+            <a:pPr marL="171450" indent="-171450">
+              <a:buChar char="•"/>
+            </a:pPr>
+            <a:r>
+              <a:rPr lang="es-ES" sz="700">
+                <a:latin typeface="Reddit Sans"/>
+                <a:ea typeface="Reddit Sans"/>
+              </a:rPr>
+              <a:t>Habilitación equipo de la operación wave 2</a:t>
+            </a:r>
+            <a:endParaRPr lang="es-ES" sz="700">
+              <a:ea typeface="Reddit Sans"/>
+            </a:endParaRPr>
+          </a:p>
+          <a:p>
+            <a:pPr marL="171450" indent="-171450">
+              <a:buChar char="•"/>
+            </a:pPr>
+            <a:endParaRPr lang="es-ES" sz="700" dirty="0">
+              <a:latin typeface="Reddit Sans"/>
+              <a:ea typeface="Reddit Sans"/>
+            </a:endParaRPr>
+          </a:p>
+          <a:p>
+            <a:pPr marL="171450" indent="-171450">
+              <a:buFont typeface="Arial,Sans-Serif"/>
+              <a:buChar char="•"/>
+            </a:pPr>
+            <a:r>
+              <a:rPr lang="es-ES" sz="700">
+                <a:latin typeface="Reddit Sans"/>
+                <a:ea typeface="Reddit Sans"/>
+              </a:rPr>
+              <a:t>Habilitación cliente sobre la evolución del servicio wave 2</a:t>
+            </a:r>
+            <a:endParaRPr lang="es-ES" sz="700" dirty="0">
+              <a:latin typeface="Reddit Sans"/>
+              <a:ea typeface="Reddit Sans"/>
+            </a:endParaRPr>
+          </a:p>
+          <a:p>
+            <a:pPr marL="171450" indent="-171450">
+              <a:buFont typeface="Arial,Sans-Serif"/>
+              <a:buChar char="•"/>
+            </a:pPr>
+            <a:endParaRPr lang="es-ES" sz="700" dirty="0">
+              <a:latin typeface="Reddit Sans"/>
+              <a:ea typeface="Reddit Sans"/>
+            </a:endParaRPr>
+          </a:p>
+          <a:p>
+            <a:pPr marL="171450" indent="-171450">
+              <a:buFont typeface="Arial,Sans-Serif"/>
+              <a:buChar char="•"/>
+            </a:pPr>
+            <a:r>
+              <a:rPr lang="es-ES" sz="700">
+                <a:latin typeface="Reddit Sans"/>
+                <a:ea typeface="Reddit Sans"/>
+              </a:rPr>
+              <a:t>Planes de evolución del servicio</a:t>
+            </a:r>
+            <a:endParaRPr lang="es-ES" sz="700" dirty="0">
+              <a:latin typeface="Reddit Sans"/>
+              <a:ea typeface="Reddit Sans"/>
+            </a:endParaRPr>
+          </a:p>
+        </p:txBody>
+      </p:sp>
+    </p:spTree>
+    <p:extLst>
+      <p:ext uri="{BB962C8B-B14F-4D97-AF65-F5344CB8AC3E}">
+        <p14:creationId xmlns:p14="http://schemas.microsoft.com/office/powerpoint/2010/main" val="3541293710"/>
+      </p:ext>
+    </p:extLst>
   </p:cSld>
   <p:clrMapOvr>
     <a:masterClrMapping/>
